--- a/docs/ParamsCalibrator Light Mode.pptx
+++ b/docs/ParamsCalibrator Light Mode.pptx
@@ -5,7 +5,7 @@
     <p:sldMasterId id="2147483672" r:id="rId1"/>
   </p:sldMasterIdLst>
   <p:notesMasterIdLst>
-    <p:notesMasterId r:id="rId21"/>
+    <p:notesMasterId r:id="rId25"/>
   </p:notesMasterIdLst>
   <p:sldIdLst>
     <p:sldId id="292" r:id="rId2"/>
@@ -22,11 +22,15 @@
     <p:sldId id="277" r:id="rId13"/>
     <p:sldId id="278" r:id="rId14"/>
     <p:sldId id="279" r:id="rId15"/>
-    <p:sldId id="280" r:id="rId16"/>
-    <p:sldId id="281" r:id="rId17"/>
-    <p:sldId id="272" r:id="rId18"/>
-    <p:sldId id="282" r:id="rId19"/>
+    <p:sldId id="281" r:id="rId16"/>
+    <p:sldId id="272" r:id="rId17"/>
+    <p:sldId id="282" r:id="rId18"/>
+    <p:sldId id="297" r:id="rId19"/>
     <p:sldId id="283" r:id="rId20"/>
+    <p:sldId id="258" r:id="rId21"/>
+    <p:sldId id="256" r:id="rId22"/>
+    <p:sldId id="301" r:id="rId23"/>
+    <p:sldId id="280" r:id="rId24"/>
   </p:sldIdLst>
   <p:sldSz cx="12192000" cy="6858000"/>
   <p:notesSz cx="6858000" cy="9144000"/>
@@ -226,7 +230,7 @@
           <a:p>
             <a:fld id="{B5885A7D-505C-4218-BCB8-560D5C17BB9B}" type="datetimeFigureOut">
               <a:rPr lang="en-GB" smtClean="0"/>
-              <a:t>25/08/2026</a:t>
+              <a:t>26/08/2026</a:t>
             </a:fld>
             <a:endParaRPr lang="en-GB"/>
           </a:p>
@@ -757,7 +761,7 @@
           <a:p>
             <a:fld id="{79AD5287-36FD-4D30-93D0-5E26E609679A}" type="datetime1">
               <a:rPr lang="en-US" smtClean="0"/>
-              <a:t>8/25/2026</a:t>
+              <a:t>8/26/2026</a:t>
             </a:fld>
             <a:endParaRPr lang="en-US"/>
           </a:p>
@@ -831,186 +835,6 @@
 </file>
 
 <file path=ppt/slideLayouts/slideLayout10.xml><?xml version="1.0" encoding="utf-8"?>
-<p:sldLayout xmlns:a="http://schemas.openxmlformats.org/drawingml/2006/main" xmlns:r="http://schemas.openxmlformats.org/officeDocument/2006/relationships" xmlns:p="http://schemas.openxmlformats.org/presentationml/2006/main" type="vertTx">
-  <p:cSld name="Title and Vertical Text">
-    <p:spTree>
-      <p:nvGrpSpPr>
-        <p:cNvPr id="1" name=""/>
-        <p:cNvGrpSpPr/>
-        <p:nvPr/>
-      </p:nvGrpSpPr>
-      <p:grpSpPr>
-        <a:xfrm>
-          <a:off x="0" y="0"/>
-          <a:ext cx="0" cy="0"/>
-          <a:chOff x="0" y="0"/>
-          <a:chExt cx="0" cy="0"/>
-        </a:xfrm>
-      </p:grpSpPr>
-      <p:sp>
-        <p:nvSpPr>
-          <p:cNvPr id="2" name="Title 1"/>
-          <p:cNvSpPr>
-            <a:spLocks noGrp="1"/>
-          </p:cNvSpPr>
-          <p:nvPr>
-            <p:ph type="title"/>
-          </p:nvPr>
-        </p:nvSpPr>
-        <p:spPr/>
-        <p:txBody>
-          <a:bodyPr/>
-          <a:lstStyle/>
-          <a:p>
-            <a:r>
-              <a:rPr lang="en-US"/>
-              <a:t>Click to edit Master title style</a:t>
-            </a:r>
-          </a:p>
-        </p:txBody>
-      </p:sp>
-      <p:sp>
-        <p:nvSpPr>
-          <p:cNvPr id="3" name="Vertical Text Placeholder 2"/>
-          <p:cNvSpPr>
-            <a:spLocks noGrp="1"/>
-          </p:cNvSpPr>
-          <p:nvPr>
-            <p:ph type="body" orient="vert" idx="1"/>
-          </p:nvPr>
-        </p:nvSpPr>
-        <p:spPr/>
-        <p:txBody>
-          <a:bodyPr vert="eaVert"/>
-          <a:lstStyle/>
-          <a:p>
-            <a:pPr lvl="0"/>
-            <a:r>
-              <a:rPr lang="en-US"/>
-              <a:t>Click to edit Master text styles</a:t>
-            </a:r>
-          </a:p>
-          <a:p>
-            <a:pPr lvl="1"/>
-            <a:r>
-              <a:rPr lang="en-US"/>
-              <a:t>Second level</a:t>
-            </a:r>
-          </a:p>
-          <a:p>
-            <a:pPr lvl="2"/>
-            <a:r>
-              <a:rPr lang="en-US"/>
-              <a:t>Third level</a:t>
-            </a:r>
-          </a:p>
-          <a:p>
-            <a:pPr lvl="3"/>
-            <a:r>
-              <a:rPr lang="en-US"/>
-              <a:t>Fourth level</a:t>
-            </a:r>
-          </a:p>
-          <a:p>
-            <a:pPr lvl="4"/>
-            <a:r>
-              <a:rPr lang="en-US"/>
-              <a:t>Fifth level</a:t>
-            </a:r>
-          </a:p>
-        </p:txBody>
-      </p:sp>
-      <p:sp>
-        <p:nvSpPr>
-          <p:cNvPr id="4" name="Date Placeholder 3"/>
-          <p:cNvSpPr>
-            <a:spLocks noGrp="1"/>
-          </p:cNvSpPr>
-          <p:nvPr>
-            <p:ph type="dt" sz="half" idx="10"/>
-          </p:nvPr>
-        </p:nvSpPr>
-        <p:spPr/>
-        <p:txBody>
-          <a:bodyPr/>
-          <a:lstStyle/>
-          <a:p>
-            <a:fld id="{8194E2EC-6C6A-460F-8082-C404C2D77A6E}" type="datetime1">
-              <a:rPr lang="en-US" smtClean="0"/>
-              <a:t>8/25/2026</a:t>
-            </a:fld>
-            <a:endParaRPr lang="en-US"/>
-          </a:p>
-        </p:txBody>
-      </p:sp>
-      <p:sp>
-        <p:nvSpPr>
-          <p:cNvPr id="5" name="Footer Placeholder 4"/>
-          <p:cNvSpPr>
-            <a:spLocks noGrp="1"/>
-          </p:cNvSpPr>
-          <p:nvPr>
-            <p:ph type="ftr" sz="quarter" idx="11"/>
-          </p:nvPr>
-        </p:nvSpPr>
-        <p:spPr/>
-        <p:txBody>
-          <a:bodyPr/>
-          <a:lstStyle/>
-          <a:p>
-            <a:endParaRPr lang="en-US"/>
-          </a:p>
-        </p:txBody>
-      </p:sp>
-      <p:sp>
-        <p:nvSpPr>
-          <p:cNvPr id="6" name="Slide Number Placeholder 5"/>
-          <p:cNvSpPr>
-            <a:spLocks noGrp="1"/>
-          </p:cNvSpPr>
-          <p:nvPr>
-            <p:ph type="sldNum" sz="quarter" idx="12"/>
-          </p:nvPr>
-        </p:nvSpPr>
-        <p:spPr/>
-        <p:txBody>
-          <a:bodyPr/>
-          <a:lstStyle/>
-          <a:p>
-            <a:fld id="{C1FF6DA9-008F-8B48-92A6-B652298478BF}" type="slidenum">
-              <a:rPr lang="en-US" smtClean="0"/>
-              <a:t>‹#›</a:t>
-            </a:fld>
-            <a:endParaRPr lang="en-US"/>
-          </a:p>
-        </p:txBody>
-      </p:sp>
-    </p:spTree>
-    <p:extLst>
-      <p:ext uri="{BB962C8B-B14F-4D97-AF65-F5344CB8AC3E}">
-        <p14:creationId xmlns:p14="http://schemas.microsoft.com/office/powerpoint/2010/main" val="2910927964"/>
-      </p:ext>
-    </p:extLst>
-  </p:cSld>
-  <p:clrMapOvr>
-    <a:masterClrMapping/>
-  </p:clrMapOvr>
-  <mc:AlternateContent xmlns:mc="http://schemas.openxmlformats.org/markup-compatibility/2006" xmlns:p14="http://schemas.microsoft.com/office/powerpoint/2010/main">
-    <mc:Choice Requires="p14">
-      <p:transition p14:dur="250">
-        <p:fade/>
-      </p:transition>
-    </mc:Choice>
-    <mc:Fallback xmlns="">
-      <p:transition>
-        <p:fade/>
-      </p:transition>
-    </mc:Fallback>
-  </mc:AlternateContent>
-</p:sldLayout>
-</file>
-
-<file path=ppt/slideLayouts/slideLayout11.xml><?xml version="1.0" encoding="utf-8"?>
 <p:sldLayout xmlns:a="http://schemas.openxmlformats.org/drawingml/2006/main" xmlns:r="http://schemas.openxmlformats.org/officeDocument/2006/relationships" xmlns:p="http://schemas.openxmlformats.org/presentationml/2006/main" type="vertTitleAndTx">
   <p:cSld name="Vertical Title and Text">
     <p:spTree>
@@ -1127,7 +951,7 @@
           <a:p>
             <a:fld id="{B44504EB-207A-4480-A401-E95D6C51D63B}" type="datetime1">
               <a:rPr lang="en-US" smtClean="0"/>
-              <a:t>8/25/2026</a:t>
+              <a:t>8/26/2026</a:t>
             </a:fld>
             <a:endParaRPr lang="en-US"/>
           </a:p>
@@ -1201,186 +1025,6 @@
 </file>
 
 <file path=ppt/slideLayouts/slideLayout2.xml><?xml version="1.0" encoding="utf-8"?>
-<p:sldLayout xmlns:a="http://schemas.openxmlformats.org/drawingml/2006/main" xmlns:r="http://schemas.openxmlformats.org/officeDocument/2006/relationships" xmlns:p="http://schemas.openxmlformats.org/presentationml/2006/main" type="obj">
-  <p:cSld name="Title and Content">
-    <p:spTree>
-      <p:nvGrpSpPr>
-        <p:cNvPr id="1" name=""/>
-        <p:cNvGrpSpPr/>
-        <p:nvPr/>
-      </p:nvGrpSpPr>
-      <p:grpSpPr>
-        <a:xfrm>
-          <a:off x="0" y="0"/>
-          <a:ext cx="0" cy="0"/>
-          <a:chOff x="0" y="0"/>
-          <a:chExt cx="0" cy="0"/>
-        </a:xfrm>
-      </p:grpSpPr>
-      <p:sp>
-        <p:nvSpPr>
-          <p:cNvPr id="2" name="Title 1"/>
-          <p:cNvSpPr>
-            <a:spLocks noGrp="1"/>
-          </p:cNvSpPr>
-          <p:nvPr>
-            <p:ph type="title"/>
-          </p:nvPr>
-        </p:nvSpPr>
-        <p:spPr/>
-        <p:txBody>
-          <a:bodyPr/>
-          <a:lstStyle/>
-          <a:p>
-            <a:r>
-              <a:rPr lang="en-US"/>
-              <a:t>Click to edit Master title style</a:t>
-            </a:r>
-          </a:p>
-        </p:txBody>
-      </p:sp>
-      <p:sp>
-        <p:nvSpPr>
-          <p:cNvPr id="3" name="Content Placeholder 2"/>
-          <p:cNvSpPr>
-            <a:spLocks noGrp="1"/>
-          </p:cNvSpPr>
-          <p:nvPr>
-            <p:ph idx="1"/>
-          </p:nvPr>
-        </p:nvSpPr>
-        <p:spPr/>
-        <p:txBody>
-          <a:bodyPr/>
-          <a:lstStyle/>
-          <a:p>
-            <a:pPr lvl="0"/>
-            <a:r>
-              <a:rPr lang="en-US"/>
-              <a:t>Click to edit Master text styles</a:t>
-            </a:r>
-          </a:p>
-          <a:p>
-            <a:pPr lvl="1"/>
-            <a:r>
-              <a:rPr lang="en-US"/>
-              <a:t>Second level</a:t>
-            </a:r>
-          </a:p>
-          <a:p>
-            <a:pPr lvl="2"/>
-            <a:r>
-              <a:rPr lang="en-US"/>
-              <a:t>Third level</a:t>
-            </a:r>
-          </a:p>
-          <a:p>
-            <a:pPr lvl="3"/>
-            <a:r>
-              <a:rPr lang="en-US"/>
-              <a:t>Fourth level</a:t>
-            </a:r>
-          </a:p>
-          <a:p>
-            <a:pPr lvl="4"/>
-            <a:r>
-              <a:rPr lang="en-US"/>
-              <a:t>Fifth level</a:t>
-            </a:r>
-          </a:p>
-        </p:txBody>
-      </p:sp>
-      <p:sp>
-        <p:nvSpPr>
-          <p:cNvPr id="4" name="Date Placeholder 3"/>
-          <p:cNvSpPr>
-            <a:spLocks noGrp="1"/>
-          </p:cNvSpPr>
-          <p:nvPr>
-            <p:ph type="dt" sz="half" idx="10"/>
-          </p:nvPr>
-        </p:nvSpPr>
-        <p:spPr/>
-        <p:txBody>
-          <a:bodyPr/>
-          <a:lstStyle/>
-          <a:p>
-            <a:fld id="{E6350124-684B-4887-882C-CBA606BD73A4}" type="datetime1">
-              <a:rPr lang="en-US" smtClean="0"/>
-              <a:t>8/25/2026</a:t>
-            </a:fld>
-            <a:endParaRPr lang="en-US"/>
-          </a:p>
-        </p:txBody>
-      </p:sp>
-      <p:sp>
-        <p:nvSpPr>
-          <p:cNvPr id="5" name="Footer Placeholder 4"/>
-          <p:cNvSpPr>
-            <a:spLocks noGrp="1"/>
-          </p:cNvSpPr>
-          <p:nvPr>
-            <p:ph type="ftr" sz="quarter" idx="11"/>
-          </p:nvPr>
-        </p:nvSpPr>
-        <p:spPr/>
-        <p:txBody>
-          <a:bodyPr/>
-          <a:lstStyle/>
-          <a:p>
-            <a:endParaRPr lang="en-US"/>
-          </a:p>
-        </p:txBody>
-      </p:sp>
-      <p:sp>
-        <p:nvSpPr>
-          <p:cNvPr id="6" name="Slide Number Placeholder 5"/>
-          <p:cNvSpPr>
-            <a:spLocks noGrp="1"/>
-          </p:cNvSpPr>
-          <p:nvPr>
-            <p:ph type="sldNum" sz="quarter" idx="12"/>
-          </p:nvPr>
-        </p:nvSpPr>
-        <p:spPr/>
-        <p:txBody>
-          <a:bodyPr/>
-          <a:lstStyle/>
-          <a:p>
-            <a:fld id="{C1FF6DA9-008F-8B48-92A6-B652298478BF}" type="slidenum">
-              <a:rPr lang="en-US" smtClean="0"/>
-              <a:t>‹#›</a:t>
-            </a:fld>
-            <a:endParaRPr lang="en-US"/>
-          </a:p>
-        </p:txBody>
-      </p:sp>
-    </p:spTree>
-    <p:extLst>
-      <p:ext uri="{BB962C8B-B14F-4D97-AF65-F5344CB8AC3E}">
-        <p14:creationId xmlns:p14="http://schemas.microsoft.com/office/powerpoint/2010/main" val="2614314258"/>
-      </p:ext>
-    </p:extLst>
-  </p:cSld>
-  <p:clrMapOvr>
-    <a:masterClrMapping/>
-  </p:clrMapOvr>
-  <mc:AlternateContent xmlns:mc="http://schemas.openxmlformats.org/markup-compatibility/2006" xmlns:p14="http://schemas.microsoft.com/office/powerpoint/2010/main">
-    <mc:Choice Requires="p14">
-      <p:transition p14:dur="250">
-        <p:fade/>
-      </p:transition>
-    </mc:Choice>
-    <mc:Fallback xmlns="">
-      <p:transition>
-        <p:fade/>
-      </p:transition>
-    </mc:Fallback>
-  </mc:AlternateContent>
-</p:sldLayout>
-</file>
-
-<file path=ppt/slideLayouts/slideLayout3.xml><?xml version="1.0" encoding="utf-8"?>
 <p:sldLayout xmlns:a="http://schemas.openxmlformats.org/drawingml/2006/main" xmlns:r="http://schemas.openxmlformats.org/officeDocument/2006/relationships" xmlns:p="http://schemas.openxmlformats.org/presentationml/2006/main" type="secHead">
   <p:cSld name="Section Header">
     <p:spTree>
@@ -1564,7 +1208,7 @@
           <a:p>
             <a:fld id="{CB83B209-8E21-4BF8-BF16-EE1798512C30}" type="datetime1">
               <a:rPr lang="en-US" smtClean="0"/>
-              <a:t>8/25/2026</a:t>
+              <a:t>8/26/2026</a:t>
             </a:fld>
             <a:endParaRPr lang="en-US"/>
           </a:p>
@@ -1637,7 +1281,7 @@
 </p:sldLayout>
 </file>
 
-<file path=ppt/slideLayouts/slideLayout4.xml><?xml version="1.0" encoding="utf-8"?>
+<file path=ppt/slideLayouts/slideLayout3.xml><?xml version="1.0" encoding="utf-8"?>
 <p:sldLayout xmlns:a="http://schemas.openxmlformats.org/drawingml/2006/main" xmlns:r="http://schemas.openxmlformats.org/officeDocument/2006/relationships" xmlns:p="http://schemas.openxmlformats.org/presentationml/2006/main" type="twoObj">
   <p:cSld name="Two Content">
     <p:spTree>
@@ -1861,7 +1505,7 @@
           <a:p>
             <a:fld id="{26C5CF5B-B0B2-49F6-9CC0-BB384280F61E}" type="datetime1">
               <a:rPr lang="en-US" smtClean="0"/>
-              <a:t>8/25/2026</a:t>
+              <a:t>8/26/2026</a:t>
             </a:fld>
             <a:endParaRPr lang="en-US"/>
           </a:p>
@@ -1934,7 +1578,7 @@
 </p:sldLayout>
 </file>
 
-<file path=ppt/slideLayouts/slideLayout5.xml><?xml version="1.0" encoding="utf-8"?>
+<file path=ppt/slideLayouts/slideLayout4.xml><?xml version="1.0" encoding="utf-8"?>
 <p:sldLayout xmlns:a="http://schemas.openxmlformats.org/drawingml/2006/main" xmlns:r="http://schemas.openxmlformats.org/officeDocument/2006/relationships" xmlns:p="http://schemas.openxmlformats.org/presentationml/2006/main" type="twoTxTwoObj">
   <p:cSld name="Comparison">
     <p:spTree>
@@ -2292,7 +1936,7 @@
           <a:p>
             <a:fld id="{0163206D-DA0F-4100-AE2C-B1E9FCEF6D4F}" type="datetime1">
               <a:rPr lang="en-US" smtClean="0"/>
-              <a:t>8/25/2026</a:t>
+              <a:t>8/26/2026</a:t>
             </a:fld>
             <a:endParaRPr lang="en-US"/>
           </a:p>
@@ -2365,7 +2009,7 @@
 </p:sldLayout>
 </file>
 
-<file path=ppt/slideLayouts/slideLayout6.xml><?xml version="1.0" encoding="utf-8"?>
+<file path=ppt/slideLayouts/slideLayout5.xml><?xml version="1.0" encoding="utf-8"?>
 <p:sldLayout xmlns:a="http://schemas.openxmlformats.org/drawingml/2006/main" xmlns:r="http://schemas.openxmlformats.org/officeDocument/2006/relationships" xmlns:p="http://schemas.openxmlformats.org/presentationml/2006/main" type="titleOnly">
   <p:cSld name="Title Only">
     <p:spTree>
@@ -2421,7 +2065,7 @@
           <a:p>
             <a:fld id="{AE0A0442-76CF-480A-8636-183A2A3578C2}" type="datetime1">
               <a:rPr lang="en-US" smtClean="0"/>
-              <a:t>8/25/2026</a:t>
+              <a:t>8/26/2026</a:t>
             </a:fld>
             <a:endParaRPr lang="en-US"/>
           </a:p>
@@ -2494,7 +2138,7 @@
 </p:sldLayout>
 </file>
 
-<file path=ppt/slideLayouts/slideLayout7.xml><?xml version="1.0" encoding="utf-8"?>
+<file path=ppt/slideLayouts/slideLayout6.xml><?xml version="1.0" encoding="utf-8"?>
 <p:sldLayout xmlns:a="http://schemas.openxmlformats.org/drawingml/2006/main" xmlns:r="http://schemas.openxmlformats.org/officeDocument/2006/relationships" xmlns:p="http://schemas.openxmlformats.org/presentationml/2006/main" type="blank">
   <p:cSld name="Blank">
     <p:spTree>
@@ -2528,7 +2172,7 @@
           <a:p>
             <a:fld id="{EFF0FF23-48AC-4F4D-AFE5-7B7556834023}" type="datetime1">
               <a:rPr lang="en-US" smtClean="0"/>
-              <a:t>8/25/2026</a:t>
+              <a:t>8/26/2026</a:t>
             </a:fld>
             <a:endParaRPr lang="en-US"/>
           </a:p>
@@ -2601,7 +2245,7 @@
 </p:sldLayout>
 </file>
 
-<file path=ppt/slideLayouts/slideLayout8.xml><?xml version="1.0" encoding="utf-8"?>
+<file path=ppt/slideLayouts/slideLayout7.xml><?xml version="1.0" encoding="utf-8"?>
 <p:sldLayout xmlns:a="http://schemas.openxmlformats.org/drawingml/2006/main" xmlns:r="http://schemas.openxmlformats.org/officeDocument/2006/relationships" xmlns:p="http://schemas.openxmlformats.org/presentationml/2006/main" type="objTx">
   <p:cSld name="Content with Caption">
     <p:spTree>
@@ -2815,7 +2459,7 @@
           <a:p>
             <a:fld id="{F37AABAC-2ED4-4C66-9BF9-ECA281D38451}" type="datetime1">
               <a:rPr lang="en-US" smtClean="0"/>
-              <a:t>8/25/2026</a:t>
+              <a:t>8/26/2026</a:t>
             </a:fld>
             <a:endParaRPr lang="en-US"/>
           </a:p>
@@ -2888,7 +2532,7 @@
 </p:sldLayout>
 </file>
 
-<file path=ppt/slideLayouts/slideLayout9.xml><?xml version="1.0" encoding="utf-8"?>
+<file path=ppt/slideLayouts/slideLayout8.xml><?xml version="1.0" encoding="utf-8"?>
 <p:sldLayout xmlns:a="http://schemas.openxmlformats.org/drawingml/2006/main" xmlns:r="http://schemas.openxmlformats.org/officeDocument/2006/relationships" xmlns:p="http://schemas.openxmlformats.org/presentationml/2006/main" type="picTx">
   <p:cSld name="Picture with Caption">
     <p:spTree>
@@ -3079,7 +2723,7 @@
           <a:p>
             <a:fld id="{771BCDAC-E287-45C0-8510-E2CA0352394E}" type="datetime1">
               <a:rPr lang="en-US" smtClean="0"/>
-              <a:t>8/25/2026</a:t>
+              <a:t>8/26/2026</a:t>
             </a:fld>
             <a:endParaRPr lang="en-US"/>
           </a:p>
@@ -3131,6 +2775,186 @@
     <p:extLst>
       <p:ext uri="{BB962C8B-B14F-4D97-AF65-F5344CB8AC3E}">
         <p14:creationId xmlns:p14="http://schemas.microsoft.com/office/powerpoint/2010/main" val="3889236939"/>
+      </p:ext>
+    </p:extLst>
+  </p:cSld>
+  <p:clrMapOvr>
+    <a:masterClrMapping/>
+  </p:clrMapOvr>
+  <mc:AlternateContent xmlns:mc="http://schemas.openxmlformats.org/markup-compatibility/2006" xmlns:p14="http://schemas.microsoft.com/office/powerpoint/2010/main">
+    <mc:Choice Requires="p14">
+      <p:transition p14:dur="250">
+        <p:fade/>
+      </p:transition>
+    </mc:Choice>
+    <mc:Fallback xmlns="">
+      <p:transition>
+        <p:fade/>
+      </p:transition>
+    </mc:Fallback>
+  </mc:AlternateContent>
+</p:sldLayout>
+</file>
+
+<file path=ppt/slideLayouts/slideLayout9.xml><?xml version="1.0" encoding="utf-8"?>
+<p:sldLayout xmlns:a="http://schemas.openxmlformats.org/drawingml/2006/main" xmlns:r="http://schemas.openxmlformats.org/officeDocument/2006/relationships" xmlns:p="http://schemas.openxmlformats.org/presentationml/2006/main" type="vertTx">
+  <p:cSld name="Title and Vertical Text">
+    <p:spTree>
+      <p:nvGrpSpPr>
+        <p:cNvPr id="1" name=""/>
+        <p:cNvGrpSpPr/>
+        <p:nvPr/>
+      </p:nvGrpSpPr>
+      <p:grpSpPr>
+        <a:xfrm>
+          <a:off x="0" y="0"/>
+          <a:ext cx="0" cy="0"/>
+          <a:chOff x="0" y="0"/>
+          <a:chExt cx="0" cy="0"/>
+        </a:xfrm>
+      </p:grpSpPr>
+      <p:sp>
+        <p:nvSpPr>
+          <p:cNvPr id="2" name="Title 1"/>
+          <p:cNvSpPr>
+            <a:spLocks noGrp="1"/>
+          </p:cNvSpPr>
+          <p:nvPr>
+            <p:ph type="title"/>
+          </p:nvPr>
+        </p:nvSpPr>
+        <p:spPr/>
+        <p:txBody>
+          <a:bodyPr/>
+          <a:lstStyle/>
+          <a:p>
+            <a:r>
+              <a:rPr lang="en-US"/>
+              <a:t>Click to edit Master title style</a:t>
+            </a:r>
+          </a:p>
+        </p:txBody>
+      </p:sp>
+      <p:sp>
+        <p:nvSpPr>
+          <p:cNvPr id="3" name="Vertical Text Placeholder 2"/>
+          <p:cNvSpPr>
+            <a:spLocks noGrp="1"/>
+          </p:cNvSpPr>
+          <p:nvPr>
+            <p:ph type="body" orient="vert" idx="1"/>
+          </p:nvPr>
+        </p:nvSpPr>
+        <p:spPr/>
+        <p:txBody>
+          <a:bodyPr vert="eaVert"/>
+          <a:lstStyle/>
+          <a:p>
+            <a:pPr lvl="0"/>
+            <a:r>
+              <a:rPr lang="en-US"/>
+              <a:t>Click to edit Master text styles</a:t>
+            </a:r>
+          </a:p>
+          <a:p>
+            <a:pPr lvl="1"/>
+            <a:r>
+              <a:rPr lang="en-US"/>
+              <a:t>Second level</a:t>
+            </a:r>
+          </a:p>
+          <a:p>
+            <a:pPr lvl="2"/>
+            <a:r>
+              <a:rPr lang="en-US"/>
+              <a:t>Third level</a:t>
+            </a:r>
+          </a:p>
+          <a:p>
+            <a:pPr lvl="3"/>
+            <a:r>
+              <a:rPr lang="en-US"/>
+              <a:t>Fourth level</a:t>
+            </a:r>
+          </a:p>
+          <a:p>
+            <a:pPr lvl="4"/>
+            <a:r>
+              <a:rPr lang="en-US"/>
+              <a:t>Fifth level</a:t>
+            </a:r>
+          </a:p>
+        </p:txBody>
+      </p:sp>
+      <p:sp>
+        <p:nvSpPr>
+          <p:cNvPr id="4" name="Date Placeholder 3"/>
+          <p:cNvSpPr>
+            <a:spLocks noGrp="1"/>
+          </p:cNvSpPr>
+          <p:nvPr>
+            <p:ph type="dt" sz="half" idx="10"/>
+          </p:nvPr>
+        </p:nvSpPr>
+        <p:spPr/>
+        <p:txBody>
+          <a:bodyPr/>
+          <a:lstStyle/>
+          <a:p>
+            <a:fld id="{8194E2EC-6C6A-460F-8082-C404C2D77A6E}" type="datetime1">
+              <a:rPr lang="en-US" smtClean="0"/>
+              <a:t>8/26/2026</a:t>
+            </a:fld>
+            <a:endParaRPr lang="en-US"/>
+          </a:p>
+        </p:txBody>
+      </p:sp>
+      <p:sp>
+        <p:nvSpPr>
+          <p:cNvPr id="5" name="Footer Placeholder 4"/>
+          <p:cNvSpPr>
+            <a:spLocks noGrp="1"/>
+          </p:cNvSpPr>
+          <p:nvPr>
+            <p:ph type="ftr" sz="quarter" idx="11"/>
+          </p:nvPr>
+        </p:nvSpPr>
+        <p:spPr/>
+        <p:txBody>
+          <a:bodyPr/>
+          <a:lstStyle/>
+          <a:p>
+            <a:endParaRPr lang="en-US"/>
+          </a:p>
+        </p:txBody>
+      </p:sp>
+      <p:sp>
+        <p:nvSpPr>
+          <p:cNvPr id="6" name="Slide Number Placeholder 5"/>
+          <p:cNvSpPr>
+            <a:spLocks noGrp="1"/>
+          </p:cNvSpPr>
+          <p:nvPr>
+            <p:ph type="sldNum" sz="quarter" idx="12"/>
+          </p:nvPr>
+        </p:nvSpPr>
+        <p:spPr/>
+        <p:txBody>
+          <a:bodyPr/>
+          <a:lstStyle/>
+          <a:p>
+            <a:fld id="{C1FF6DA9-008F-8B48-92A6-B652298478BF}" type="slidenum">
+              <a:rPr lang="en-US" smtClean="0"/>
+              <a:t>‹#›</a:t>
+            </a:fld>
+            <a:endParaRPr lang="en-US"/>
+          </a:p>
+        </p:txBody>
+      </p:sp>
+    </p:spTree>
+    <p:extLst>
+      <p:ext uri="{BB962C8B-B14F-4D97-AF65-F5344CB8AC3E}">
+        <p14:creationId xmlns:p14="http://schemas.microsoft.com/office/powerpoint/2010/main" val="2910927964"/>
       </p:ext>
     </p:extLst>
   </p:cSld>
@@ -3302,7 +3126,7 @@
           <a:p>
             <a:fld id="{2FBF10B9-8DEC-4C80-9E67-014F9EBB58A6}" type="datetime1">
               <a:rPr lang="en-US" smtClean="0"/>
-              <a:t>8/25/2026</a:t>
+              <a:t>8/26/2026</a:t>
             </a:fld>
             <a:endParaRPr lang="en-US"/>
           </a:p>
@@ -3396,16 +3220,15 @@
   <p:clrMap bg1="lt1" tx1="dk1" bg2="lt2" tx2="dk2" accent1="accent1" accent2="accent2" accent3="accent3" accent4="accent4" accent5="accent5" accent6="accent6" hlink="hlink" folHlink="folHlink"/>
   <p:sldLayoutIdLst>
     <p:sldLayoutId id="2147483673" r:id="rId1"/>
-    <p:sldLayoutId id="2147483674" r:id="rId2"/>
-    <p:sldLayoutId id="2147483675" r:id="rId3"/>
-    <p:sldLayoutId id="2147483676" r:id="rId4"/>
-    <p:sldLayoutId id="2147483677" r:id="rId5"/>
-    <p:sldLayoutId id="2147483678" r:id="rId6"/>
-    <p:sldLayoutId id="2147483679" r:id="rId7"/>
-    <p:sldLayoutId id="2147483680" r:id="rId8"/>
-    <p:sldLayoutId id="2147483681" r:id="rId9"/>
-    <p:sldLayoutId id="2147483682" r:id="rId10"/>
-    <p:sldLayoutId id="2147483683" r:id="rId11"/>
+    <p:sldLayoutId id="2147483675" r:id="rId2"/>
+    <p:sldLayoutId id="2147483676" r:id="rId3"/>
+    <p:sldLayoutId id="2147483677" r:id="rId4"/>
+    <p:sldLayoutId id="2147483678" r:id="rId5"/>
+    <p:sldLayoutId id="2147483679" r:id="rId6"/>
+    <p:sldLayoutId id="2147483680" r:id="rId7"/>
+    <p:sldLayoutId id="2147483681" r:id="rId8"/>
+    <p:sldLayoutId id="2147483682" r:id="rId9"/>
+    <p:sldLayoutId id="2147483683" r:id="rId10"/>
   </p:sldLayoutIdLst>
   <mc:AlternateContent xmlns:mc="http://schemas.openxmlformats.org/markup-compatibility/2006" xmlns:p14="http://schemas.microsoft.com/office/powerpoint/2010/main">
     <mc:Choice Requires="p14">
@@ -6314,7 +6137,7 @@
       </p:sp>
       <p:pic>
         <p:nvPicPr>
-          <p:cNvPr id="4" name="Picture 3" descr="image.png"/>
+          <p:cNvPr id="4" name="Picture 3"/>
           <p:cNvPicPr>
             <a:picLocks noChangeAspect="1"/>
           </p:cNvPicPr>
@@ -6322,14 +6145,13 @@
         </p:nvPicPr>
         <p:blipFill>
           <a:blip r:embed="rId2"/>
-          <a:stretch>
-            <a:fillRect/>
-          </a:stretch>
+          <a:srcRect/>
+          <a:stretch/>
         </p:blipFill>
         <p:spPr>
           <a:xfrm>
-            <a:off x="609600" y="1333500"/>
-            <a:ext cx="10972800" cy="3901380"/>
+            <a:off x="609600" y="1967454"/>
+            <a:ext cx="10972800" cy="2633471"/>
           </a:xfrm>
           <a:prstGeom prst="rect">
             <a:avLst/>
@@ -6582,7 +6404,7 @@
       </p:sp>
       <p:pic>
         <p:nvPicPr>
-          <p:cNvPr id="4" name="Picture 3" descr="image.png"/>
+          <p:cNvPr id="4" name="Picture 3"/>
           <p:cNvPicPr>
             <a:picLocks noChangeAspect="1"/>
           </p:cNvPicPr>
@@ -6590,14 +6412,13 @@
         </p:nvPicPr>
         <p:blipFill>
           <a:blip r:embed="rId2"/>
-          <a:stretch>
-            <a:fillRect/>
-          </a:stretch>
+          <a:srcRect/>
+          <a:stretch/>
         </p:blipFill>
         <p:spPr>
           <a:xfrm>
-            <a:off x="609600" y="1333500"/>
-            <a:ext cx="10972800" cy="3901380"/>
+            <a:off x="609600" y="1967454"/>
+            <a:ext cx="10972800" cy="2633471"/>
           </a:xfrm>
           <a:prstGeom prst="rect">
             <a:avLst/>
@@ -6613,7 +6434,7 @@
         <p:spPr>
           <a:xfrm>
             <a:off x="1809750" y="5674965"/>
-            <a:ext cx="8572500" cy="553998"/>
+            <a:ext cx="8572500" cy="830997"/>
           </a:xfrm>
           <a:prstGeom prst="rect">
             <a:avLst/>
@@ -6645,7 +6466,7 @@
             </a:r>
             <a:r>
               <a:rPr lang="en-GB" dirty="0"/>
-              <a:t> (1.20% vs 3.13%). Only method with 100% convergence on both parameters.</a:t>
+              <a:t> (1.20% vs 3.13%). 18.6× faster than the next best solver. Only method with 100% convergence on both parameters.</a:t>
             </a:r>
             <a:endParaRPr sz="1800" b="0" i="0" u="none" dirty="0">
               <a:solidFill>
@@ -6843,7 +6664,7 @@
       </p:sp>
       <p:pic>
         <p:nvPicPr>
-          <p:cNvPr id="4" name="Picture 3" descr="image.png"/>
+          <p:cNvPr id="4" name="Picture 3"/>
           <p:cNvPicPr>
             <a:picLocks noChangeAspect="1"/>
           </p:cNvPicPr>
@@ -6851,14 +6672,13 @@
         </p:nvPicPr>
         <p:blipFill>
           <a:blip r:embed="rId2"/>
-          <a:stretch>
-            <a:fillRect/>
-          </a:stretch>
+          <a:srcRect/>
+          <a:stretch/>
         </p:blipFill>
         <p:spPr>
           <a:xfrm>
-            <a:off x="609600" y="1333500"/>
-            <a:ext cx="10972800" cy="4626619"/>
+            <a:off x="609600" y="1352497"/>
+            <a:ext cx="10972800" cy="4588625"/>
           </a:xfrm>
           <a:prstGeom prst="rect">
             <a:avLst/>
@@ -7022,7 +6842,7 @@
       </p:grpSpPr>
       <p:sp>
         <p:nvSpPr>
-          <p:cNvPr id="3" name="TextBox 2"/>
+          <p:cNvPr id="2" name="TextBox 1"/>
           <p:cNvSpPr txBox="1"/>
           <p:nvPr/>
         </p:nvSpPr>
@@ -7050,14 +6870,14 @@
                 </a:solidFill>
                 <a:latin typeface="Inter"/>
               </a:rPr>
-              <a:t>PERFORMANCE</a:t>
-            </a:r>
-          </a:p>
-        </p:txBody>
-      </p:sp>
-      <p:sp>
-        <p:nvSpPr>
-          <p:cNvPr id="4" name="TextBox 3"/>
+              <a:t>DIMENSIONALITY COST</a:t>
+            </a:r>
+          </a:p>
+        </p:txBody>
+      </p:sp>
+      <p:sp>
+        <p:nvSpPr>
+          <p:cNvPr id="3" name="TextBox 2"/>
           <p:cNvSpPr txBox="1"/>
           <p:nvPr/>
         </p:nvSpPr>
@@ -7083,20 +6903,20 @@
               </a:lnSpc>
             </a:pPr>
             <a:r>
-              <a:rPr sz="3000" b="1" i="0" u="none">
+              <a:rPr sz="3000" b="1" i="0" u="none" dirty="0">
                 <a:solidFill>
                   <a:srgbClr val="0F172A"/>
                 </a:solidFill>
                 <a:latin typeface="Inter"/>
               </a:rPr>
-              <a:t>Execution Speed Distribution</a:t>
+              <a:t>Scalability Penalty (1 → 2 Parameters)</a:t>
             </a:r>
           </a:p>
         </p:txBody>
       </p:sp>
       <p:pic>
         <p:nvPicPr>
-          <p:cNvPr id="5" name="Picture 4" descr="image.png"/>
+          <p:cNvPr id="4" name="Picture 3"/>
           <p:cNvPicPr>
             <a:picLocks noChangeAspect="1"/>
           </p:cNvPicPr>
@@ -7104,259 +6924,13 @@
         </p:nvPicPr>
         <p:blipFill>
           <a:blip r:embed="rId2"/>
-          <a:stretch>
-            <a:fillRect/>
-          </a:stretch>
+          <a:srcRect/>
+          <a:stretch/>
         </p:blipFill>
         <p:spPr>
           <a:xfrm>
-            <a:off x="609600" y="1333500"/>
-            <a:ext cx="10972800" cy="4626619"/>
-          </a:xfrm>
-          <a:prstGeom prst="rect">
-            <a:avLst/>
-          </a:prstGeom>
-        </p:spPr>
-      </p:pic>
-      <p:sp>
-        <p:nvSpPr>
-          <p:cNvPr id="6" name="TextBox 5"/>
-          <p:cNvSpPr txBox="1"/>
-          <p:nvPr/>
-        </p:nvSpPr>
-        <p:spPr>
-          <a:xfrm>
-            <a:off x="2220044" y="6041613"/>
-            <a:ext cx="7751912" cy="553998"/>
-          </a:xfrm>
-          <a:prstGeom prst="rect">
-            <a:avLst/>
-          </a:prstGeom>
-          <a:noFill/>
-        </p:spPr>
-        <p:txBody>
-          <a:bodyPr wrap="square" lIns="0" tIns="0" rIns="0" bIns="0" anchor="t">
-            <a:spAutoFit/>
-          </a:bodyPr>
-          <a:lstStyle/>
-          <a:p>
-            <a:pPr algn="ctr"/>
-            <a:r>
-              <a:rPr lang="en-GB" dirty="0"/>
-              <a:t>Deterministic output: identical input yields an identical estimate on every run — no random restarts, no initialization sensitivity. Latency stays tightly bounded.</a:t>
-            </a:r>
-            <a:endParaRPr dirty="0">
-              <a:solidFill>
-                <a:srgbClr val="0A1128"/>
-              </a:solidFill>
-              <a:latin typeface="Inter Medium"/>
-            </a:endParaRPr>
-          </a:p>
-        </p:txBody>
-      </p:sp>
-      <p:pic>
-        <p:nvPicPr>
-          <p:cNvPr id="7" name="Copied Picture 7">
-            <a:extLst>
-              <a:ext uri="{FF2B5EF4-FFF2-40B4-BE49-F238E27FC236}">
-                <a16:creationId xmlns:a16="http://schemas.microsoft.com/office/drawing/2014/main" id="{B311F591-449D-F658-283A-405022510CF0}"/>
-              </a:ext>
-            </a:extLst>
-          </p:cNvPr>
-          <p:cNvPicPr>
-            <a:picLocks noChangeAspect="1"/>
-          </p:cNvPicPr>
-          <p:nvPr/>
-        </p:nvPicPr>
-        <p:blipFill>
-          <a:blip r:embed="rId3"/>
-          <a:stretch>
-            <a:fillRect/>
-          </a:stretch>
-        </p:blipFill>
-        <p:spPr>
-          <a:xfrm>
-            <a:off x="10642600" y="6318612"/>
-            <a:ext cx="1231900" cy="316774"/>
-          </a:xfrm>
-          <a:prstGeom prst="rect">
-            <a:avLst/>
-          </a:prstGeom>
-        </p:spPr>
-      </p:pic>
-      <p:sp>
-        <p:nvSpPr>
-          <p:cNvPr id="8" name="Slide Number Placeholder 7">
-            <a:extLst>
-              <a:ext uri="{FF2B5EF4-FFF2-40B4-BE49-F238E27FC236}">
-                <a16:creationId xmlns:a16="http://schemas.microsoft.com/office/drawing/2014/main" id="{8D34DBEC-11E3-BC8C-7A36-A9208FFC4737}"/>
-              </a:ext>
-            </a:extLst>
-          </p:cNvPr>
-          <p:cNvSpPr>
-            <a:spLocks noGrp="1"/>
-          </p:cNvSpPr>
-          <p:nvPr>
-            <p:ph type="sldNum" sz="quarter" idx="12"/>
-          </p:nvPr>
-        </p:nvSpPr>
-        <p:spPr/>
-        <p:txBody>
-          <a:bodyPr/>
-          <a:lstStyle/>
-          <a:p>
-            <a:pPr algn="l"/>
-            <a:fld id="{C1FF6DA9-008F-8B48-92A6-B652298478BF}" type="slidenum">
-              <a:rPr lang="en-US" smtClean="0"/>
-              <a:pPr algn="l"/>
-              <a:t>15</a:t>
-            </a:fld>
-            <a:endParaRPr lang="en-US" dirty="0"/>
-          </a:p>
-        </p:txBody>
-      </p:sp>
-    </p:spTree>
-    <p:extLst>
-      <p:ext uri="{BB962C8B-B14F-4D97-AF65-F5344CB8AC3E}">
-        <p14:creationId xmlns:p14="http://schemas.microsoft.com/office/powerpoint/2010/main" val="1451306204"/>
-      </p:ext>
-    </p:extLst>
-  </p:cSld>
-  <p:clrMapOvr>
-    <a:masterClrMapping/>
-  </p:clrMapOvr>
-  <mc:AlternateContent xmlns:mc="http://schemas.openxmlformats.org/markup-compatibility/2006" xmlns:p14="http://schemas.microsoft.com/office/powerpoint/2010/main">
-    <mc:Choice Requires="p14">
-      <p:transition p14:dur="250">
-        <p:fade/>
-      </p:transition>
-    </mc:Choice>
-    <mc:Fallback xmlns="">
-      <p:transition>
-        <p:fade/>
-      </p:transition>
-    </mc:Fallback>
-  </mc:AlternateContent>
-</p:sld>
-</file>
-
-<file path=ppt/slides/slide16.xml><?xml version="1.0" encoding="utf-8"?>
-<p:sld xmlns:a="http://schemas.openxmlformats.org/drawingml/2006/main" xmlns:r="http://schemas.openxmlformats.org/officeDocument/2006/relationships" xmlns:p="http://schemas.openxmlformats.org/presentationml/2006/main">
-  <p:cSld>
-    <p:bg>
-      <p:bgPr>
-        <a:solidFill>
-          <a:srgbClr val="FFFFFF"/>
-        </a:solidFill>
-        <a:effectLst/>
-      </p:bgPr>
-    </p:bg>
-    <p:spTree>
-      <p:nvGrpSpPr>
-        <p:cNvPr id="1" name=""/>
-        <p:cNvGrpSpPr/>
-        <p:nvPr/>
-      </p:nvGrpSpPr>
-      <p:grpSpPr>
-        <a:xfrm>
-          <a:off x="0" y="0"/>
-          <a:ext cx="0" cy="0"/>
-          <a:chOff x="0" y="0"/>
-          <a:chExt cx="0" cy="0"/>
-        </a:xfrm>
-      </p:grpSpPr>
-      <p:sp>
-        <p:nvSpPr>
-          <p:cNvPr id="2" name="TextBox 1"/>
-          <p:cNvSpPr txBox="1"/>
-          <p:nvPr/>
-        </p:nvSpPr>
-        <p:spPr>
-          <a:xfrm>
-            <a:off x="609600" y="457200"/>
-            <a:ext cx="10972800" cy="190500"/>
-          </a:xfrm>
-          <a:prstGeom prst="rect">
-            <a:avLst/>
-          </a:prstGeom>
-          <a:noFill/>
-        </p:spPr>
-        <p:txBody>
-          <a:bodyPr wrap="square" lIns="0" tIns="0" rIns="0" bIns="0" anchor="t">
-            <a:spAutoFit/>
-          </a:bodyPr>
-          <a:lstStyle/>
-          <a:p>
-            <a:pPr algn="l"/>
-            <a:r>
-              <a:rPr sz="1200" b="1" i="0" u="none">
-                <a:solidFill>
-                  <a:srgbClr val="64748B"/>
-                </a:solidFill>
-                <a:latin typeface="Inter"/>
-              </a:rPr>
-              <a:t>DIMENSIONALITY COST</a:t>
-            </a:r>
-          </a:p>
-        </p:txBody>
-      </p:sp>
-      <p:sp>
-        <p:nvSpPr>
-          <p:cNvPr id="3" name="TextBox 2"/>
-          <p:cNvSpPr txBox="1"/>
-          <p:nvPr/>
-        </p:nvSpPr>
-        <p:spPr>
-          <a:xfrm>
-            <a:off x="609600" y="647700"/>
-            <a:ext cx="11521440" cy="457200"/>
-          </a:xfrm>
-          <a:prstGeom prst="rect">
-            <a:avLst/>
-          </a:prstGeom>
-          <a:noFill/>
-        </p:spPr>
-        <p:txBody>
-          <a:bodyPr wrap="square" lIns="0" tIns="0" rIns="0" bIns="0" anchor="t">
-            <a:spAutoFit/>
-          </a:bodyPr>
-          <a:lstStyle/>
-          <a:p>
-            <a:pPr algn="l">
-              <a:lnSpc>
-                <a:spcPts val="3600"/>
-              </a:lnSpc>
-            </a:pPr>
-            <a:r>
-              <a:rPr sz="3000" b="1" i="0" u="none" dirty="0">
-                <a:solidFill>
-                  <a:srgbClr val="0F172A"/>
-                </a:solidFill>
-                <a:latin typeface="Inter"/>
-              </a:rPr>
-              <a:t>Scalability Penalty (1 → 2 Parameters)</a:t>
-            </a:r>
-          </a:p>
-        </p:txBody>
-      </p:sp>
-      <p:pic>
-        <p:nvPicPr>
-          <p:cNvPr id="4" name="Picture 3" descr="image.png"/>
-          <p:cNvPicPr>
-            <a:picLocks noChangeAspect="1"/>
-          </p:cNvPicPr>
-          <p:nvPr/>
-        </p:nvPicPr>
-        <p:blipFill>
-          <a:blip r:embed="rId2"/>
-          <a:stretch>
-            <a:fillRect/>
-          </a:stretch>
-        </p:blipFill>
-        <p:spPr>
-          <a:xfrm>
-            <a:off x="609600" y="1333500"/>
-            <a:ext cx="10972800" cy="4626619"/>
+            <a:off x="609600" y="1352497"/>
+            <a:ext cx="10972800" cy="4588625"/>
           </a:xfrm>
           <a:prstGeom prst="rect">
             <a:avLst/>
@@ -7472,7 +7046,7 @@
             <a:fld id="{C1FF6DA9-008F-8B48-92A6-B652298478BF}" type="slidenum">
               <a:rPr lang="en-US" smtClean="0"/>
               <a:pPr algn="l"/>
-              <a:t>16</a:t>
+              <a:t>15</a:t>
             </a:fld>
             <a:endParaRPr lang="en-US" dirty="0"/>
           </a:p>
@@ -7503,7 +7077,7 @@
 </p:sld>
 </file>
 
-<file path=ppt/slides/slide17.xml><?xml version="1.0" encoding="utf-8"?>
+<file path=ppt/slides/slide16.xml><?xml version="1.0" encoding="utf-8"?>
 <p:sld xmlns:a="http://schemas.openxmlformats.org/drawingml/2006/main" xmlns:r="http://schemas.openxmlformats.org/officeDocument/2006/relationships" xmlns:p="http://schemas.openxmlformats.org/presentationml/2006/main">
   <p:cSld>
     <p:spTree>
@@ -7675,7 +7249,7 @@
                     <a:p>
                       <a:pPr algn="l"/>
                       <a:r>
-                        <a:rPr sz="1350" b="0" i="0" u="none">
+                        <a:rPr sz="1350" b="0" i="0" u="none" dirty="0">
                           <a:solidFill>
                             <a:srgbClr val="000028"/>
                           </a:solidFill>
@@ -9046,7 +8620,7 @@
 </p:sld>
 </file>
 
-<file path=ppt/slides/slide18.xml><?xml version="1.0" encoding="utf-8"?>
+<file path=ppt/slides/slide17.xml><?xml version="1.0" encoding="utf-8"?>
 <p:sld xmlns:a="http://schemas.openxmlformats.org/drawingml/2006/main" xmlns:r="http://schemas.openxmlformats.org/officeDocument/2006/relationships" xmlns:p="http://schemas.openxmlformats.org/presentationml/2006/main">
   <p:cSld>
     <p:bg>
@@ -9620,7 +9194,7 @@
             <a:fld id="{C1FF6DA9-008F-8B48-92A6-B652298478BF}" type="slidenum">
               <a:rPr lang="en-US" smtClean="0"/>
               <a:pPr algn="l"/>
-              <a:t>18</a:t>
+              <a:t>17</a:t>
             </a:fld>
             <a:endParaRPr lang="en-US" dirty="0"/>
           </a:p>
@@ -9630,6 +9204,350 @@
     <p:extLst>
       <p:ext uri="{BB962C8B-B14F-4D97-AF65-F5344CB8AC3E}">
         <p14:creationId xmlns:p14="http://schemas.microsoft.com/office/powerpoint/2010/main" val="1278592702"/>
+      </p:ext>
+    </p:extLst>
+  </p:cSld>
+  <p:clrMapOvr>
+    <a:masterClrMapping/>
+  </p:clrMapOvr>
+  <mc:AlternateContent xmlns:mc="http://schemas.openxmlformats.org/markup-compatibility/2006" xmlns:p14="http://schemas.microsoft.com/office/powerpoint/2010/main">
+    <mc:Choice Requires="p14">
+      <p:transition p14:dur="250">
+        <p:fade/>
+      </p:transition>
+    </mc:Choice>
+    <mc:Fallback xmlns="">
+      <p:transition>
+        <p:fade/>
+      </p:transition>
+    </mc:Fallback>
+  </mc:AlternateContent>
+</p:sld>
+</file>
+
+<file path=ppt/slides/slide18.xml><?xml version="1.0" encoding="utf-8"?>
+<p:sld xmlns:a="http://schemas.openxmlformats.org/drawingml/2006/main" xmlns:r="http://schemas.openxmlformats.org/officeDocument/2006/relationships" xmlns:p="http://schemas.openxmlformats.org/presentationml/2006/main">
+  <p:cSld>
+    <p:bg>
+      <p:bgPr>
+        <a:solidFill>
+          <a:srgbClr val="0A1128"/>
+        </a:solidFill>
+        <a:effectLst/>
+      </p:bgPr>
+    </p:bg>
+    <p:spTree>
+      <p:nvGrpSpPr>
+        <p:cNvPr id="1" name="">
+          <a:extLst>
+            <a:ext uri="{FF2B5EF4-FFF2-40B4-BE49-F238E27FC236}">
+              <a16:creationId xmlns:a16="http://schemas.microsoft.com/office/drawing/2014/main" id="{1670091F-F662-AA5B-3E1A-1E1A2AF9F3DD}"/>
+            </a:ext>
+          </a:extLst>
+        </p:cNvPr>
+        <p:cNvGrpSpPr/>
+        <p:nvPr/>
+      </p:nvGrpSpPr>
+      <p:grpSpPr>
+        <a:xfrm>
+          <a:off x="0" y="0"/>
+          <a:ext cx="0" cy="0"/>
+          <a:chOff x="0" y="0"/>
+          <a:chExt cx="0" cy="0"/>
+        </a:xfrm>
+      </p:grpSpPr>
+      <p:sp>
+        <p:nvSpPr>
+          <p:cNvPr id="2" name="TextBox 1">
+            <a:extLst>
+              <a:ext uri="{FF2B5EF4-FFF2-40B4-BE49-F238E27FC236}">
+                <a16:creationId xmlns:a16="http://schemas.microsoft.com/office/drawing/2014/main" id="{0B803D39-ACC9-270D-1548-2EC835B2B48C}"/>
+              </a:ext>
+            </a:extLst>
+          </p:cNvPr>
+          <p:cNvSpPr txBox="1"/>
+          <p:nvPr/>
+        </p:nvSpPr>
+        <p:spPr>
+          <a:xfrm>
+            <a:off x="4345781" y="2067817"/>
+            <a:ext cx="3500437" cy="731490"/>
+          </a:xfrm>
+          <a:prstGeom prst="rect">
+            <a:avLst/>
+          </a:prstGeom>
+          <a:noFill/>
+        </p:spPr>
+        <p:txBody>
+          <a:bodyPr wrap="square" lIns="0" tIns="0" rIns="0" bIns="0" anchor="t">
+            <a:spAutoFit/>
+          </a:bodyPr>
+          <a:lstStyle/>
+          <a:p>
+            <a:pPr algn="ctr">
+              <a:lnSpc>
+                <a:spcPts val="5759"/>
+              </a:lnSpc>
+            </a:pPr>
+            <a:r>
+              <a:rPr sz="4800" b="1" i="0" u="none">
+                <a:solidFill>
+                  <a:srgbClr val="F8FAFC"/>
+                </a:solidFill>
+                <a:latin typeface="Inter"/>
+              </a:rPr>
+              <a:t>Thank you.</a:t>
+            </a:r>
+          </a:p>
+        </p:txBody>
+      </p:sp>
+      <p:sp>
+        <p:nvSpPr>
+          <p:cNvPr id="3" name="Rectangle 2">
+            <a:extLst>
+              <a:ext uri="{FF2B5EF4-FFF2-40B4-BE49-F238E27FC236}">
+                <a16:creationId xmlns:a16="http://schemas.microsoft.com/office/drawing/2014/main" id="{1717EFB6-6902-B60B-93BA-5E0D7CFD4973}"/>
+              </a:ext>
+            </a:extLst>
+          </p:cNvPr>
+          <p:cNvSpPr/>
+          <p:nvPr/>
+        </p:nvSpPr>
+        <p:spPr>
+          <a:xfrm>
+            <a:off x="5791200" y="3027908"/>
+            <a:ext cx="609600" cy="38100"/>
+          </a:xfrm>
+          <a:prstGeom prst="rect">
+            <a:avLst/>
+          </a:prstGeom>
+          <a:solidFill>
+            <a:srgbClr val="009999"/>
+          </a:solidFill>
+          <a:ln>
+            <a:noFill/>
+          </a:ln>
+          <a:effectLst/>
+        </p:spPr>
+        <p:style>
+          <a:lnRef idx="1">
+            <a:schemeClr val="accent1"/>
+          </a:lnRef>
+          <a:fillRef idx="3">
+            <a:schemeClr val="accent1"/>
+          </a:fillRef>
+          <a:effectRef idx="2">
+            <a:schemeClr val="accent1"/>
+          </a:effectRef>
+          <a:fontRef idx="minor">
+            <a:schemeClr val="lt1"/>
+          </a:fontRef>
+        </p:style>
+        <p:txBody>
+          <a:bodyPr rtlCol="0" anchor="ctr"/>
+          <a:lstStyle/>
+          <a:p>
+            <a:pPr algn="ctr"/>
+            <a:endParaRPr/>
+          </a:p>
+        </p:txBody>
+      </p:sp>
+      <p:sp>
+        <p:nvSpPr>
+          <p:cNvPr id="4" name="TextBox 3">
+            <a:extLst>
+              <a:ext uri="{FF2B5EF4-FFF2-40B4-BE49-F238E27FC236}">
+                <a16:creationId xmlns:a16="http://schemas.microsoft.com/office/drawing/2014/main" id="{12406C75-56DA-375D-C848-445FE6B25C1C}"/>
+              </a:ext>
+            </a:extLst>
+          </p:cNvPr>
+          <p:cNvSpPr txBox="1"/>
+          <p:nvPr/>
+        </p:nvSpPr>
+        <p:spPr>
+          <a:xfrm>
+            <a:off x="4562475" y="3447008"/>
+            <a:ext cx="3067050" cy="276225"/>
+          </a:xfrm>
+          <a:prstGeom prst="rect">
+            <a:avLst/>
+          </a:prstGeom>
+          <a:noFill/>
+        </p:spPr>
+        <p:txBody>
+          <a:bodyPr wrap="square" lIns="0" tIns="0" rIns="0" bIns="0" anchor="t">
+            <a:spAutoFit/>
+          </a:bodyPr>
+          <a:lstStyle/>
+          <a:p>
+            <a:pPr algn="ctr"/>
+            <a:r>
+              <a:rPr sz="1800" b="0" i="0" u="none" dirty="0">
+                <a:solidFill>
+                  <a:srgbClr val="94A3B8"/>
+                </a:solidFill>
+                <a:latin typeface="Inter"/>
+              </a:rPr>
+              <a:t>alexandra.titel17@gmail.com</a:t>
+            </a:r>
+          </a:p>
+        </p:txBody>
+      </p:sp>
+      <p:sp>
+        <p:nvSpPr>
+          <p:cNvPr id="5" name="TextBox 4">
+            <a:extLst>
+              <a:ext uri="{FF2B5EF4-FFF2-40B4-BE49-F238E27FC236}">
+                <a16:creationId xmlns:a16="http://schemas.microsoft.com/office/drawing/2014/main" id="{38CDDF49-4130-87EA-C707-60E6029CD420}"/>
+              </a:ext>
+            </a:extLst>
+          </p:cNvPr>
+          <p:cNvSpPr txBox="1"/>
+          <p:nvPr/>
+        </p:nvSpPr>
+        <p:spPr>
+          <a:xfrm>
+            <a:off x="4395787" y="3799433"/>
+            <a:ext cx="3400425" cy="228600"/>
+          </a:xfrm>
+          <a:prstGeom prst="rect">
+            <a:avLst/>
+          </a:prstGeom>
+          <a:noFill/>
+        </p:spPr>
+        <p:txBody>
+          <a:bodyPr wrap="square" lIns="0" tIns="0" rIns="0" bIns="0" anchor="t">
+            <a:spAutoFit/>
+          </a:bodyPr>
+          <a:lstStyle/>
+          <a:p>
+            <a:pPr algn="ctr"/>
+            <a:r>
+              <a:rPr sz="1500" b="0" i="0" u="none">
+                <a:solidFill>
+                  <a:srgbClr val="64748B"/>
+                </a:solidFill>
+                <a:latin typeface="Inter"/>
+              </a:rPr>
+              <a:t>github.com/titelaex/ParamsCalibrator</a:t>
+            </a:r>
+          </a:p>
+        </p:txBody>
+      </p:sp>
+      <p:sp>
+        <p:nvSpPr>
+          <p:cNvPr id="7" name="TextBox 6">
+            <a:extLst>
+              <a:ext uri="{FF2B5EF4-FFF2-40B4-BE49-F238E27FC236}">
+                <a16:creationId xmlns:a16="http://schemas.microsoft.com/office/drawing/2014/main" id="{AAE2A1C2-CBF5-4B31-11E9-278E9496D439}"/>
+              </a:ext>
+            </a:extLst>
+          </p:cNvPr>
+          <p:cNvSpPr txBox="1"/>
+          <p:nvPr/>
+        </p:nvSpPr>
+        <p:spPr>
+          <a:xfrm>
+            <a:off x="3952875" y="4523333"/>
+            <a:ext cx="4705350" cy="723275"/>
+          </a:xfrm>
+          <a:prstGeom prst="rect">
+            <a:avLst/>
+          </a:prstGeom>
+          <a:noFill/>
+        </p:spPr>
+        <p:txBody>
+          <a:bodyPr wrap="square" lIns="0" tIns="0" rIns="0" bIns="0" anchor="t">
+            <a:spAutoFit/>
+          </a:bodyPr>
+          <a:lstStyle/>
+          <a:p>
+            <a:pPr algn="ctr"/>
+            <a:r>
+              <a:rPr lang="en-GB" sz="1600" dirty="0">
+                <a:solidFill>
+                  <a:schemeClr val="bg1"/>
+                </a:solidFill>
+              </a:rPr>
+              <a:t>Mathematical Optimization &amp; Data Processing for Physical Constant Calibration via ML</a:t>
+            </a:r>
+          </a:p>
+          <a:p>
+            <a:pPr algn="ctr"/>
+            <a:endParaRPr sz="1500" b="0" i="0" u="none" dirty="0">
+              <a:solidFill>
+                <a:srgbClr val="F8FAFC"/>
+              </a:solidFill>
+              <a:latin typeface="Inter"/>
+            </a:endParaRPr>
+          </a:p>
+        </p:txBody>
+      </p:sp>
+      <p:pic>
+        <p:nvPicPr>
+          <p:cNvPr id="12" name="Picture 11">
+            <a:extLst>
+              <a:ext uri="{FF2B5EF4-FFF2-40B4-BE49-F238E27FC236}">
+                <a16:creationId xmlns:a16="http://schemas.microsoft.com/office/drawing/2014/main" id="{882143F8-40AD-7D81-35F7-EA045F4C652B}"/>
+              </a:ext>
+            </a:extLst>
+          </p:cNvPr>
+          <p:cNvPicPr>
+            <a:picLocks noChangeAspect="1"/>
+          </p:cNvPicPr>
+          <p:nvPr/>
+        </p:nvPicPr>
+        <p:blipFill>
+          <a:blip r:embed="rId2"/>
+          <a:stretch>
+            <a:fillRect/>
+          </a:stretch>
+        </p:blipFill>
+        <p:spPr>
+          <a:xfrm>
+            <a:off x="10644995" y="6216770"/>
+            <a:ext cx="1231817" cy="509495"/>
+          </a:xfrm>
+          <a:prstGeom prst="rect">
+            <a:avLst/>
+          </a:prstGeom>
+        </p:spPr>
+      </p:pic>
+      <p:sp>
+        <p:nvSpPr>
+          <p:cNvPr id="13" name="Slide Number Placeholder 12">
+            <a:extLst>
+              <a:ext uri="{FF2B5EF4-FFF2-40B4-BE49-F238E27FC236}">
+                <a16:creationId xmlns:a16="http://schemas.microsoft.com/office/drawing/2014/main" id="{1B756321-3AB9-DD87-65BB-C87B81E0004E}"/>
+              </a:ext>
+            </a:extLst>
+          </p:cNvPr>
+          <p:cNvSpPr>
+            <a:spLocks noGrp="1"/>
+          </p:cNvSpPr>
+          <p:nvPr>
+            <p:ph type="sldNum" sz="quarter" idx="12"/>
+          </p:nvPr>
+        </p:nvSpPr>
+        <p:spPr/>
+        <p:txBody>
+          <a:bodyPr/>
+          <a:lstStyle/>
+          <a:p>
+            <a:pPr algn="l"/>
+            <a:fld id="{C1FF6DA9-008F-8B48-92A6-B652298478BF}" type="slidenum">
+              <a:rPr lang="en-US" smtClean="0"/>
+              <a:pPr algn="l"/>
+              <a:t>18</a:t>
+            </a:fld>
+            <a:endParaRPr lang="en-US" dirty="0"/>
+          </a:p>
+        </p:txBody>
+      </p:sp>
+    </p:spTree>
+    <p:extLst>
+      <p:ext uri="{BB962C8B-B14F-4D97-AF65-F5344CB8AC3E}">
+        <p14:creationId xmlns:p14="http://schemas.microsoft.com/office/powerpoint/2010/main" val="4046432290"/>
       </p:ext>
     </p:extLst>
   </p:cSld>
@@ -9684,7 +9602,7 @@
         </p:nvSpPr>
         <p:spPr>
           <a:xfrm>
-            <a:off x="4345781" y="2067817"/>
+            <a:off x="452438" y="620017"/>
             <a:ext cx="3500437" cy="731490"/>
           </a:xfrm>
           <a:prstGeom prst="rect">
@@ -9704,14 +9622,20 @@
               </a:lnSpc>
             </a:pPr>
             <a:r>
-              <a:rPr sz="4800" b="1" i="0" u="none">
+              <a:rPr lang="en-US" sz="4800" b="1" i="0" u="none" dirty="0">
                 <a:solidFill>
                   <a:srgbClr val="F8FAFC"/>
                 </a:solidFill>
                 <a:latin typeface="Inter"/>
               </a:rPr>
-              <a:t>Thank you.</a:t>
-            </a:r>
+              <a:t>References</a:t>
+            </a:r>
+            <a:endParaRPr sz="4800" b="1" i="0" u="none" dirty="0">
+              <a:solidFill>
+                <a:srgbClr val="F8FAFC"/>
+              </a:solidFill>
+              <a:latin typeface="Inter"/>
+            </a:endParaRPr>
           </a:p>
         </p:txBody>
       </p:sp>
@@ -9723,7 +9647,7 @@
         </p:nvSpPr>
         <p:spPr>
           <a:xfrm>
-            <a:off x="5791200" y="3027908"/>
+            <a:off x="838200" y="1351507"/>
             <a:ext cx="609600" cy="38100"/>
           </a:xfrm>
           <a:prstGeom prst="rect">
@@ -9768,8 +9692,8 @@
         </p:nvSpPr>
         <p:spPr>
           <a:xfrm>
-            <a:off x="4562475" y="3447008"/>
-            <a:ext cx="3067050" cy="276225"/>
+            <a:off x="838200" y="2468934"/>
+            <a:ext cx="9202233" cy="2769989"/>
           </a:xfrm>
           <a:prstGeom prst="rect">
             <a:avLst/>
@@ -9782,91 +9706,286 @@
           </a:bodyPr>
           <a:lstStyle/>
           <a:p>
-            <a:pPr algn="ctr"/>
-            <a:r>
-              <a:rPr sz="1800" b="0" i="0" u="none" dirty="0">
-                <a:solidFill>
-                  <a:srgbClr val="94A3B8"/>
+            <a:pPr marL="285750" indent="-285750">
+              <a:buFont typeface="Arial" panose="020B0604020202020204" pitchFamily="34" charset="0"/>
+              <a:buChar char="•"/>
+            </a:pPr>
+            <a:r>
+              <a:rPr lang="en-GB" dirty="0">
+                <a:solidFill>
+                  <a:schemeClr val="bg1">
+                    <a:lumMod val="95000"/>
+                  </a:schemeClr>
                 </a:solidFill>
                 <a:latin typeface="Inter"/>
-              </a:rPr>
-              <a:t>alexandra.titel17@gmail.com</a:t>
-            </a:r>
-          </a:p>
-        </p:txBody>
-      </p:sp>
-      <p:sp>
-        <p:nvSpPr>
-          <p:cNvPr id="5" name="TextBox 4"/>
-          <p:cNvSpPr txBox="1"/>
-          <p:nvPr/>
-        </p:nvSpPr>
-        <p:spPr>
-          <a:xfrm>
-            <a:off x="4395787" y="3799433"/>
-            <a:ext cx="3400425" cy="228600"/>
-          </a:xfrm>
-          <a:prstGeom prst="rect">
-            <a:avLst/>
-          </a:prstGeom>
-          <a:noFill/>
-        </p:spPr>
-        <p:txBody>
-          <a:bodyPr wrap="square" lIns="0" tIns="0" rIns="0" bIns="0" anchor="t">
-            <a:spAutoFit/>
-          </a:bodyPr>
-          <a:lstStyle/>
-          <a:p>
-            <a:pPr algn="ctr"/>
-            <a:r>
-              <a:rPr sz="1500" b="0" i="0" u="none">
-                <a:solidFill>
-                  <a:srgbClr val="64748B"/>
+                <a:hlinkClick r:id="rId2">
+                  <a:extLst>
+                    <a:ext uri="{A12FA001-AC4F-418D-AE19-62706E023703}">
+                      <ahyp:hlinkClr xmlns:ahyp="http://schemas.microsoft.com/office/drawing/2018/hyperlinkcolor" val="tx"/>
+                    </a:ext>
+                  </a:extLst>
+                </a:hlinkClick>
+              </a:rPr>
+              <a:t>https://scikit-learn.org/stable/modules/generated/sklearn.neural_network.MLPRegressor.html</a:t>
+            </a:r>
+            <a:endParaRPr lang="en-GB" dirty="0">
+              <a:solidFill>
+                <a:schemeClr val="bg1">
+                  <a:lumMod val="95000"/>
+                </a:schemeClr>
+              </a:solidFill>
+              <a:latin typeface="Inter"/>
+            </a:endParaRPr>
+          </a:p>
+          <a:p>
+            <a:pPr marL="285750" indent="-285750">
+              <a:buFont typeface="Arial" panose="020B0604020202020204" pitchFamily="34" charset="0"/>
+              <a:buChar char="•"/>
+            </a:pPr>
+            <a:r>
+              <a:rPr lang="en-GB" dirty="0">
+                <a:solidFill>
+                  <a:schemeClr val="bg1">
+                    <a:lumMod val="95000"/>
+                  </a:schemeClr>
                 </a:solidFill>
                 <a:latin typeface="Inter"/>
               </a:rPr>
-              <a:t>github.com/titelaex/ParamsCalibrator</a:t>
-            </a:r>
-          </a:p>
-        </p:txBody>
-      </p:sp>
-      <p:sp>
-        <p:nvSpPr>
-          <p:cNvPr id="7" name="TextBox 6"/>
-          <p:cNvSpPr txBox="1"/>
-          <p:nvPr/>
-        </p:nvSpPr>
-        <p:spPr>
-          <a:xfrm>
-            <a:off x="3952875" y="4523333"/>
-            <a:ext cx="4705350" cy="723275"/>
-          </a:xfrm>
-          <a:prstGeom prst="rect">
-            <a:avLst/>
-          </a:prstGeom>
-          <a:noFill/>
-        </p:spPr>
-        <p:txBody>
-          <a:bodyPr wrap="square" lIns="0" tIns="0" rIns="0" bIns="0" anchor="t">
-            <a:spAutoFit/>
-          </a:bodyPr>
-          <a:lstStyle/>
-          <a:p>
-            <a:pPr algn="ctr"/>
-            <a:r>
-              <a:rPr lang="en-GB" sz="1600" dirty="0">
-                <a:solidFill>
-                  <a:schemeClr val="bg1"/>
-                </a:solidFill>
-              </a:rPr>
-              <a:t>Mathematical Optimization &amp; Data Processing for Physical Constant Calibration via ML</a:t>
-            </a:r>
-          </a:p>
-          <a:p>
-            <a:pPr algn="ctr"/>
-            <a:endParaRPr sz="1500" b="0" i="0" u="none" dirty="0">
+              <a:t>https://numpy.org/doc/stable/</a:t>
+            </a:r>
+          </a:p>
+          <a:p>
+            <a:pPr marL="285750" indent="-285750">
+              <a:buFont typeface="Arial" panose="020B0604020202020204" pitchFamily="34" charset="0"/>
+              <a:buChar char="•"/>
+            </a:pPr>
+            <a:r>
+              <a:rPr lang="en-GB" dirty="0">
+                <a:solidFill>
+                  <a:schemeClr val="bg1">
+                    <a:lumMod val="95000"/>
+                  </a:schemeClr>
+                </a:solidFill>
+                <a:latin typeface="Inter"/>
+                <a:hlinkClick r:id="rId3">
+                  <a:extLst>
+                    <a:ext uri="{A12FA001-AC4F-418D-AE19-62706E023703}">
+                      <ahyp:hlinkClr xmlns:ahyp="http://schemas.microsoft.com/office/drawing/2018/hyperlinkcolor" val="tx"/>
+                    </a:ext>
+                  </a:extLst>
+                </a:hlinkClick>
+              </a:rPr>
+              <a:t>https://en.wikipedia.org/wiki/Lumped-element_model</a:t>
+            </a:r>
+            <a:endParaRPr lang="en-GB" dirty="0">
               <a:solidFill>
-                <a:srgbClr val="F8FAFC"/>
+                <a:schemeClr val="bg1">
+                  <a:lumMod val="95000"/>
+                </a:schemeClr>
+              </a:solidFill>
+              <a:latin typeface="Inter"/>
+            </a:endParaRPr>
+          </a:p>
+          <a:p>
+            <a:pPr marL="285750" indent="-285750">
+              <a:buFont typeface="Arial" panose="020B0604020202020204" pitchFamily="34" charset="0"/>
+              <a:buChar char="•"/>
+            </a:pPr>
+            <a:r>
+              <a:rPr lang="en-GB" dirty="0">
+                <a:solidFill>
+                  <a:schemeClr val="bg1">
+                    <a:lumMod val="95000"/>
+                  </a:schemeClr>
+                </a:solidFill>
+                <a:hlinkClick r:id="rId4">
+                  <a:extLst>
+                    <a:ext uri="{A12FA001-AC4F-418D-AE19-62706E023703}">
+                      <ahyp:hlinkClr xmlns:ahyp="http://schemas.microsoft.com/office/drawing/2018/hyperlinkcolor" val="tx"/>
+                    </a:ext>
+                  </a:extLst>
+                </a:hlinkClick>
+              </a:rPr>
+              <a:t>https://en.wikipedia.org/wiki/Joule_heating</a:t>
+            </a:r>
+            <a:endParaRPr lang="en-GB" dirty="0">
+              <a:solidFill>
+                <a:schemeClr val="bg1">
+                  <a:lumMod val="95000"/>
+                </a:schemeClr>
+              </a:solidFill>
+            </a:endParaRPr>
+          </a:p>
+          <a:p>
+            <a:pPr marL="285750" indent="-285750">
+              <a:buFont typeface="Arial" panose="020B0604020202020204" pitchFamily="34" charset="0"/>
+              <a:buChar char="•"/>
+            </a:pPr>
+            <a:r>
+              <a:rPr lang="en-GB" dirty="0">
+                <a:solidFill>
+                  <a:schemeClr val="bg1">
+                    <a:lumMod val="95000"/>
+                  </a:schemeClr>
+                </a:solidFill>
+                <a:latin typeface="Inter"/>
+                <a:hlinkClick r:id="rId5">
+                  <a:extLst>
+                    <a:ext uri="{A12FA001-AC4F-418D-AE19-62706E023703}">
+                      <ahyp:hlinkClr xmlns:ahyp="http://schemas.microsoft.com/office/drawing/2018/hyperlinkcolor" val="tx"/>
+                    </a:ext>
+                  </a:extLst>
+                </a:hlinkClick>
+              </a:rPr>
+              <a:t>https://en.wikipedia.org/wiki/Levenberg%E2%80%93Marquardt_algorithm</a:t>
+            </a:r>
+            <a:endParaRPr lang="en-GB" dirty="0">
+              <a:solidFill>
+                <a:schemeClr val="bg1">
+                  <a:lumMod val="95000"/>
+                </a:schemeClr>
+              </a:solidFill>
+              <a:latin typeface="Inter"/>
+            </a:endParaRPr>
+          </a:p>
+          <a:p>
+            <a:pPr marL="285750" indent="-285750">
+              <a:buFont typeface="Arial" panose="020B0604020202020204" pitchFamily="34" charset="0"/>
+              <a:buChar char="•"/>
+            </a:pPr>
+            <a:r>
+              <a:rPr lang="en-GB" dirty="0">
+                <a:solidFill>
+                  <a:schemeClr val="bg1">
+                    <a:lumMod val="95000"/>
+                  </a:schemeClr>
+                </a:solidFill>
+                <a:latin typeface="Inter"/>
+                <a:hlinkClick r:id="rId6">
+                  <a:extLst>
+                    <a:ext uri="{A12FA001-AC4F-418D-AE19-62706E023703}">
+                      <ahyp:hlinkClr xmlns:ahyp="http://schemas.microsoft.com/office/drawing/2018/hyperlinkcolor" val="tx"/>
+                    </a:ext>
+                  </a:extLst>
+                </a:hlinkClick>
+              </a:rPr>
+              <a:t>https://en.wikipedia.org/wiki/Genetic_algorithm</a:t>
+            </a:r>
+            <a:endParaRPr lang="en-GB" dirty="0">
+              <a:solidFill>
+                <a:schemeClr val="bg1">
+                  <a:lumMod val="95000"/>
+                </a:schemeClr>
+              </a:solidFill>
+              <a:latin typeface="Inter"/>
+            </a:endParaRPr>
+          </a:p>
+          <a:p>
+            <a:pPr marL="285750" indent="-285750">
+              <a:buFont typeface="Arial" panose="020B0604020202020204" pitchFamily="34" charset="0"/>
+              <a:buChar char="•"/>
+            </a:pPr>
+            <a:r>
+              <a:rPr lang="en-GB" dirty="0">
+                <a:solidFill>
+                  <a:schemeClr val="bg1">
+                    <a:lumMod val="95000"/>
+                  </a:schemeClr>
+                </a:solidFill>
+                <a:latin typeface="Inter"/>
+                <a:hlinkClick r:id="rId7">
+                  <a:extLst>
+                    <a:ext uri="{A12FA001-AC4F-418D-AE19-62706E023703}">
+                      <ahyp:hlinkClr xmlns:ahyp="http://schemas.microsoft.com/office/drawing/2018/hyperlinkcolor" val="tx"/>
+                    </a:ext>
+                  </a:extLst>
+                </a:hlinkClick>
+              </a:rPr>
+              <a:t>https://en.wikipedia.org/wiki/Particle_swarm_optimization</a:t>
+            </a:r>
+            <a:endParaRPr lang="en-GB" dirty="0">
+              <a:solidFill>
+                <a:schemeClr val="bg1">
+                  <a:lumMod val="95000"/>
+                </a:schemeClr>
+              </a:solidFill>
+              <a:latin typeface="Inter"/>
+            </a:endParaRPr>
+          </a:p>
+          <a:p>
+            <a:pPr marL="285750" indent="-285750">
+              <a:buFont typeface="Arial" panose="020B0604020202020204" pitchFamily="34" charset="0"/>
+              <a:buChar char="•"/>
+            </a:pPr>
+            <a:r>
+              <a:rPr lang="en-GB" dirty="0">
+                <a:solidFill>
+                  <a:schemeClr val="bg1">
+                    <a:lumMod val="95000"/>
+                  </a:schemeClr>
+                </a:solidFill>
+                <a:latin typeface="Inter"/>
+                <a:hlinkClick r:id="rId8">
+                  <a:extLst>
+                    <a:ext uri="{A12FA001-AC4F-418D-AE19-62706E023703}">
+                      <ahyp:hlinkClr xmlns:ahyp="http://schemas.microsoft.com/office/drawing/2018/hyperlinkcolor" val="tx"/>
+                    </a:ext>
+                  </a:extLst>
+                </a:hlinkClick>
+              </a:rPr>
+              <a:t>https://en.wikipedia.org/wiki/Extended_Kalman_filter</a:t>
+            </a:r>
+            <a:endParaRPr lang="en-GB" dirty="0">
+              <a:solidFill>
+                <a:schemeClr val="bg1">
+                  <a:lumMod val="95000"/>
+                </a:schemeClr>
+              </a:solidFill>
+              <a:latin typeface="Inter"/>
+            </a:endParaRPr>
+          </a:p>
+          <a:p>
+            <a:pPr marL="285750" indent="-285750">
+              <a:buFont typeface="Arial" panose="020B0604020202020204" pitchFamily="34" charset="0"/>
+              <a:buChar char="•"/>
+            </a:pPr>
+            <a:r>
+              <a:rPr lang="en-GB" dirty="0">
+                <a:solidFill>
+                  <a:schemeClr val="bg1">
+                    <a:lumMod val="95000"/>
+                  </a:schemeClr>
+                </a:solidFill>
+                <a:latin typeface="Inter"/>
+                <a:hlinkClick r:id="rId9">
+                  <a:extLst>
+                    <a:ext uri="{A12FA001-AC4F-418D-AE19-62706E023703}">
+                      <ahyp:hlinkClr xmlns:ahyp="http://schemas.microsoft.com/office/drawing/2018/hyperlinkcolor" val="tx"/>
+                    </a:ext>
+                  </a:extLst>
+                </a:hlinkClick>
+              </a:rPr>
+              <a:t>https://en.wikipedia.org/wiki/Bayesian_optimization</a:t>
+            </a:r>
+            <a:endParaRPr lang="en-GB" dirty="0">
+              <a:solidFill>
+                <a:schemeClr val="bg1">
+                  <a:lumMod val="95000"/>
+                </a:schemeClr>
+              </a:solidFill>
+              <a:latin typeface="Inter"/>
+            </a:endParaRPr>
+          </a:p>
+          <a:p>
+            <a:pPr marL="285750" indent="-285750">
+              <a:buFont typeface="Arial" panose="020B0604020202020204" pitchFamily="34" charset="0"/>
+              <a:buChar char="•"/>
+            </a:pPr>
+            <a:endParaRPr sz="1800" b="0" i="0" u="none" dirty="0">
+              <a:solidFill>
+                <a:schemeClr val="bg1">
+                  <a:lumMod val="95000"/>
+                </a:schemeClr>
               </a:solidFill>
               <a:latin typeface="Inter"/>
             </a:endParaRPr>
@@ -9888,7 +10007,7 @@
           <p:nvPr/>
         </p:nvPicPr>
         <p:blipFill>
-          <a:blip r:embed="rId2"/>
+          <a:blip r:embed="rId10"/>
           <a:stretch>
             <a:fillRect/>
           </a:stretch>
@@ -10425,6 +10544,2162 @@
 </p:sld>
 </file>
 
+<file path=ppt/slides/slide20.xml><?xml version="1.0" encoding="utf-8"?>
+<p:sld xmlns:a="http://schemas.openxmlformats.org/drawingml/2006/main" xmlns:r="http://schemas.openxmlformats.org/officeDocument/2006/relationships" xmlns:p="http://schemas.openxmlformats.org/presentationml/2006/main">
+  <p:cSld>
+    <p:spTree>
+      <p:nvGrpSpPr>
+        <p:cNvPr id="1" name=""/>
+        <p:cNvGrpSpPr/>
+        <p:nvPr/>
+      </p:nvGrpSpPr>
+      <p:grpSpPr>
+        <a:xfrm>
+          <a:off x="0" y="0"/>
+          <a:ext cx="0" cy="0"/>
+          <a:chOff x="0" y="0"/>
+          <a:chExt cx="0" cy="0"/>
+        </a:xfrm>
+      </p:grpSpPr>
+      <p:sp>
+        <p:nvSpPr>
+          <p:cNvPr id="26" name="Rectangle: Rounded Corners 25">
+            <a:extLst>
+              <a:ext uri="{FF2B5EF4-FFF2-40B4-BE49-F238E27FC236}">
+                <a16:creationId xmlns:a16="http://schemas.microsoft.com/office/drawing/2014/main" id="{7D3E06A1-5967-2DCE-FD85-BCA5B112FCB1}"/>
+              </a:ext>
+            </a:extLst>
+          </p:cNvPr>
+          <p:cNvSpPr/>
+          <p:nvPr/>
+        </p:nvSpPr>
+        <p:spPr>
+          <a:xfrm>
+            <a:off x="1295400" y="4511702"/>
+            <a:ext cx="10287000" cy="1420483"/>
+          </a:xfrm>
+          <a:prstGeom prst="roundRect">
+            <a:avLst>
+              <a:gd name="adj" fmla="val 6865"/>
+            </a:avLst>
+          </a:prstGeom>
+          <a:solidFill>
+            <a:schemeClr val="bg1"/>
+          </a:solidFill>
+          <a:ln>
+            <a:solidFill>
+              <a:srgbClr val="009999"/>
+            </a:solidFill>
+          </a:ln>
+          <a:effectLst>
+            <a:outerShdw blurRad="50800" dist="38100" dir="2700000" algn="tl" rotWithShape="0">
+              <a:prstClr val="black">
+                <a:alpha val="40000"/>
+              </a:prstClr>
+            </a:outerShdw>
+          </a:effectLst>
+        </p:spPr>
+        <p:style>
+          <a:lnRef idx="1">
+            <a:schemeClr val="accent1"/>
+          </a:lnRef>
+          <a:fillRef idx="3">
+            <a:schemeClr val="accent1"/>
+          </a:fillRef>
+          <a:effectRef idx="2">
+            <a:schemeClr val="accent1"/>
+          </a:effectRef>
+          <a:fontRef idx="minor">
+            <a:schemeClr val="lt1"/>
+          </a:fontRef>
+        </p:style>
+        <p:txBody>
+          <a:bodyPr rtlCol="0" anchor="ctr"/>
+          <a:lstStyle/>
+          <a:p>
+            <a:pPr algn="ctr"/>
+            <a:endParaRPr lang="en-GB"/>
+          </a:p>
+        </p:txBody>
+      </p:sp>
+      <p:sp>
+        <p:nvSpPr>
+          <p:cNvPr id="24" name="Rectangle: Rounded Corners 23">
+            <a:extLst>
+              <a:ext uri="{FF2B5EF4-FFF2-40B4-BE49-F238E27FC236}">
+                <a16:creationId xmlns:a16="http://schemas.microsoft.com/office/drawing/2014/main" id="{97566251-D920-28FE-115D-92D4FF9D0BBF}"/>
+              </a:ext>
+            </a:extLst>
+          </p:cNvPr>
+          <p:cNvSpPr/>
+          <p:nvPr/>
+        </p:nvSpPr>
+        <p:spPr>
+          <a:xfrm>
+            <a:off x="1295400" y="3234546"/>
+            <a:ext cx="10287000" cy="1076320"/>
+          </a:xfrm>
+          <a:prstGeom prst="roundRect">
+            <a:avLst>
+              <a:gd name="adj" fmla="val 6865"/>
+            </a:avLst>
+          </a:prstGeom>
+          <a:solidFill>
+            <a:schemeClr val="bg1"/>
+          </a:solidFill>
+          <a:ln>
+            <a:noFill/>
+          </a:ln>
+          <a:effectLst>
+            <a:outerShdw blurRad="50800" dist="38100" dir="2700000" algn="tl" rotWithShape="0">
+              <a:prstClr val="black">
+                <a:alpha val="40000"/>
+              </a:prstClr>
+            </a:outerShdw>
+          </a:effectLst>
+        </p:spPr>
+        <p:style>
+          <a:lnRef idx="1">
+            <a:schemeClr val="accent1"/>
+          </a:lnRef>
+          <a:fillRef idx="3">
+            <a:schemeClr val="accent1"/>
+          </a:fillRef>
+          <a:effectRef idx="2">
+            <a:schemeClr val="accent1"/>
+          </a:effectRef>
+          <a:fontRef idx="minor">
+            <a:schemeClr val="lt1"/>
+          </a:fontRef>
+        </p:style>
+        <p:txBody>
+          <a:bodyPr rtlCol="0" anchor="ctr"/>
+          <a:lstStyle/>
+          <a:p>
+            <a:pPr algn="ctr"/>
+            <a:endParaRPr lang="en-GB"/>
+          </a:p>
+        </p:txBody>
+      </p:sp>
+      <p:sp>
+        <p:nvSpPr>
+          <p:cNvPr id="20" name="Rectangle: Rounded Corners 19">
+            <a:extLst>
+              <a:ext uri="{FF2B5EF4-FFF2-40B4-BE49-F238E27FC236}">
+                <a16:creationId xmlns:a16="http://schemas.microsoft.com/office/drawing/2014/main" id="{B9E4747E-4974-DA33-2B60-3D93A26AC4FA}"/>
+              </a:ext>
+            </a:extLst>
+          </p:cNvPr>
+          <p:cNvSpPr/>
+          <p:nvPr/>
+        </p:nvSpPr>
+        <p:spPr>
+          <a:xfrm>
+            <a:off x="1295400" y="1957390"/>
+            <a:ext cx="10287000" cy="1076320"/>
+          </a:xfrm>
+          <a:prstGeom prst="roundRect">
+            <a:avLst>
+              <a:gd name="adj" fmla="val 6865"/>
+            </a:avLst>
+          </a:prstGeom>
+          <a:solidFill>
+            <a:schemeClr val="bg1"/>
+          </a:solidFill>
+          <a:ln>
+            <a:noFill/>
+          </a:ln>
+          <a:effectLst>
+            <a:outerShdw blurRad="50800" dist="38100" dir="2700000" algn="tl" rotWithShape="0">
+              <a:prstClr val="black">
+                <a:alpha val="40000"/>
+              </a:prstClr>
+            </a:outerShdw>
+          </a:effectLst>
+        </p:spPr>
+        <p:style>
+          <a:lnRef idx="1">
+            <a:schemeClr val="accent1"/>
+          </a:lnRef>
+          <a:fillRef idx="3">
+            <a:schemeClr val="accent1"/>
+          </a:fillRef>
+          <a:effectRef idx="2">
+            <a:schemeClr val="accent1"/>
+          </a:effectRef>
+          <a:fontRef idx="minor">
+            <a:schemeClr val="lt1"/>
+          </a:fontRef>
+        </p:style>
+        <p:txBody>
+          <a:bodyPr rtlCol="0" anchor="ctr"/>
+          <a:lstStyle/>
+          <a:p>
+            <a:pPr algn="ctr"/>
+            <a:endParaRPr lang="en-GB"/>
+          </a:p>
+        </p:txBody>
+      </p:sp>
+      <p:pic>
+        <p:nvPicPr>
+          <p:cNvPr id="2" name="Picture 1" descr="image.png"/>
+          <p:cNvPicPr>
+            <a:picLocks noChangeAspect="1"/>
+          </p:cNvPicPr>
+          <p:nvPr/>
+        </p:nvPicPr>
+        <p:blipFill>
+          <a:blip r:embed="rId2"/>
+          <a:stretch>
+            <a:fillRect/>
+          </a:stretch>
+        </p:blipFill>
+        <p:spPr>
+          <a:xfrm>
+            <a:off x="609600" y="2266950"/>
+            <a:ext cx="457200" cy="457200"/>
+          </a:xfrm>
+          <a:prstGeom prst="rect">
+            <a:avLst/>
+          </a:prstGeom>
+        </p:spPr>
+      </p:pic>
+      <p:pic>
+        <p:nvPicPr>
+          <p:cNvPr id="4" name="Picture 3" descr="image.png"/>
+          <p:cNvPicPr>
+            <a:picLocks noChangeAspect="1"/>
+          </p:cNvPicPr>
+          <p:nvPr/>
+        </p:nvPicPr>
+        <p:blipFill>
+          <a:blip r:embed="rId3"/>
+          <a:stretch>
+            <a:fillRect/>
+          </a:stretch>
+        </p:blipFill>
+        <p:spPr>
+          <a:xfrm>
+            <a:off x="609600" y="3543300"/>
+            <a:ext cx="457200" cy="457200"/>
+          </a:xfrm>
+          <a:prstGeom prst="rect">
+            <a:avLst/>
+          </a:prstGeom>
+        </p:spPr>
+      </p:pic>
+      <p:pic>
+        <p:nvPicPr>
+          <p:cNvPr id="6" name="Picture 5" descr="image.png"/>
+          <p:cNvPicPr>
+            <a:picLocks noChangeAspect="1"/>
+          </p:cNvPicPr>
+          <p:nvPr/>
+        </p:nvPicPr>
+        <p:blipFill>
+          <a:blip r:embed="rId4"/>
+          <a:stretch>
+            <a:fillRect/>
+          </a:stretch>
+        </p:blipFill>
+        <p:spPr>
+          <a:xfrm>
+            <a:off x="609600" y="4991100"/>
+            <a:ext cx="457200" cy="457200"/>
+          </a:xfrm>
+          <a:prstGeom prst="rect">
+            <a:avLst/>
+          </a:prstGeom>
+        </p:spPr>
+      </p:pic>
+      <p:pic>
+        <p:nvPicPr>
+          <p:cNvPr id="8" name="Picture 7" descr="image.png"/>
+          <p:cNvPicPr>
+            <a:picLocks noChangeAspect="1"/>
+          </p:cNvPicPr>
+          <p:nvPr/>
+        </p:nvPicPr>
+        <p:blipFill>
+          <a:blip r:embed="rId5"/>
+          <a:stretch>
+            <a:fillRect/>
+          </a:stretch>
+        </p:blipFill>
+        <p:spPr>
+          <a:xfrm>
+            <a:off x="1485900" y="2390775"/>
+            <a:ext cx="9906000" cy="476250"/>
+          </a:xfrm>
+          <a:prstGeom prst="rect">
+            <a:avLst/>
+          </a:prstGeom>
+        </p:spPr>
+      </p:pic>
+      <p:pic>
+        <p:nvPicPr>
+          <p:cNvPr id="9" name="Picture 8" descr="image.png"/>
+          <p:cNvPicPr>
+            <a:picLocks noChangeAspect="1"/>
+          </p:cNvPicPr>
+          <p:nvPr/>
+        </p:nvPicPr>
+        <p:blipFill>
+          <a:blip r:embed="rId6"/>
+          <a:stretch>
+            <a:fillRect/>
+          </a:stretch>
+        </p:blipFill>
+        <p:spPr>
+          <a:xfrm>
+            <a:off x="1485900" y="3667125"/>
+            <a:ext cx="9906000" cy="476250"/>
+          </a:xfrm>
+          <a:prstGeom prst="rect">
+            <a:avLst/>
+          </a:prstGeom>
+        </p:spPr>
+      </p:pic>
+      <p:pic>
+        <p:nvPicPr>
+          <p:cNvPr id="10" name="Picture 9" descr="image.png"/>
+          <p:cNvPicPr>
+            <a:picLocks noChangeAspect="1"/>
+          </p:cNvPicPr>
+          <p:nvPr/>
+        </p:nvPicPr>
+        <p:blipFill>
+          <a:blip r:embed="rId7"/>
+          <a:stretch>
+            <a:fillRect/>
+          </a:stretch>
+        </p:blipFill>
+        <p:spPr>
+          <a:xfrm>
+            <a:off x="1504950" y="4962525"/>
+            <a:ext cx="9867900" cy="476250"/>
+          </a:xfrm>
+          <a:prstGeom prst="rect">
+            <a:avLst/>
+          </a:prstGeom>
+        </p:spPr>
+      </p:pic>
+      <p:sp>
+        <p:nvSpPr>
+          <p:cNvPr id="11" name="TextBox 10"/>
+          <p:cNvSpPr txBox="1"/>
+          <p:nvPr/>
+        </p:nvSpPr>
+        <p:spPr>
+          <a:xfrm>
+            <a:off x="609600" y="457200"/>
+            <a:ext cx="10972800" cy="190500"/>
+          </a:xfrm>
+          <a:prstGeom prst="rect">
+            <a:avLst/>
+          </a:prstGeom>
+          <a:noFill/>
+        </p:spPr>
+        <p:txBody>
+          <a:bodyPr wrap="square" lIns="0" tIns="0" rIns="0" bIns="0" anchor="t">
+            <a:spAutoFit/>
+          </a:bodyPr>
+          <a:lstStyle/>
+          <a:p>
+            <a:pPr algn="l"/>
+            <a:r>
+              <a:rPr sz="1200" b="1" i="0" u="none">
+                <a:solidFill>
+                  <a:srgbClr val="009999"/>
+                </a:solidFill>
+                <a:latin typeface="Inter"/>
+              </a:rPr>
+              <a:t>ENERGY BALANCE</a:t>
+            </a:r>
+          </a:p>
+        </p:txBody>
+      </p:sp>
+      <p:sp>
+        <p:nvSpPr>
+          <p:cNvPr id="12" name="TextBox 11"/>
+          <p:cNvSpPr txBox="1"/>
+          <p:nvPr/>
+        </p:nvSpPr>
+        <p:spPr>
+          <a:xfrm>
+            <a:off x="609600" y="723900"/>
+            <a:ext cx="11521440" cy="457200"/>
+          </a:xfrm>
+          <a:prstGeom prst="rect">
+            <a:avLst/>
+          </a:prstGeom>
+          <a:noFill/>
+        </p:spPr>
+        <p:txBody>
+          <a:bodyPr wrap="square" lIns="0" tIns="0" rIns="0" bIns="0" anchor="t">
+            <a:spAutoFit/>
+          </a:bodyPr>
+          <a:lstStyle/>
+          <a:p>
+            <a:pPr algn="l">
+              <a:lnSpc>
+                <a:spcPts val="3600"/>
+              </a:lnSpc>
+            </a:pPr>
+            <a:r>
+              <a:rPr sz="3000" b="1" i="0" u="none">
+                <a:solidFill>
+                  <a:srgbClr val="000028"/>
+                </a:solidFill>
+                <a:latin typeface="Inter"/>
+              </a:rPr>
+              <a:t>Deriving the Formula</a:t>
+            </a:r>
+          </a:p>
+        </p:txBody>
+      </p:sp>
+      <p:sp>
+        <p:nvSpPr>
+          <p:cNvPr id="13" name="TextBox 12"/>
+          <p:cNvSpPr txBox="1"/>
+          <p:nvPr/>
+        </p:nvSpPr>
+        <p:spPr>
+          <a:xfrm>
+            <a:off x="1485900" y="2124075"/>
+            <a:ext cx="9906000" cy="190500"/>
+          </a:xfrm>
+          <a:prstGeom prst="rect">
+            <a:avLst/>
+          </a:prstGeom>
+          <a:noFill/>
+        </p:spPr>
+        <p:txBody>
+          <a:bodyPr wrap="square" lIns="0" tIns="0" rIns="0" bIns="0" anchor="t">
+            <a:spAutoFit/>
+          </a:bodyPr>
+          <a:lstStyle/>
+          <a:p>
+            <a:pPr algn="l"/>
+            <a:r>
+              <a:rPr sz="1200" b="0" i="0" u="none">
+                <a:solidFill>
+                  <a:srgbClr val="6B7280"/>
+                </a:solidFill>
+                <a:latin typeface="Inter SemiBold"/>
+              </a:rPr>
+              <a:t>System differential equation</a:t>
+            </a:r>
+          </a:p>
+        </p:txBody>
+      </p:sp>
+      <p:sp>
+        <p:nvSpPr>
+          <p:cNvPr id="14" name="TextBox 13"/>
+          <p:cNvSpPr txBox="1"/>
+          <p:nvPr/>
+        </p:nvSpPr>
+        <p:spPr>
+          <a:xfrm>
+            <a:off x="1485900" y="3400425"/>
+            <a:ext cx="9906000" cy="190500"/>
+          </a:xfrm>
+          <a:prstGeom prst="rect">
+            <a:avLst/>
+          </a:prstGeom>
+          <a:noFill/>
+        </p:spPr>
+        <p:txBody>
+          <a:bodyPr wrap="square" lIns="0" tIns="0" rIns="0" bIns="0" anchor="t">
+            <a:spAutoFit/>
+          </a:bodyPr>
+          <a:lstStyle/>
+          <a:p>
+            <a:pPr algn="l"/>
+            <a:r>
+              <a:rPr sz="1200" b="0" i="0" u="none">
+                <a:solidFill>
+                  <a:srgbClr val="6B7280"/>
+                </a:solidFill>
+                <a:latin typeface="Inter SemiBold"/>
+              </a:rPr>
+              <a:t>Integrate from 0 to t</a:t>
+            </a:r>
+          </a:p>
+        </p:txBody>
+      </p:sp>
+      <p:sp>
+        <p:nvSpPr>
+          <p:cNvPr id="15" name="TextBox 14"/>
+          <p:cNvSpPr txBox="1"/>
+          <p:nvPr/>
+        </p:nvSpPr>
+        <p:spPr>
+          <a:xfrm>
+            <a:off x="1504950" y="4695825"/>
+            <a:ext cx="9867900" cy="190500"/>
+          </a:xfrm>
+          <a:prstGeom prst="rect">
+            <a:avLst/>
+          </a:prstGeom>
+          <a:noFill/>
+        </p:spPr>
+        <p:txBody>
+          <a:bodyPr wrap="square" lIns="0" tIns="0" rIns="0" bIns="0" anchor="t">
+            <a:spAutoFit/>
+          </a:bodyPr>
+          <a:lstStyle/>
+          <a:p>
+            <a:pPr algn="l"/>
+            <a:r>
+              <a:rPr sz="1200" b="0" i="0" u="none">
+                <a:solidFill>
+                  <a:srgbClr val="009999"/>
+                </a:solidFill>
+                <a:latin typeface="Inter SemiBold"/>
+              </a:rPr>
+              <a:t>Linear rearrangement (y = mx + intercept)</a:t>
+            </a:r>
+          </a:p>
+        </p:txBody>
+      </p:sp>
+      <p:sp>
+        <p:nvSpPr>
+          <p:cNvPr id="16" name="TextBox 15"/>
+          <p:cNvSpPr txBox="1"/>
+          <p:nvPr/>
+        </p:nvSpPr>
+        <p:spPr>
+          <a:xfrm>
+            <a:off x="1504950" y="5553075"/>
+            <a:ext cx="9867900" cy="190500"/>
+          </a:xfrm>
+          <a:prstGeom prst="rect">
+            <a:avLst/>
+          </a:prstGeom>
+          <a:noFill/>
+        </p:spPr>
+        <p:txBody>
+          <a:bodyPr wrap="square" lIns="0" tIns="0" rIns="0" bIns="0" anchor="t">
+            <a:spAutoFit/>
+          </a:bodyPr>
+          <a:lstStyle/>
+          <a:p>
+            <a:pPr algn="r"/>
+            <a:r>
+              <a:rPr sz="1200" b="1" i="0" u="none">
+                <a:solidFill>
+                  <a:srgbClr val="009999"/>
+                </a:solidFill>
+                <a:latin typeface="Inter"/>
+              </a:rPr>
+              <a:t>→ hA is literally the slope</a:t>
+            </a:r>
+          </a:p>
+        </p:txBody>
+      </p:sp>
+      <p:sp>
+        <p:nvSpPr>
+          <p:cNvPr id="17" name="TextBox 16"/>
+          <p:cNvSpPr txBox="1"/>
+          <p:nvPr/>
+        </p:nvSpPr>
+        <p:spPr>
+          <a:xfrm>
+            <a:off x="3962400" y="3781425"/>
+            <a:ext cx="457200" cy="247650"/>
+          </a:xfrm>
+          <a:prstGeom prst="rect">
+            <a:avLst/>
+          </a:prstGeom>
+          <a:noFill/>
+        </p:spPr>
+        <p:txBody>
+          <a:bodyPr wrap="square" lIns="0" tIns="0" rIns="0" bIns="0" anchor="t">
+            <a:spAutoFit/>
+          </a:bodyPr>
+          <a:lstStyle/>
+          <a:p>
+            <a:pPr algn="l"/>
+            <a:r>
+              <a:rPr sz="1500" b="1" i="0" u="none">
+                <a:solidFill>
+                  <a:srgbClr val="2DD4BF"/>
+                </a:solidFill>
+                <a:latin typeface="JetBrains Mono"/>
+              </a:rPr>
+              <a:t>E(t)</a:t>
+            </a:r>
+          </a:p>
+        </p:txBody>
+      </p:sp>
+      <p:sp>
+        <p:nvSpPr>
+          <p:cNvPr id="18" name="TextBox 17"/>
+          <p:cNvSpPr txBox="1"/>
+          <p:nvPr/>
+        </p:nvSpPr>
+        <p:spPr>
+          <a:xfrm>
+            <a:off x="5334000" y="3781425"/>
+            <a:ext cx="457200" cy="247650"/>
+          </a:xfrm>
+          <a:prstGeom prst="rect">
+            <a:avLst/>
+          </a:prstGeom>
+          <a:noFill/>
+        </p:spPr>
+        <p:txBody>
+          <a:bodyPr wrap="square" lIns="0" tIns="0" rIns="0" bIns="0" anchor="t">
+            <a:spAutoFit/>
+          </a:bodyPr>
+          <a:lstStyle/>
+          <a:p>
+            <a:pPr algn="l"/>
+            <a:r>
+              <a:rPr sz="1500" b="1" i="0" u="none">
+                <a:solidFill>
+                  <a:srgbClr val="2DD4BF"/>
+                </a:solidFill>
+                <a:latin typeface="JetBrains Mono"/>
+              </a:rPr>
+              <a:t>S(t)</a:t>
+            </a:r>
+          </a:p>
+        </p:txBody>
+      </p:sp>
+      <p:sp>
+        <p:nvSpPr>
+          <p:cNvPr id="19" name="TextBox 18"/>
+          <p:cNvSpPr txBox="1"/>
+          <p:nvPr/>
+        </p:nvSpPr>
+        <p:spPr>
+          <a:xfrm>
+            <a:off x="3752850" y="5076825"/>
+            <a:ext cx="228600" cy="247650"/>
+          </a:xfrm>
+          <a:prstGeom prst="rect">
+            <a:avLst/>
+          </a:prstGeom>
+          <a:noFill/>
+        </p:spPr>
+        <p:txBody>
+          <a:bodyPr wrap="square" lIns="0" tIns="0" rIns="0" bIns="0" anchor="t">
+            <a:spAutoFit/>
+          </a:bodyPr>
+          <a:lstStyle/>
+          <a:p>
+            <a:pPr algn="l"/>
+            <a:r>
+              <a:rPr sz="1500" b="1" i="0" u="none">
+                <a:solidFill>
+                  <a:srgbClr val="2DD4BF"/>
+                </a:solidFill>
+                <a:latin typeface="JetBrains Mono"/>
+              </a:rPr>
+              <a:t>hA</a:t>
+            </a:r>
+          </a:p>
+        </p:txBody>
+      </p:sp>
+      <p:pic>
+        <p:nvPicPr>
+          <p:cNvPr id="28" name="Copied Picture 7">
+            <a:extLst>
+              <a:ext uri="{FF2B5EF4-FFF2-40B4-BE49-F238E27FC236}">
+                <a16:creationId xmlns:a16="http://schemas.microsoft.com/office/drawing/2014/main" id="{A53998DB-CA5E-37F7-9F85-C0DF448D4A7C}"/>
+              </a:ext>
+            </a:extLst>
+          </p:cNvPr>
+          <p:cNvPicPr>
+            <a:picLocks noChangeAspect="1"/>
+          </p:cNvPicPr>
+          <p:nvPr/>
+        </p:nvPicPr>
+        <p:blipFill>
+          <a:blip r:embed="rId8"/>
+          <a:stretch>
+            <a:fillRect/>
+          </a:stretch>
+        </p:blipFill>
+        <p:spPr>
+          <a:xfrm>
+            <a:off x="10642600" y="6318612"/>
+            <a:ext cx="1231900" cy="316774"/>
+          </a:xfrm>
+          <a:prstGeom prst="rect">
+            <a:avLst/>
+          </a:prstGeom>
+        </p:spPr>
+      </p:pic>
+    </p:spTree>
+    <p:extLst>
+      <p:ext uri="{BB962C8B-B14F-4D97-AF65-F5344CB8AC3E}">
+        <p14:creationId xmlns:p14="http://schemas.microsoft.com/office/powerpoint/2010/main" val="1073098540"/>
+      </p:ext>
+    </p:extLst>
+  </p:cSld>
+  <p:clrMapOvr>
+    <a:masterClrMapping/>
+  </p:clrMapOvr>
+  <mc:AlternateContent xmlns:mc="http://schemas.openxmlformats.org/markup-compatibility/2006" xmlns:p14="http://schemas.microsoft.com/office/powerpoint/2010/main">
+    <mc:Choice Requires="p14">
+      <p:transition p14:dur="250">
+        <p:fade/>
+      </p:transition>
+    </mc:Choice>
+    <mc:Fallback xmlns="">
+      <p:transition>
+        <p:fade/>
+      </p:transition>
+    </mc:Fallback>
+  </mc:AlternateContent>
+</p:sld>
+</file>
+
+<file path=ppt/slides/slide21.xml><?xml version="1.0" encoding="utf-8"?>
+<p:sld xmlns:a="http://schemas.openxmlformats.org/drawingml/2006/main" xmlns:r="http://schemas.openxmlformats.org/officeDocument/2006/relationships" xmlns:p="http://schemas.openxmlformats.org/presentationml/2006/main">
+  <p:cSld>
+    <p:spTree>
+      <p:nvGrpSpPr>
+        <p:cNvPr id="1" name=""/>
+        <p:cNvGrpSpPr/>
+        <p:nvPr/>
+      </p:nvGrpSpPr>
+      <p:grpSpPr>
+        <a:xfrm>
+          <a:off x="0" y="0"/>
+          <a:ext cx="0" cy="0"/>
+          <a:chOff x="0" y="0"/>
+          <a:chExt cx="0" cy="0"/>
+        </a:xfrm>
+      </p:grpSpPr>
+      <p:pic>
+        <p:nvPicPr>
+          <p:cNvPr id="2" name="Picture 1" descr="image.png"/>
+          <p:cNvPicPr>
+            <a:picLocks noChangeAspect="1"/>
+          </p:cNvPicPr>
+          <p:nvPr/>
+        </p:nvPicPr>
+        <p:blipFill>
+          <a:blip r:embed="rId2"/>
+          <a:stretch>
+            <a:fillRect/>
+          </a:stretch>
+        </p:blipFill>
+        <p:spPr>
+          <a:xfrm>
+            <a:off x="609600" y="2424112"/>
+            <a:ext cx="5314950" cy="3038475"/>
+          </a:xfrm>
+          <a:prstGeom prst="rect">
+            <a:avLst/>
+          </a:prstGeom>
+        </p:spPr>
+      </p:pic>
+      <p:pic>
+        <p:nvPicPr>
+          <p:cNvPr id="3" name="Picture 2" descr="image.png"/>
+          <p:cNvPicPr>
+            <a:picLocks noChangeAspect="1"/>
+          </p:cNvPicPr>
+          <p:nvPr/>
+        </p:nvPicPr>
+        <p:blipFill>
+          <a:blip r:embed="rId3"/>
+          <a:stretch>
+            <a:fillRect/>
+          </a:stretch>
+        </p:blipFill>
+        <p:spPr>
+          <a:xfrm>
+            <a:off x="6229350" y="2557462"/>
+            <a:ext cx="5353050" cy="2771775"/>
+          </a:xfrm>
+          <a:prstGeom prst="rect">
+            <a:avLst/>
+          </a:prstGeom>
+        </p:spPr>
+      </p:pic>
+      <p:pic>
+        <p:nvPicPr>
+          <p:cNvPr id="4" name="Picture 3" descr="image.png"/>
+          <p:cNvPicPr>
+            <a:picLocks noChangeAspect="1"/>
+          </p:cNvPicPr>
+          <p:nvPr/>
+        </p:nvPicPr>
+        <p:blipFill>
+          <a:blip r:embed="rId4"/>
+          <a:stretch>
+            <a:fillRect/>
+          </a:stretch>
+        </p:blipFill>
+        <p:spPr>
+          <a:xfrm>
+            <a:off x="914400" y="3614737"/>
+            <a:ext cx="4705350" cy="1543050"/>
+          </a:xfrm>
+          <a:prstGeom prst="rect">
+            <a:avLst/>
+          </a:prstGeom>
+        </p:spPr>
+      </p:pic>
+      <p:pic>
+        <p:nvPicPr>
+          <p:cNvPr id="5" name="Picture 4" descr="image.png"/>
+          <p:cNvPicPr>
+            <a:picLocks noChangeAspect="1"/>
+          </p:cNvPicPr>
+          <p:nvPr/>
+        </p:nvPicPr>
+        <p:blipFill>
+          <a:blip r:embed="rId5"/>
+          <a:stretch>
+            <a:fillRect/>
+          </a:stretch>
+        </p:blipFill>
+        <p:spPr>
+          <a:xfrm>
+            <a:off x="6572250" y="3929062"/>
+            <a:ext cx="4705350" cy="1095375"/>
+          </a:xfrm>
+          <a:prstGeom prst="rect">
+            <a:avLst/>
+          </a:prstGeom>
+        </p:spPr>
+      </p:pic>
+      <p:sp>
+        <p:nvSpPr>
+          <p:cNvPr id="6" name="TextBox 5"/>
+          <p:cNvSpPr txBox="1"/>
+          <p:nvPr/>
+        </p:nvSpPr>
+        <p:spPr>
+          <a:xfrm>
+            <a:off x="609600" y="457200"/>
+            <a:ext cx="10972800" cy="190500"/>
+          </a:xfrm>
+          <a:prstGeom prst="rect">
+            <a:avLst/>
+          </a:prstGeom>
+          <a:noFill/>
+        </p:spPr>
+        <p:txBody>
+          <a:bodyPr wrap="square" lIns="0" tIns="0" rIns="0" bIns="0" anchor="t">
+            <a:spAutoFit/>
+          </a:bodyPr>
+          <a:lstStyle/>
+          <a:p>
+            <a:pPr algn="l"/>
+            <a:r>
+              <a:rPr sz="1200" b="1" i="0" u="none">
+                <a:solidFill>
+                  <a:srgbClr val="009999"/>
+                </a:solidFill>
+                <a:latin typeface="Inter"/>
+              </a:rPr>
+              <a:t>PHYSICAL FUNDAMENTALS</a:t>
+            </a:r>
+          </a:p>
+        </p:txBody>
+      </p:sp>
+      <p:sp>
+        <p:nvSpPr>
+          <p:cNvPr id="7" name="TextBox 6"/>
+          <p:cNvSpPr txBox="1"/>
+          <p:nvPr/>
+        </p:nvSpPr>
+        <p:spPr>
+          <a:xfrm>
+            <a:off x="609600" y="723900"/>
+            <a:ext cx="11521440" cy="457200"/>
+          </a:xfrm>
+          <a:prstGeom prst="rect">
+            <a:avLst/>
+          </a:prstGeom>
+          <a:noFill/>
+        </p:spPr>
+        <p:txBody>
+          <a:bodyPr wrap="square" lIns="0" tIns="0" rIns="0" bIns="0" anchor="t">
+            <a:spAutoFit/>
+          </a:bodyPr>
+          <a:lstStyle/>
+          <a:p>
+            <a:pPr algn="l">
+              <a:lnSpc>
+                <a:spcPts val="3600"/>
+              </a:lnSpc>
+            </a:pPr>
+            <a:r>
+              <a:rPr sz="3000" b="1" i="0" u="none">
+                <a:solidFill>
+                  <a:srgbClr val="000028"/>
+                </a:solidFill>
+                <a:latin typeface="Inter"/>
+              </a:rPr>
+              <a:t>Why exactly 63.2%?</a:t>
+            </a:r>
+          </a:p>
+        </p:txBody>
+      </p:sp>
+      <p:sp>
+        <p:nvSpPr>
+          <p:cNvPr id="8" name="TextBox 7"/>
+          <p:cNvSpPr txBox="1"/>
+          <p:nvPr/>
+        </p:nvSpPr>
+        <p:spPr>
+          <a:xfrm>
+            <a:off x="914400" y="2728912"/>
+            <a:ext cx="4940617" cy="247650"/>
+          </a:xfrm>
+          <a:prstGeom prst="rect">
+            <a:avLst/>
+          </a:prstGeom>
+          <a:noFill/>
+        </p:spPr>
+        <p:txBody>
+          <a:bodyPr wrap="square" lIns="0" tIns="0" rIns="0" bIns="0" anchor="t">
+            <a:spAutoFit/>
+          </a:bodyPr>
+          <a:lstStyle/>
+          <a:p>
+            <a:pPr algn="l"/>
+            <a:r>
+              <a:rPr sz="1650" b="1" i="0" u="none">
+                <a:solidFill>
+                  <a:srgbClr val="000028"/>
+                </a:solidFill>
+                <a:latin typeface="Inter"/>
+              </a:rPr>
+              <a:t>The Analytical Solution</a:t>
+            </a:r>
+          </a:p>
+        </p:txBody>
+      </p:sp>
+      <p:sp>
+        <p:nvSpPr>
+          <p:cNvPr id="9" name="TextBox 8"/>
+          <p:cNvSpPr txBox="1"/>
+          <p:nvPr/>
+        </p:nvSpPr>
+        <p:spPr>
+          <a:xfrm>
+            <a:off x="914400" y="3128962"/>
+            <a:ext cx="4705350" cy="257175"/>
+          </a:xfrm>
+          <a:prstGeom prst="rect">
+            <a:avLst/>
+          </a:prstGeom>
+          <a:noFill/>
+        </p:spPr>
+        <p:txBody>
+          <a:bodyPr wrap="square" lIns="0" tIns="0" rIns="0" bIns="0" anchor="t">
+            <a:spAutoFit/>
+          </a:bodyPr>
+          <a:lstStyle/>
+          <a:p>
+            <a:pPr algn="l">
+              <a:lnSpc>
+                <a:spcPts val="2025"/>
+              </a:lnSpc>
+            </a:pPr>
+            <a:r>
+              <a:rPr sz="1350" b="0" i="0" u="none" dirty="0">
+                <a:solidFill>
+                  <a:srgbClr val="4B5563"/>
+                </a:solidFill>
+                <a:latin typeface="Inter"/>
+              </a:rPr>
+              <a:t>For a first-order step response, at exact time :</a:t>
+            </a:r>
+          </a:p>
+        </p:txBody>
+      </p:sp>
+      <p:sp>
+        <p:nvSpPr>
+          <p:cNvPr id="10" name="TextBox 9"/>
+          <p:cNvSpPr txBox="1"/>
+          <p:nvPr/>
+        </p:nvSpPr>
+        <p:spPr>
+          <a:xfrm>
+            <a:off x="6572250" y="2862262"/>
+            <a:ext cx="4940617" cy="247650"/>
+          </a:xfrm>
+          <a:prstGeom prst="rect">
+            <a:avLst/>
+          </a:prstGeom>
+          <a:noFill/>
+        </p:spPr>
+        <p:txBody>
+          <a:bodyPr wrap="square" lIns="0" tIns="0" rIns="0" bIns="0" anchor="t">
+            <a:spAutoFit/>
+          </a:bodyPr>
+          <a:lstStyle/>
+          <a:p>
+            <a:pPr algn="l"/>
+            <a:r>
+              <a:rPr sz="1650" b="1" i="0" u="none">
+                <a:solidFill>
+                  <a:srgbClr val="000028"/>
+                </a:solidFill>
+                <a:latin typeface="Inter"/>
+              </a:rPr>
+              <a:t>The Time Constant (τ)</a:t>
+            </a:r>
+          </a:p>
+        </p:txBody>
+      </p:sp>
+      <p:sp>
+        <p:nvSpPr>
+          <p:cNvPr id="11" name="TextBox 10"/>
+          <p:cNvSpPr txBox="1"/>
+          <p:nvPr/>
+        </p:nvSpPr>
+        <p:spPr>
+          <a:xfrm>
+            <a:off x="6572250" y="3262312"/>
+            <a:ext cx="4705350" cy="494559"/>
+          </a:xfrm>
+          <a:prstGeom prst="rect">
+            <a:avLst/>
+          </a:prstGeom>
+          <a:noFill/>
+        </p:spPr>
+        <p:txBody>
+          <a:bodyPr wrap="square" lIns="0" tIns="0" rIns="0" bIns="0" anchor="t">
+            <a:spAutoFit/>
+          </a:bodyPr>
+          <a:lstStyle/>
+          <a:p>
+            <a:pPr algn="l">
+              <a:lnSpc>
+                <a:spcPts val="2025"/>
+              </a:lnSpc>
+            </a:pPr>
+            <a:r>
+              <a:rPr sz="1350" b="0" i="0" u="none" dirty="0">
+                <a:solidFill>
+                  <a:srgbClr val="4B5563"/>
+                </a:solidFill>
+                <a:latin typeface="Inter"/>
+              </a:rPr>
+              <a:t>The moment you cover 63.2% of the rise is, by definition, the time constant.</a:t>
+            </a:r>
+          </a:p>
+        </p:txBody>
+      </p:sp>
+      <p:pic>
+        <p:nvPicPr>
+          <p:cNvPr id="12" name="Picture 11" descr="image.png"/>
+          <p:cNvPicPr>
+            <a:picLocks noChangeAspect="1"/>
+          </p:cNvPicPr>
+          <p:nvPr/>
+        </p:nvPicPr>
+        <p:blipFill>
+          <a:blip r:embed="rId6"/>
+          <a:stretch>
+            <a:fillRect/>
+          </a:stretch>
+        </p:blipFill>
+        <p:spPr>
+          <a:xfrm>
+            <a:off x="1025106" y="3724993"/>
+            <a:ext cx="628650" cy="276225"/>
+          </a:xfrm>
+          <a:prstGeom prst="rect">
+            <a:avLst/>
+          </a:prstGeom>
+        </p:spPr>
+      </p:pic>
+      <p:sp>
+        <p:nvSpPr>
+          <p:cNvPr id="13" name="TextBox 12"/>
+          <p:cNvSpPr txBox="1"/>
+          <p:nvPr/>
+        </p:nvSpPr>
+        <p:spPr>
+          <a:xfrm>
+            <a:off x="1104900" y="3960514"/>
+            <a:ext cx="4324350" cy="305405"/>
+          </a:xfrm>
+          <a:prstGeom prst="rect">
+            <a:avLst/>
+          </a:prstGeom>
+          <a:noFill/>
+        </p:spPr>
+        <p:txBody>
+          <a:bodyPr wrap="square" lIns="0" tIns="0" rIns="0" bIns="0" anchor="t">
+            <a:spAutoFit/>
+          </a:bodyPr>
+          <a:lstStyle/>
+          <a:p>
+            <a:pPr algn="ctr">
+              <a:lnSpc>
+                <a:spcPts val="2700"/>
+              </a:lnSpc>
+            </a:pPr>
+            <a:r>
+              <a:rPr sz="1350" b="0" i="0" u="none" dirty="0">
+                <a:solidFill>
+                  <a:srgbClr val="9CA3AF"/>
+                </a:solidFill>
+                <a:latin typeface="Aptos Mono" panose="020F0502020204030204" pitchFamily="49" charset="0"/>
+              </a:rPr>
+              <a:t>T(t) = </a:t>
+            </a:r>
+            <a:r>
+              <a:rPr sz="1350" b="0" i="0" u="none" dirty="0" err="1">
+                <a:solidFill>
+                  <a:srgbClr val="9CA3AF"/>
+                </a:solidFill>
+                <a:latin typeface="Aptos Mono" panose="020F0502020204030204" pitchFamily="49" charset="0"/>
+              </a:rPr>
+              <a:t>T_ss</a:t>
+            </a:r>
+            <a:r>
+              <a:rPr sz="1350" b="0" i="0" u="none" dirty="0">
+                <a:solidFill>
+                  <a:srgbClr val="9CA3AF"/>
+                </a:solidFill>
+                <a:latin typeface="Aptos Mono" panose="020F0502020204030204" pitchFamily="49" charset="0"/>
+              </a:rPr>
+              <a:t> + (T0 - </a:t>
+            </a:r>
+            <a:r>
+              <a:rPr sz="1350" b="0" i="0" u="none" dirty="0" err="1">
+                <a:solidFill>
+                  <a:srgbClr val="9CA3AF"/>
+                </a:solidFill>
+                <a:latin typeface="Aptos Mono" panose="020F0502020204030204" pitchFamily="49" charset="0"/>
+              </a:rPr>
+              <a:t>T_ss</a:t>
+            </a:r>
+            <a:r>
+              <a:rPr sz="1350" b="0" i="0" u="none" dirty="0">
+                <a:solidFill>
+                  <a:srgbClr val="9CA3AF"/>
+                </a:solidFill>
+                <a:latin typeface="Aptos Mono" panose="020F0502020204030204" pitchFamily="49" charset="0"/>
+              </a:rPr>
+              <a:t>) · e-t/τ</a:t>
+            </a:r>
+          </a:p>
+        </p:txBody>
+      </p:sp>
+      <p:sp>
+        <p:nvSpPr>
+          <p:cNvPr id="15" name="TextBox 14"/>
+          <p:cNvSpPr txBox="1"/>
+          <p:nvPr/>
+        </p:nvSpPr>
+        <p:spPr>
+          <a:xfrm>
+            <a:off x="6800850" y="4157662"/>
+            <a:ext cx="4248150" cy="228600"/>
+          </a:xfrm>
+          <a:prstGeom prst="rect">
+            <a:avLst/>
+          </a:prstGeom>
+          <a:noFill/>
+        </p:spPr>
+        <p:txBody>
+          <a:bodyPr wrap="square" lIns="0" tIns="0" rIns="0" bIns="0" anchor="t">
+            <a:spAutoFit/>
+          </a:bodyPr>
+          <a:lstStyle/>
+          <a:p>
+            <a:pPr algn="l"/>
+            <a:r>
+              <a:rPr sz="1500" b="0" i="0" u="none">
+                <a:solidFill>
+                  <a:srgbClr val="009999"/>
+                </a:solidFill>
+                <a:latin typeface="Inter SemiBold"/>
+              </a:rPr>
+              <a:t>Measure time → Obtain τ</a:t>
+            </a:r>
+          </a:p>
+        </p:txBody>
+      </p:sp>
+      <p:sp>
+        <p:nvSpPr>
+          <p:cNvPr id="16" name="TextBox 15"/>
+          <p:cNvSpPr txBox="1"/>
+          <p:nvPr/>
+        </p:nvSpPr>
+        <p:spPr>
+          <a:xfrm>
+            <a:off x="6800850" y="4500562"/>
+            <a:ext cx="4248150" cy="295275"/>
+          </a:xfrm>
+          <a:prstGeom prst="rect">
+            <a:avLst/>
+          </a:prstGeom>
+          <a:noFill/>
+        </p:spPr>
+        <p:txBody>
+          <a:bodyPr wrap="square" lIns="0" tIns="0" rIns="0" bIns="0" anchor="t">
+            <a:spAutoFit/>
+          </a:bodyPr>
+          <a:lstStyle/>
+          <a:p>
+            <a:pPr algn="l"/>
+            <a:r>
+              <a:rPr sz="1800" b="1" i="0" u="none">
+                <a:solidFill>
+                  <a:srgbClr val="000028"/>
+                </a:solidFill>
+                <a:latin typeface="JetBrains Mono"/>
+              </a:rPr>
+              <a:t>hA = C / τ</a:t>
+            </a:r>
+          </a:p>
+        </p:txBody>
+      </p:sp>
+      <p:pic>
+        <p:nvPicPr>
+          <p:cNvPr id="18" name="Copied Picture 7">
+            <a:extLst>
+              <a:ext uri="{FF2B5EF4-FFF2-40B4-BE49-F238E27FC236}">
+                <a16:creationId xmlns:a16="http://schemas.microsoft.com/office/drawing/2014/main" id="{18E526C0-1D3D-DC84-7DC3-1F1C1DB187C2}"/>
+              </a:ext>
+            </a:extLst>
+          </p:cNvPr>
+          <p:cNvPicPr>
+            <a:picLocks noChangeAspect="1"/>
+          </p:cNvPicPr>
+          <p:nvPr/>
+        </p:nvPicPr>
+        <p:blipFill>
+          <a:blip r:embed="rId7"/>
+          <a:stretch>
+            <a:fillRect/>
+          </a:stretch>
+        </p:blipFill>
+        <p:spPr>
+          <a:xfrm>
+            <a:off x="10642600" y="6318612"/>
+            <a:ext cx="1231900" cy="316774"/>
+          </a:xfrm>
+          <a:prstGeom prst="rect">
+            <a:avLst/>
+          </a:prstGeom>
+        </p:spPr>
+      </p:pic>
+    </p:spTree>
+    <p:extLst>
+      <p:ext uri="{BB962C8B-B14F-4D97-AF65-F5344CB8AC3E}">
+        <p14:creationId xmlns:p14="http://schemas.microsoft.com/office/powerpoint/2010/main" val="1485535665"/>
+      </p:ext>
+    </p:extLst>
+  </p:cSld>
+  <p:clrMapOvr>
+    <a:masterClrMapping/>
+  </p:clrMapOvr>
+  <mc:AlternateContent xmlns:mc="http://schemas.openxmlformats.org/markup-compatibility/2006" xmlns:p14="http://schemas.microsoft.com/office/powerpoint/2010/main">
+    <mc:Choice Requires="p14">
+      <p:transition p14:dur="250">
+        <p:fade/>
+      </p:transition>
+    </mc:Choice>
+    <mc:Fallback xmlns="">
+      <p:transition>
+        <p:fade/>
+      </p:transition>
+    </mc:Fallback>
+  </mc:AlternateContent>
+</p:sld>
+</file>
+
+<file path=ppt/slides/slide22.xml><?xml version="1.0" encoding="utf-8"?>
+<p:sld xmlns:a="http://schemas.openxmlformats.org/drawingml/2006/main" xmlns:r="http://schemas.openxmlformats.org/officeDocument/2006/relationships" xmlns:p="http://schemas.openxmlformats.org/presentationml/2006/main">
+  <p:cSld>
+    <p:spTree>
+      <p:nvGrpSpPr>
+        <p:cNvPr id="1" name=""/>
+        <p:cNvGrpSpPr/>
+        <p:nvPr/>
+      </p:nvGrpSpPr>
+      <p:grpSpPr>
+        <a:xfrm>
+          <a:off x="0" y="0"/>
+          <a:ext cx="0" cy="0"/>
+          <a:chOff x="0" y="0"/>
+          <a:chExt cx="0" cy="0"/>
+        </a:xfrm>
+      </p:grpSpPr>
+      <p:sp>
+        <p:nvSpPr>
+          <p:cNvPr id="2" name="TextBox 1"/>
+          <p:cNvSpPr txBox="1"/>
+          <p:nvPr/>
+        </p:nvSpPr>
+        <p:spPr>
+          <a:xfrm>
+            <a:off x="609600" y="457200"/>
+            <a:ext cx="10972800" cy="190500"/>
+          </a:xfrm>
+          <a:prstGeom prst="rect">
+            <a:avLst/>
+          </a:prstGeom>
+          <a:noFill/>
+        </p:spPr>
+        <p:txBody>
+          <a:bodyPr wrap="square" lIns="0" tIns="0" rIns="0" bIns="0" anchor="t">
+            <a:spAutoFit/>
+          </a:bodyPr>
+          <a:lstStyle/>
+          <a:p>
+            <a:pPr algn="l"/>
+            <a:r>
+              <a:rPr sz="1200" b="1" i="0" u="none">
+                <a:solidFill>
+                  <a:srgbClr val="009999"/>
+                </a:solidFill>
+                <a:latin typeface="Inter"/>
+              </a:rPr>
+              <a:t>CALCULATION MODELS</a:t>
+            </a:r>
+          </a:p>
+        </p:txBody>
+      </p:sp>
+      <p:sp>
+        <p:nvSpPr>
+          <p:cNvPr id="3" name="TextBox 2"/>
+          <p:cNvSpPr txBox="1"/>
+          <p:nvPr/>
+        </p:nvSpPr>
+        <p:spPr>
+          <a:xfrm>
+            <a:off x="609600" y="723900"/>
+            <a:ext cx="11521440" cy="457200"/>
+          </a:xfrm>
+          <a:prstGeom prst="rect">
+            <a:avLst/>
+          </a:prstGeom>
+          <a:noFill/>
+        </p:spPr>
+        <p:txBody>
+          <a:bodyPr wrap="square" lIns="0" tIns="0" rIns="0" bIns="0" anchor="t">
+            <a:spAutoFit/>
+          </a:bodyPr>
+          <a:lstStyle/>
+          <a:p>
+            <a:pPr algn="l">
+              <a:lnSpc>
+                <a:spcPts val="3600"/>
+              </a:lnSpc>
+            </a:pPr>
+            <a:r>
+              <a:rPr sz="3000" b="1" i="0" u="none">
+                <a:solidFill>
+                  <a:srgbClr val="000028"/>
+                </a:solidFill>
+                <a:latin typeface="Inter"/>
+              </a:rPr>
+              <a:t>Estimator Comparison</a:t>
+            </a:r>
+          </a:p>
+        </p:txBody>
+      </p:sp>
+      <p:graphicFrame>
+        <p:nvGraphicFramePr>
+          <p:cNvPr id="6" name="Table 5"/>
+          <p:cNvGraphicFramePr>
+            <a:graphicFrameLocks noGrp="1"/>
+          </p:cNvGraphicFramePr>
+          <p:nvPr>
+            <p:extLst>
+              <p:ext uri="{D42A27DB-BD31-4B8C-83A1-F6EECF244321}">
+                <p14:modId xmlns:p14="http://schemas.microsoft.com/office/powerpoint/2010/main" val="1750937249"/>
+              </p:ext>
+            </p:extLst>
+          </p:nvPr>
+        </p:nvGraphicFramePr>
+        <p:xfrm>
+          <a:off x="609600" y="2921000"/>
+          <a:ext cx="10972800" cy="3360000"/>
+        </p:xfrm>
+        <a:graphic>
+          <a:graphicData uri="http://schemas.openxmlformats.org/drawingml/2006/table">
+            <a:tbl>
+              <a:tblPr firstRow="1" bandRow="1">
+                <a:tableStyleId>{5C22544A-7EE6-4342-B048-85BDC9FD1C3A}</a:tableStyleId>
+              </a:tblPr>
+              <a:tblGrid>
+                <a:gridCol w="2642592">
+                  <a:extLst>
+                    <a:ext uri="{9D8B030D-6E8A-4147-A177-3AD203B41FA5}">
+                      <a16:colId xmlns:a16="http://schemas.microsoft.com/office/drawing/2014/main" val="20000"/>
+                    </a:ext>
+                  </a:extLst>
+                </a:gridCol>
+                <a:gridCol w="4930675">
+                  <a:extLst>
+                    <a:ext uri="{9D8B030D-6E8A-4147-A177-3AD203B41FA5}">
+                      <a16:colId xmlns:a16="http://schemas.microsoft.com/office/drawing/2014/main" val="20001"/>
+                    </a:ext>
+                  </a:extLst>
+                </a:gridCol>
+                <a:gridCol w="3399533">
+                  <a:extLst>
+                    <a:ext uri="{9D8B030D-6E8A-4147-A177-3AD203B41FA5}">
+                      <a16:colId xmlns:a16="http://schemas.microsoft.com/office/drawing/2014/main" val="20002"/>
+                    </a:ext>
+                  </a:extLst>
+                </a:gridCol>
+              </a:tblGrid>
+              <a:tr h="900000">
+                <a:tc>
+                  <a:txBody>
+                    <a:bodyPr/>
+                    <a:lstStyle/>
+                    <a:p>
+                      <a:pPr algn="l"/>
+                      <a:r>
+                        <a:rPr sz="1400" b="1" i="0" u="none">
+                          <a:solidFill>
+                            <a:srgbClr val="FFFFFF"/>
+                          </a:solidFill>
+                          <a:latin typeface="Inter SemiBold"/>
+                        </a:rPr>
+                        <a:t>Estimator</a:t>
+                      </a:r>
+                    </a:p>
+                  </a:txBody>
+                  <a:tcPr anchor="ctr">
+                    <a:lnL w="3175"/>
+                    <a:lnR w="3175"/>
+                    <a:lnT w="3175"/>
+                    <a:lnB w="3175"/>
+                    <a:solidFill>
+                      <a:srgbClr val="0B0B33"/>
+                    </a:solidFill>
+                  </a:tcPr>
+                </a:tc>
+                <a:tc>
+                  <a:txBody>
+                    <a:bodyPr/>
+                    <a:lstStyle/>
+                    <a:p>
+                      <a:pPr algn="l"/>
+                      <a:r>
+                        <a:rPr sz="1400" b="1" i="0" u="none" dirty="0">
+                          <a:solidFill>
+                            <a:srgbClr val="FFFFFF"/>
+                          </a:solidFill>
+                          <a:latin typeface="Inter SemiBold"/>
+                        </a:rPr>
+                        <a:t>Formula</a:t>
+                      </a:r>
+                    </a:p>
+                  </a:txBody>
+                  <a:tcPr anchor="ctr">
+                    <a:lnL w="3175"/>
+                    <a:lnR w="3175"/>
+                    <a:lnT w="3175"/>
+                    <a:lnB w="3175"/>
+                    <a:solidFill>
+                      <a:srgbClr val="0B0B33"/>
+                    </a:solidFill>
+                  </a:tcPr>
+                </a:tc>
+                <a:tc>
+                  <a:txBody>
+                    <a:bodyPr/>
+                    <a:lstStyle/>
+                    <a:p>
+                      <a:pPr algn="l"/>
+                      <a:r>
+                        <a:rPr sz="1400" b="1" i="0" u="none">
+                          <a:solidFill>
+                            <a:srgbClr val="FFFFFF"/>
+                          </a:solidFill>
+                          <a:latin typeface="Inter SemiBold"/>
+                        </a:rPr>
+                        <a:t>Information Used</a:t>
+                      </a:r>
+                    </a:p>
+                  </a:txBody>
+                  <a:tcPr anchor="ctr">
+                    <a:lnL w="3175"/>
+                    <a:lnR w="3175"/>
+                    <a:lnT w="3175"/>
+                    <a:lnB w="3175"/>
+                    <a:solidFill>
+                      <a:srgbClr val="0B0B33"/>
+                    </a:solidFill>
+                  </a:tcPr>
+                </a:tc>
+                <a:extLst>
+                  <a:ext uri="{0D108BD9-81ED-4DB2-BD59-A6C34878D82A}">
+                    <a16:rowId xmlns:a16="http://schemas.microsoft.com/office/drawing/2014/main" val="10000"/>
+                  </a:ext>
+                </a:extLst>
+              </a:tr>
+              <a:tr h="820000">
+                <a:tc>
+                  <a:txBody>
+                    <a:bodyPr/>
+                    <a:lstStyle/>
+                    <a:p>
+                      <a:pPr algn="l"/>
+                      <a:r>
+                        <a:rPr sz="1400" b="0" i="0" u="none">
+                          <a:solidFill>
+                            <a:srgbClr val="1F2937"/>
+                          </a:solidFill>
+                          <a:latin typeface="Inter"/>
+                        </a:rPr>
+                        <a:t>hA_energy_balance</a:t>
+                      </a:r>
+                    </a:p>
+                  </a:txBody>
+                  <a:tcPr anchor="ctr">
+                    <a:lnL w="3175"/>
+                    <a:lnR w="3175"/>
+                    <a:lnT w="3175"/>
+                    <a:lnB w="6350" cap="flat">
+                      <a:prstDash val="solid"/>
+                    </a:lnB>
+                    <a:noFill/>
+                  </a:tcPr>
+                </a:tc>
+                <a:tc>
+                  <a:txBody>
+                    <a:bodyPr/>
+                    <a:lstStyle/>
+                    <a:p>
+                      <a:pPr algn="l"/>
+                      <a:r>
+                        <a:rPr sz="1400" b="0" i="0" u="none" dirty="0">
+                          <a:solidFill>
+                            <a:srgbClr val="1F2937"/>
+                          </a:solidFill>
+                          <a:latin typeface="Inter"/>
+                        </a:rPr>
+                        <a:t>Slope of E(t) - C·T(t) vs ∫(T - </a:t>
+                      </a:r>
+                      <a:r>
+                        <a:rPr sz="1400" b="0" i="0" u="none" dirty="0" err="1">
+                          <a:solidFill>
+                            <a:srgbClr val="1F2937"/>
+                          </a:solidFill>
+                          <a:latin typeface="Inter"/>
+                        </a:rPr>
+                        <a:t>T_amb</a:t>
+                      </a:r>
+                      <a:r>
+                        <a:rPr sz="1400" b="0" i="0" u="none" dirty="0">
+                          <a:solidFill>
+                            <a:srgbClr val="1F2937"/>
+                          </a:solidFill>
+                          <a:latin typeface="Inter"/>
+                        </a:rPr>
+                        <a:t>)</a:t>
+                      </a:r>
+                    </a:p>
+                  </a:txBody>
+                  <a:tcPr anchor="ctr">
+                    <a:lnL w="3175"/>
+                    <a:lnR w="3175"/>
+                    <a:lnT w="3175"/>
+                    <a:lnB w="6350" cap="flat">
+                      <a:prstDash val="solid"/>
+                    </a:lnB>
+                    <a:noFill/>
+                  </a:tcPr>
+                </a:tc>
+                <a:tc>
+                  <a:txBody>
+                    <a:bodyPr/>
+                    <a:lstStyle/>
+                    <a:p>
+                      <a:pPr algn="l"/>
+                      <a:r>
+                        <a:rPr sz="1400" b="1" i="0" u="none">
+                          <a:solidFill>
+                            <a:srgbClr val="4B5563"/>
+                          </a:solidFill>
+                          <a:latin typeface="Inter"/>
+                        </a:rPr>
+                        <a:t>Entire trajectory</a:t>
+                      </a:r>
+                      <a:r>
+                        <a:rPr sz="1400" b="0" i="0" u="none">
+                          <a:solidFill>
+                            <a:srgbClr val="4B5563"/>
+                          </a:solidFill>
+                          <a:latin typeface="Inter"/>
+                        </a:rPr>
+                        <a:t> (integrated)</a:t>
+                      </a:r>
+                    </a:p>
+                  </a:txBody>
+                  <a:tcPr anchor="ctr">
+                    <a:lnL w="3175"/>
+                    <a:lnR w="3175"/>
+                    <a:lnT w="3175"/>
+                    <a:lnB w="6350" cap="flat">
+                      <a:prstDash val="solid"/>
+                    </a:lnB>
+                    <a:noFill/>
+                  </a:tcPr>
+                </a:tc>
+                <a:extLst>
+                  <a:ext uri="{0D108BD9-81ED-4DB2-BD59-A6C34878D82A}">
+                    <a16:rowId xmlns:a16="http://schemas.microsoft.com/office/drawing/2014/main" val="10001"/>
+                  </a:ext>
+                </a:extLst>
+              </a:tr>
+              <a:tr h="820000">
+                <a:tc>
+                  <a:txBody>
+                    <a:bodyPr/>
+                    <a:lstStyle/>
+                    <a:p>
+                      <a:pPr algn="l"/>
+                      <a:r>
+                        <a:rPr sz="1400" b="0" i="0" u="none">
+                          <a:solidFill>
+                            <a:srgbClr val="1F2937"/>
+                          </a:solidFill>
+                          <a:latin typeface="Inter"/>
+                        </a:rPr>
+                        <a:t>hA_steady_state</a:t>
+                      </a:r>
+                    </a:p>
+                  </a:txBody>
+                  <a:tcPr anchor="ctr">
+                    <a:lnL w="3175"/>
+                    <a:lnR w="3175"/>
+                    <a:lnT w="3175"/>
+                    <a:lnB w="6350" cap="flat">
+                      <a:prstDash val="solid"/>
+                    </a:lnB>
+                    <a:solidFill>
+                      <a:srgbClr val="F7F8FA"/>
+                    </a:solidFill>
+                  </a:tcPr>
+                </a:tc>
+                <a:tc>
+                  <a:txBody>
+                    <a:bodyPr/>
+                    <a:lstStyle/>
+                    <a:p>
+                      <a:pPr algn="l"/>
+                      <a:r>
+                        <a:rPr sz="1400" b="0" i="0" u="none" dirty="0" err="1">
+                          <a:solidFill>
+                            <a:srgbClr val="1F2937"/>
+                          </a:solidFill>
+                          <a:latin typeface="Inter"/>
+                        </a:rPr>
+                        <a:t>P_mean</a:t>
+                      </a:r>
+                      <a:r>
+                        <a:rPr sz="1400" b="0" i="0" u="none" dirty="0">
+                          <a:solidFill>
+                            <a:srgbClr val="1F2937"/>
+                          </a:solidFill>
+                          <a:latin typeface="Inter"/>
+                        </a:rPr>
+                        <a:t> / (</a:t>
+                      </a:r>
+                      <a:r>
+                        <a:rPr sz="1400" b="0" i="0" u="none" dirty="0" err="1">
+                          <a:solidFill>
+                            <a:srgbClr val="1F2937"/>
+                          </a:solidFill>
+                          <a:latin typeface="Inter"/>
+                        </a:rPr>
+                        <a:t>T_end</a:t>
+                      </a:r>
+                      <a:r>
+                        <a:rPr sz="1400" b="0" i="0" u="none" dirty="0">
+                          <a:solidFill>
+                            <a:srgbClr val="1F2937"/>
+                          </a:solidFill>
+                          <a:latin typeface="Inter"/>
+                        </a:rPr>
+                        <a:t> - </a:t>
+                      </a:r>
+                      <a:r>
+                        <a:rPr sz="1400" b="0" i="0" u="none" dirty="0" err="1">
+                          <a:solidFill>
+                            <a:srgbClr val="1F2937"/>
+                          </a:solidFill>
+                          <a:latin typeface="Inter"/>
+                        </a:rPr>
+                        <a:t>T_amb</a:t>
+                      </a:r>
+                      <a:r>
+                        <a:rPr sz="1400" b="0" i="0" u="none" dirty="0">
+                          <a:solidFill>
+                            <a:srgbClr val="1F2937"/>
+                          </a:solidFill>
+                          <a:latin typeface="Inter"/>
+                        </a:rPr>
+                        <a:t>)</a:t>
+                      </a:r>
+                    </a:p>
+                  </a:txBody>
+                  <a:tcPr anchor="ctr">
+                    <a:lnL w="3175"/>
+                    <a:lnR w="3175"/>
+                    <a:lnT w="3175"/>
+                    <a:lnB w="6350" cap="flat">
+                      <a:prstDash val="solid"/>
+                    </a:lnB>
+                    <a:solidFill>
+                      <a:srgbClr val="F7F8FA"/>
+                    </a:solidFill>
+                  </a:tcPr>
+                </a:tc>
+                <a:tc>
+                  <a:txBody>
+                    <a:bodyPr/>
+                    <a:lstStyle/>
+                    <a:p>
+                      <a:pPr algn="l"/>
+                      <a:r>
+                        <a:rPr sz="1400" b="1" i="0" u="none">
+                          <a:solidFill>
+                            <a:srgbClr val="4B5563"/>
+                          </a:solidFill>
+                          <a:latin typeface="Inter"/>
+                        </a:rPr>
+                        <a:t>Final level only</a:t>
+                      </a:r>
+                      <a:r>
+                        <a:rPr sz="1400" b="0" i="0" u="none">
+                          <a:solidFill>
+                            <a:srgbClr val="4B5563"/>
+                          </a:solidFill>
+                          <a:latin typeface="Inter"/>
+                        </a:rPr>
+                        <a:t> (settled)</a:t>
+                      </a:r>
+                    </a:p>
+                  </a:txBody>
+                  <a:tcPr anchor="ctr">
+                    <a:lnL w="3175"/>
+                    <a:lnR w="3175"/>
+                    <a:lnT w="3175"/>
+                    <a:lnB w="6350" cap="flat">
+                      <a:prstDash val="solid"/>
+                    </a:lnB>
+                    <a:solidFill>
+                      <a:srgbClr val="F7F8FA"/>
+                    </a:solidFill>
+                  </a:tcPr>
+                </a:tc>
+                <a:extLst>
+                  <a:ext uri="{0D108BD9-81ED-4DB2-BD59-A6C34878D82A}">
+                    <a16:rowId xmlns:a16="http://schemas.microsoft.com/office/drawing/2014/main" val="10002"/>
+                  </a:ext>
+                </a:extLst>
+              </a:tr>
+              <a:tr h="820000">
+                <a:tc>
+                  <a:txBody>
+                    <a:bodyPr/>
+                    <a:lstStyle/>
+                    <a:p>
+                      <a:pPr algn="l"/>
+                      <a:r>
+                        <a:rPr sz="1400" b="0" i="0" u="none">
+                          <a:solidFill>
+                            <a:srgbClr val="1F2937"/>
+                          </a:solidFill>
+                          <a:latin typeface="Inter"/>
+                        </a:rPr>
+                        <a:t>hA_from_tau</a:t>
+                      </a:r>
+                    </a:p>
+                  </a:txBody>
+                  <a:tcPr anchor="ctr">
+                    <a:lnL w="3175"/>
+                    <a:lnR w="3175"/>
+                    <a:lnT w="3175"/>
+                    <a:lnB w="3175"/>
+                    <a:noFill/>
+                  </a:tcPr>
+                </a:tc>
+                <a:tc>
+                  <a:txBody>
+                    <a:bodyPr/>
+                    <a:lstStyle/>
+                    <a:p>
+                      <a:pPr algn="l"/>
+                      <a:r>
+                        <a:rPr sz="1400" b="0" i="0" u="none">
+                          <a:solidFill>
+                            <a:srgbClr val="1F2937"/>
+                          </a:solidFill>
+                          <a:latin typeface="Inter"/>
+                        </a:rPr>
+                        <a:t>C / τ_63</a:t>
+                      </a:r>
+                    </a:p>
+                  </a:txBody>
+                  <a:tcPr anchor="ctr">
+                    <a:lnL w="3175"/>
+                    <a:lnR w="3175"/>
+                    <a:lnT w="3175"/>
+                    <a:lnB w="3175"/>
+                    <a:noFill/>
+                  </a:tcPr>
+                </a:tc>
+                <a:tc>
+                  <a:txBody>
+                    <a:bodyPr/>
+                    <a:lstStyle/>
+                    <a:p>
+                      <a:pPr algn="l"/>
+                      <a:r>
+                        <a:rPr sz="1400" b="1" i="0" u="none" dirty="0">
+                          <a:solidFill>
+                            <a:srgbClr val="4B5563"/>
+                          </a:solidFill>
+                          <a:latin typeface="Inter"/>
+                        </a:rPr>
+                        <a:t>Rising speed only</a:t>
+                      </a:r>
+                      <a:r>
+                        <a:rPr sz="1400" b="0" i="0" u="none" dirty="0">
+                          <a:solidFill>
+                            <a:srgbClr val="4B5563"/>
+                          </a:solidFill>
+                          <a:latin typeface="Inter"/>
+                        </a:rPr>
+                        <a:t> (transition)</a:t>
+                      </a:r>
+                    </a:p>
+                  </a:txBody>
+                  <a:tcPr anchor="ctr">
+                    <a:lnL w="3175"/>
+                    <a:lnR w="3175"/>
+                    <a:lnT w="3175"/>
+                    <a:lnB w="3175"/>
+                    <a:noFill/>
+                  </a:tcPr>
+                </a:tc>
+                <a:extLst>
+                  <a:ext uri="{0D108BD9-81ED-4DB2-BD59-A6C34878D82A}">
+                    <a16:rowId xmlns:a16="http://schemas.microsoft.com/office/drawing/2014/main" val="10003"/>
+                  </a:ext>
+                </a:extLst>
+              </a:tr>
+            </a:tbl>
+          </a:graphicData>
+        </a:graphic>
+      </p:graphicFrame>
+      <p:pic>
+        <p:nvPicPr>
+          <p:cNvPr id="5" name="Copied Picture 7">
+            <a:extLst>
+              <a:ext uri="{FF2B5EF4-FFF2-40B4-BE49-F238E27FC236}">
+                <a16:creationId xmlns:a16="http://schemas.microsoft.com/office/drawing/2014/main" id="{2A03099C-6C55-DE5D-1D3D-8A6F4F545D71}"/>
+              </a:ext>
+            </a:extLst>
+          </p:cNvPr>
+          <p:cNvPicPr>
+            <a:picLocks noChangeAspect="1"/>
+          </p:cNvPicPr>
+          <p:nvPr/>
+        </p:nvPicPr>
+        <p:blipFill>
+          <a:blip r:embed="rId2"/>
+          <a:stretch>
+            <a:fillRect/>
+          </a:stretch>
+        </p:blipFill>
+        <p:spPr>
+          <a:xfrm>
+            <a:off x="10642600" y="6318612"/>
+            <a:ext cx="1231900" cy="316774"/>
+          </a:xfrm>
+          <a:prstGeom prst="rect">
+            <a:avLst/>
+          </a:prstGeom>
+        </p:spPr>
+      </p:pic>
+    </p:spTree>
+    <p:extLst>
+      <p:ext uri="{BB962C8B-B14F-4D97-AF65-F5344CB8AC3E}">
+        <p14:creationId xmlns:p14="http://schemas.microsoft.com/office/powerpoint/2010/main" val="2454953264"/>
+      </p:ext>
+    </p:extLst>
+  </p:cSld>
+  <p:clrMapOvr>
+    <a:masterClrMapping/>
+  </p:clrMapOvr>
+  <mc:AlternateContent xmlns:mc="http://schemas.openxmlformats.org/markup-compatibility/2006">
+    <mc:Choice xmlns:p14="http://schemas.microsoft.com/office/powerpoint/2010/main" Requires="p14">
+      <p:transition p14:dur="250">
+        <p:fade/>
+      </p:transition>
+    </mc:Choice>
+    <mc:Fallback>
+      <p:transition>
+        <p:fade/>
+      </p:transition>
+    </mc:Fallback>
+  </mc:AlternateContent>
+</p:sld>
+</file>
+
+<file path=ppt/slides/slide23.xml><?xml version="1.0" encoding="utf-8"?>
+<p:sld xmlns:a="http://schemas.openxmlformats.org/drawingml/2006/main" xmlns:r="http://schemas.openxmlformats.org/officeDocument/2006/relationships" xmlns:p="http://schemas.openxmlformats.org/presentationml/2006/main">
+  <p:cSld>
+    <p:bg>
+      <p:bgPr>
+        <a:solidFill>
+          <a:srgbClr val="FFFFFF"/>
+        </a:solidFill>
+        <a:effectLst/>
+      </p:bgPr>
+    </p:bg>
+    <p:spTree>
+      <p:nvGrpSpPr>
+        <p:cNvPr id="1" name=""/>
+        <p:cNvGrpSpPr/>
+        <p:nvPr/>
+      </p:nvGrpSpPr>
+      <p:grpSpPr>
+        <a:xfrm>
+          <a:off x="0" y="0"/>
+          <a:ext cx="0" cy="0"/>
+          <a:chOff x="0" y="0"/>
+          <a:chExt cx="0" cy="0"/>
+        </a:xfrm>
+      </p:grpSpPr>
+      <p:sp>
+        <p:nvSpPr>
+          <p:cNvPr id="3" name="TextBox 2"/>
+          <p:cNvSpPr txBox="1"/>
+          <p:nvPr/>
+        </p:nvSpPr>
+        <p:spPr>
+          <a:xfrm>
+            <a:off x="609600" y="457200"/>
+            <a:ext cx="10972800" cy="190500"/>
+          </a:xfrm>
+          <a:prstGeom prst="rect">
+            <a:avLst/>
+          </a:prstGeom>
+          <a:noFill/>
+        </p:spPr>
+        <p:txBody>
+          <a:bodyPr wrap="square" lIns="0" tIns="0" rIns="0" bIns="0" anchor="t">
+            <a:spAutoFit/>
+          </a:bodyPr>
+          <a:lstStyle/>
+          <a:p>
+            <a:pPr algn="l"/>
+            <a:r>
+              <a:rPr sz="1200" b="1" i="0" u="none">
+                <a:solidFill>
+                  <a:srgbClr val="64748B"/>
+                </a:solidFill>
+                <a:latin typeface="Inter"/>
+              </a:rPr>
+              <a:t>PERFORMANCE</a:t>
+            </a:r>
+          </a:p>
+        </p:txBody>
+      </p:sp>
+      <p:sp>
+        <p:nvSpPr>
+          <p:cNvPr id="4" name="TextBox 3"/>
+          <p:cNvSpPr txBox="1"/>
+          <p:nvPr/>
+        </p:nvSpPr>
+        <p:spPr>
+          <a:xfrm>
+            <a:off x="609600" y="647700"/>
+            <a:ext cx="11521440" cy="457200"/>
+          </a:xfrm>
+          <a:prstGeom prst="rect">
+            <a:avLst/>
+          </a:prstGeom>
+          <a:noFill/>
+        </p:spPr>
+        <p:txBody>
+          <a:bodyPr wrap="square" lIns="0" tIns="0" rIns="0" bIns="0" anchor="t">
+            <a:spAutoFit/>
+          </a:bodyPr>
+          <a:lstStyle/>
+          <a:p>
+            <a:pPr algn="l">
+              <a:lnSpc>
+                <a:spcPts val="3600"/>
+              </a:lnSpc>
+            </a:pPr>
+            <a:r>
+              <a:rPr sz="3000" b="1" i="0" u="none">
+                <a:solidFill>
+                  <a:srgbClr val="0F172A"/>
+                </a:solidFill>
+                <a:latin typeface="Inter"/>
+              </a:rPr>
+              <a:t>Execution Speed Distribution</a:t>
+            </a:r>
+          </a:p>
+        </p:txBody>
+      </p:sp>
+      <p:pic>
+        <p:nvPicPr>
+          <p:cNvPr id="5" name="Picture 4"/>
+          <p:cNvPicPr>
+            <a:picLocks noChangeAspect="1"/>
+          </p:cNvPicPr>
+          <p:nvPr/>
+        </p:nvPicPr>
+        <p:blipFill>
+          <a:blip r:embed="rId2"/>
+          <a:srcRect/>
+          <a:stretch/>
+        </p:blipFill>
+        <p:spPr>
+          <a:xfrm>
+            <a:off x="609600" y="1352497"/>
+            <a:ext cx="10972800" cy="4588625"/>
+          </a:xfrm>
+          <a:prstGeom prst="rect">
+            <a:avLst/>
+          </a:prstGeom>
+        </p:spPr>
+      </p:pic>
+      <p:sp>
+        <p:nvSpPr>
+          <p:cNvPr id="6" name="TextBox 5"/>
+          <p:cNvSpPr txBox="1"/>
+          <p:nvPr/>
+        </p:nvSpPr>
+        <p:spPr>
+          <a:xfrm>
+            <a:off x="2220044" y="6041613"/>
+            <a:ext cx="7751912" cy="553998"/>
+          </a:xfrm>
+          <a:prstGeom prst="rect">
+            <a:avLst/>
+          </a:prstGeom>
+          <a:noFill/>
+        </p:spPr>
+        <p:txBody>
+          <a:bodyPr wrap="square" lIns="0" tIns="0" rIns="0" bIns="0" anchor="t">
+            <a:spAutoFit/>
+          </a:bodyPr>
+          <a:lstStyle/>
+          <a:p>
+            <a:pPr algn="ctr"/>
+            <a:r>
+              <a:rPr lang="en-GB" dirty="0"/>
+              <a:t>Deterministic output: identical input yields an identical estimate on every run — no random restarts, no initialization sensitivity. Latency stays tightly bounded.</a:t>
+            </a:r>
+            <a:endParaRPr dirty="0">
+              <a:solidFill>
+                <a:srgbClr val="0A1128"/>
+              </a:solidFill>
+              <a:latin typeface="Inter Medium"/>
+            </a:endParaRPr>
+          </a:p>
+        </p:txBody>
+      </p:sp>
+      <p:pic>
+        <p:nvPicPr>
+          <p:cNvPr id="7" name="Copied Picture 7">
+            <a:extLst>
+              <a:ext uri="{FF2B5EF4-FFF2-40B4-BE49-F238E27FC236}">
+                <a16:creationId xmlns:a16="http://schemas.microsoft.com/office/drawing/2014/main" id="{B311F591-449D-F658-283A-405022510CF0}"/>
+              </a:ext>
+            </a:extLst>
+          </p:cNvPr>
+          <p:cNvPicPr>
+            <a:picLocks noChangeAspect="1"/>
+          </p:cNvPicPr>
+          <p:nvPr/>
+        </p:nvPicPr>
+        <p:blipFill>
+          <a:blip r:embed="rId3"/>
+          <a:stretch>
+            <a:fillRect/>
+          </a:stretch>
+        </p:blipFill>
+        <p:spPr>
+          <a:xfrm>
+            <a:off x="10642600" y="6318612"/>
+            <a:ext cx="1231900" cy="316774"/>
+          </a:xfrm>
+          <a:prstGeom prst="rect">
+            <a:avLst/>
+          </a:prstGeom>
+        </p:spPr>
+      </p:pic>
+      <p:sp>
+        <p:nvSpPr>
+          <p:cNvPr id="8" name="Slide Number Placeholder 7">
+            <a:extLst>
+              <a:ext uri="{FF2B5EF4-FFF2-40B4-BE49-F238E27FC236}">
+                <a16:creationId xmlns:a16="http://schemas.microsoft.com/office/drawing/2014/main" id="{8D34DBEC-11E3-BC8C-7A36-A9208FFC4737}"/>
+              </a:ext>
+            </a:extLst>
+          </p:cNvPr>
+          <p:cNvSpPr>
+            <a:spLocks noGrp="1"/>
+          </p:cNvSpPr>
+          <p:nvPr>
+            <p:ph type="sldNum" sz="quarter" idx="12"/>
+          </p:nvPr>
+        </p:nvSpPr>
+        <p:spPr/>
+        <p:txBody>
+          <a:bodyPr/>
+          <a:lstStyle/>
+          <a:p>
+            <a:pPr algn="l"/>
+            <a:fld id="{C1FF6DA9-008F-8B48-92A6-B652298478BF}" type="slidenum">
+              <a:rPr lang="en-US" smtClean="0"/>
+              <a:pPr algn="l"/>
+              <a:t>23</a:t>
+            </a:fld>
+            <a:endParaRPr lang="en-US" dirty="0"/>
+          </a:p>
+        </p:txBody>
+      </p:sp>
+    </p:spTree>
+    <p:extLst>
+      <p:ext uri="{BB962C8B-B14F-4D97-AF65-F5344CB8AC3E}">
+        <p14:creationId xmlns:p14="http://schemas.microsoft.com/office/powerpoint/2010/main" val="1451306204"/>
+      </p:ext>
+    </p:extLst>
+  </p:cSld>
+  <p:clrMapOvr>
+    <a:masterClrMapping/>
+  </p:clrMapOvr>
+  <mc:AlternateContent xmlns:mc="http://schemas.openxmlformats.org/markup-compatibility/2006" xmlns:p14="http://schemas.microsoft.com/office/powerpoint/2010/main">
+    <mc:Choice Requires="p14">
+      <p:transition p14:dur="250">
+        <p:fade/>
+      </p:transition>
+    </mc:Choice>
+    <mc:Fallback xmlns="">
+      <p:transition>
+        <p:fade/>
+      </p:transition>
+    </mc:Fallback>
+  </mc:AlternateContent>
+</p:sld>
+</file>
+
 <file path=ppt/slides/slide3.xml><?xml version="1.0" encoding="utf-8"?>
 <p:sld xmlns:a="http://schemas.openxmlformats.org/drawingml/2006/main" xmlns:r="http://schemas.openxmlformats.org/officeDocument/2006/relationships" xmlns:p="http://schemas.openxmlformats.org/presentationml/2006/main">
   <p:cSld>
@@ -13856,8 +16131,27 @@
                 </a:solidFill>
                 <a:latin typeface="Inter"/>
               </a:rPr>
-              <a:t>ARCHITECTURE 1/2</a:t>
-            </a:r>
+              <a:t>ARCHITECTURE </a:t>
+            </a:r>
+            <a:r>
+              <a:rPr lang="en-GB" sz="1200" b="1" i="0" u="none" dirty="0">
+                <a:solidFill>
+                  <a:schemeClr val="bg1">
+                    <a:lumMod val="75000"/>
+                  </a:schemeClr>
+                </a:solidFill>
+                <a:latin typeface="Inter"/>
+              </a:rPr>
+              <a:t>1/3</a:t>
+            </a:r>
+            <a:endParaRPr sz="1200" b="1" i="0" u="none" dirty="0">
+              <a:solidFill>
+                <a:schemeClr val="bg1">
+                  <a:lumMod val="75000"/>
+                </a:schemeClr>
+              </a:solidFill>
+              <a:latin typeface="Inter"/>
+            </a:endParaRPr>
           </a:p>
         </p:txBody>
       </p:sp>
@@ -14707,13 +17001,13 @@
   <p:clrMapOvr>
     <a:masterClrMapping/>
   </p:clrMapOvr>
-  <mc:AlternateContent xmlns:mc="http://schemas.openxmlformats.org/markup-compatibility/2006">
-    <mc:Choice xmlns:p14="http://schemas.microsoft.com/office/powerpoint/2010/main" Requires="p14">
+  <mc:AlternateContent xmlns:mc="http://schemas.openxmlformats.org/markup-compatibility/2006" xmlns:p14="http://schemas.microsoft.com/office/powerpoint/2010/main">
+    <mc:Choice Requires="p14">
       <p:transition p14:dur="250">
         <p:fade/>
       </p:transition>
     </mc:Choice>
-    <mc:Fallback>
+    <mc:Fallback xmlns="">
       <p:transition>
         <p:fade/>
       </p:transition>
@@ -14872,7 +17166,7 @@
         </p:nvSpPr>
         <p:spPr>
           <a:xfrm>
-            <a:off x="762000" y="609600"/>
+            <a:off x="533250" y="361950"/>
             <a:ext cx="10668000" cy="190500"/>
           </a:xfrm>
           <a:prstGeom prst="rect">
@@ -14909,7 +17203,7 @@
         </p:nvSpPr>
         <p:spPr>
           <a:xfrm>
-            <a:off x="762000" y="914400"/>
+            <a:off x="533250" y="644628"/>
             <a:ext cx="11201400" cy="460920"/>
           </a:xfrm>
           <a:prstGeom prst="rect">
@@ -16044,7 +18338,7 @@
         <p:spPr>
           <a:xfrm>
             <a:off x="4622750" y="3261787"/>
-            <a:ext cx="2946350" cy="639812"/>
+            <a:ext cx="2946350" cy="422167"/>
           </a:xfrm>
           <a:prstGeom prst="rect">
             <a:avLst/>
@@ -16069,7 +18363,43 @@
                 </a:solidFill>
                 <a:latin typeface="Inter"/>
               </a:rPr>
-              <a:t>15 → Dense(32) → Dense(16) → 1. Converged in 95 epochs via early stopping.</a:t>
+              <a:t>15</a:t>
+            </a:r>
+            <a:r>
+              <a:rPr lang="en-US" sz="1200" b="0" i="0" u="none" dirty="0">
+                <a:solidFill>
+                  <a:srgbClr val="475569"/>
+                </a:solidFill>
+                <a:latin typeface="Inter"/>
+              </a:rPr>
+              <a:t>/24</a:t>
+            </a:r>
+            <a:r>
+              <a:rPr sz="1200" b="0" i="0" u="none" dirty="0">
+                <a:solidFill>
+                  <a:srgbClr val="475569"/>
+                </a:solidFill>
+                <a:latin typeface="Inter"/>
+              </a:rPr>
+              <a:t> → Dense(32) → Dense(16) → 1</a:t>
+            </a:r>
+            <a:r>
+              <a:rPr lang="en-US" sz="1200" b="0" i="0" u="none" dirty="0">
+                <a:solidFill>
+                  <a:srgbClr val="475569"/>
+                </a:solidFill>
+                <a:latin typeface="Inter"/>
+              </a:rPr>
+              <a:t>/2</a:t>
+            </a:r>
+            <a:r>
+              <a:rPr sz="1200" b="0" i="0" u="none" dirty="0">
+                <a:solidFill>
+                  <a:srgbClr val="475569"/>
+                </a:solidFill>
+                <a:latin typeface="Inter"/>
+              </a:rPr>
+              <a:t>. Converged in 95 epochs via early stopping.</a:t>
             </a:r>
           </a:p>
         </p:txBody>
@@ -16083,7 +18413,7 @@
         <p:spPr>
           <a:xfrm>
             <a:off x="8254900" y="2777281"/>
-            <a:ext cx="3093667" cy="381000"/>
+            <a:ext cx="3093667" cy="390107"/>
           </a:xfrm>
           <a:prstGeom prst="rect">
             <a:avLst/>
@@ -16102,13 +18432,31 @@
               </a:lnSpc>
             </a:pPr>
             <a:r>
-              <a:rPr sz="3000" b="1" i="0" u="none">
+              <a:rPr sz="3000" b="1" i="0" u="none" dirty="0">
                 <a:solidFill>
                   <a:srgbClr val="000028"/>
                 </a:solidFill>
                 <a:latin typeface="Space Grotesk"/>
               </a:rPr>
-              <a:t>1.6 seconds</a:t>
+              <a:t>1.</a:t>
+            </a:r>
+            <a:r>
+              <a:rPr lang="en-US" sz="3000" b="1" i="0" u="none" dirty="0">
+                <a:solidFill>
+                  <a:srgbClr val="000028"/>
+                </a:solidFill>
+                <a:latin typeface="Space Grotesk"/>
+              </a:rPr>
+              <a:t>52</a:t>
+            </a:r>
+            <a:r>
+              <a:rPr sz="3000" b="1" i="0" u="none" dirty="0">
+                <a:solidFill>
+                  <a:srgbClr val="000028"/>
+                </a:solidFill>
+                <a:latin typeface="Space Grotesk"/>
+              </a:rPr>
+              <a:t> seconds</a:t>
             </a:r>
           </a:p>
         </p:txBody>
@@ -16141,13 +18489,31 @@
               </a:lnSpc>
             </a:pPr>
             <a:r>
-              <a:rPr sz="1200" b="0" i="0" u="none">
+              <a:rPr sz="1200" b="0" i="0" u="none" dirty="0">
                 <a:solidFill>
                   <a:srgbClr val="475569"/>
                 </a:solidFill>
                 <a:latin typeface="Inter"/>
               </a:rPr>
-              <a:t>full training time on CPU. The expensive work is paid once, offline.</a:t>
+              <a:t>full training time on CPU</a:t>
+            </a:r>
+            <a:r>
+              <a:rPr lang="en-US" sz="1200" b="0" i="0" u="none" dirty="0">
+                <a:solidFill>
+                  <a:srgbClr val="475569"/>
+                </a:solidFill>
+                <a:latin typeface="Inter"/>
+              </a:rPr>
+              <a:t> for 2-node model</a:t>
+            </a:r>
+            <a:r>
+              <a:rPr sz="1200" b="0" i="0" u="none" dirty="0">
+                <a:solidFill>
+                  <a:srgbClr val="475569"/>
+                </a:solidFill>
+                <a:latin typeface="Inter"/>
+              </a:rPr>
+              <a:t>. The expensive work is paid once, offline.</a:t>
             </a:r>
           </a:p>
         </p:txBody>
@@ -16974,8 +19340,49 @@
                 </a:solidFill>
                 <a:latin typeface="Inter"/>
               </a:rPr>
-              <a:t>ARCHITECTURE 2/2</a:t>
-            </a:r>
+              <a:t>ARCHITECTURE </a:t>
+            </a:r>
+            <a:r>
+              <a:rPr lang="en-US" sz="1200" b="1" i="0" u="none" dirty="0">
+                <a:solidFill>
+                  <a:schemeClr val="bg1">
+                    <a:lumMod val="75000"/>
+                  </a:schemeClr>
+                </a:solidFill>
+                <a:latin typeface="Inter"/>
+              </a:rPr>
+              <a:t>3</a:t>
+            </a:r>
+            <a:r>
+              <a:rPr sz="1200" b="1" i="0" u="none" dirty="0">
+                <a:solidFill>
+                  <a:schemeClr val="bg1">
+                    <a:lumMod val="75000"/>
+                  </a:schemeClr>
+                </a:solidFill>
+                <a:latin typeface="Inter"/>
+              </a:rPr>
+              <a:t>/</a:t>
+            </a:r>
+            <a:r>
+              <a:rPr lang="en-US" sz="1200" b="1" i="0" u="none" dirty="0">
+                <a:solidFill>
+                  <a:schemeClr val="bg1">
+                    <a:lumMod val="75000"/>
+                  </a:schemeClr>
+                </a:solidFill>
+                <a:latin typeface="Inter"/>
+              </a:rPr>
+              <a:t>3</a:t>
+            </a:r>
+            <a:endParaRPr sz="1200" b="1" i="0" u="none" dirty="0">
+              <a:solidFill>
+                <a:schemeClr val="bg1">
+                  <a:lumMod val="75000"/>
+                </a:schemeClr>
+              </a:solidFill>
+              <a:latin typeface="Inter"/>
+            </a:endParaRPr>
           </a:p>
         </p:txBody>
       </p:sp>
@@ -17087,7 +19494,7 @@
                 </a:solidFill>
                 <a:latin typeface="Inter"/>
               </a:rPr>
-              <a:t>The network predicts a multiplicative residual correction on top of the closed-form physics estimator. Selected on validation over additive and unanchored variants</a:t>
+              <a:t>The network predicts a residual correction on top of the closed-form physics estimator. Selected on validation over additive and unanchored variants</a:t>
             </a:r>
             <a:endParaRPr sz="1650" b="0" i="0" u="none" dirty="0">
               <a:solidFill>
@@ -17106,7 +19513,7 @@
         </p:nvSpPr>
         <p:spPr>
           <a:xfrm>
-            <a:off x="6324600" y="3097559"/>
+            <a:off x="6200559" y="3279514"/>
             <a:ext cx="5040630" cy="205680"/>
           </a:xfrm>
           <a:prstGeom prst="rect">
@@ -17126,130 +19533,20 @@
               </a:lnSpc>
             </a:pPr>
             <a:r>
-              <a:rPr sz="1350" b="1" i="0" u="none">
+              <a:rPr lang="en-US" sz="1350" b="1" i="0" u="none" dirty="0">
                 <a:solidFill>
                   <a:srgbClr val="94A3B8"/>
                 </a:solidFill>
                 <a:latin typeface="Inter"/>
               </a:rPr>
-              <a:t>TARGET PARAMETERIZATION</a:t>
-            </a:r>
-          </a:p>
-        </p:txBody>
-      </p:sp>
-      <p:sp>
-        <p:nvSpPr>
-          <p:cNvPr id="8" name="TextBox 7"/>
-          <p:cNvSpPr txBox="1"/>
-          <p:nvPr/>
-        </p:nvSpPr>
-        <p:spPr>
-          <a:xfrm>
-            <a:off x="6324600" y="3531840"/>
-            <a:ext cx="4800600" cy="323165"/>
-          </a:xfrm>
-          <a:prstGeom prst="rect">
-            <a:avLst/>
-          </a:prstGeom>
-          <a:noFill/>
-        </p:spPr>
-        <p:txBody>
-          <a:bodyPr wrap="square" lIns="0" tIns="0" rIns="0" bIns="0" anchor="t">
-            <a:spAutoFit/>
-          </a:bodyPr>
-          <a:lstStyle/>
-          <a:p>
-            <a:pPr algn="l"/>
-            <a:r>
-              <a:rPr sz="2100" b="1" i="0" u="none" dirty="0" err="1">
-                <a:solidFill>
-                  <a:srgbClr val="009999"/>
-                </a:solidFill>
-                <a:latin typeface="monospace"/>
-              </a:rPr>
-              <a:t>hA_pred</a:t>
-            </a:r>
-            <a:r>
-              <a:rPr sz="2100" b="1" i="0" u="none" dirty="0">
-                <a:solidFill>
-                  <a:srgbClr val="F8FAFC"/>
-                </a:solidFill>
-                <a:latin typeface="monospace"/>
-              </a:rPr>
-              <a:t> = </a:t>
-            </a:r>
-            <a:r>
-              <a:rPr sz="2100" b="1" i="0" u="none" dirty="0" err="1">
-                <a:solidFill>
-                  <a:srgbClr val="F8FAFC"/>
-                </a:solidFill>
-                <a:latin typeface="monospace"/>
-              </a:rPr>
-              <a:t>hA_base</a:t>
-            </a:r>
-            <a:r>
-              <a:rPr lang="en-US" sz="2100" b="1" i="0" u="none" dirty="0">
-                <a:solidFill>
-                  <a:srgbClr val="F8FAFC"/>
-                </a:solidFill>
-                <a:latin typeface="monospace"/>
-              </a:rPr>
-              <a:t> </a:t>
-            </a:r>
-            <a:r>
-              <a:rPr lang="en-GB" sz="2100" b="1" i="0" u="none" dirty="0">
-                <a:solidFill>
-                  <a:srgbClr val="F8FAFC"/>
-                </a:solidFill>
-                <a:latin typeface="monospace"/>
-              </a:rPr>
-              <a:t>× exp(net(features))</a:t>
-            </a:r>
-            <a:endParaRPr sz="2100" b="1" i="0" u="none" dirty="0">
+              <a:t>Forward pass</a:t>
+            </a:r>
+            <a:endParaRPr sz="1350" b="1" i="0" u="none" dirty="0">
               <a:solidFill>
-                <a:srgbClr val="F8FAFC"/>
+                <a:srgbClr val="94A3B8"/>
               </a:solidFill>
-              <a:latin typeface="monospace"/>
+              <a:latin typeface="Inter"/>
             </a:endParaRPr>
-          </a:p>
-        </p:txBody>
-      </p:sp>
-      <p:sp>
-        <p:nvSpPr>
-          <p:cNvPr id="9" name="TextBox 8"/>
-          <p:cNvSpPr txBox="1"/>
-          <p:nvPr/>
-        </p:nvSpPr>
-        <p:spPr>
-          <a:xfrm>
-            <a:off x="6324600" y="4465290"/>
-            <a:ext cx="4800600" cy="514350"/>
-          </a:xfrm>
-          <a:prstGeom prst="rect">
-            <a:avLst/>
-          </a:prstGeom>
-          <a:noFill/>
-        </p:spPr>
-        <p:txBody>
-          <a:bodyPr wrap="square" lIns="0" tIns="0" rIns="0" bIns="0" anchor="t">
-            <a:spAutoFit/>
-          </a:bodyPr>
-          <a:lstStyle/>
-          <a:p>
-            <a:pPr algn="l">
-              <a:lnSpc>
-                <a:spcPts val="2025"/>
-              </a:lnSpc>
-            </a:pPr>
-            <a:r>
-              <a:rPr sz="1350" b="0" i="0" u="none">
-                <a:solidFill>
-                  <a:srgbClr val="94A3B8"/>
-                </a:solidFill>
-                <a:latin typeface="Inter"/>
-              </a:rPr>
-              <a:t>Network capacity focuses entirely on modeling noise deviations and unmodeled transient dynamics.</a:t>
-            </a:r>
           </a:p>
         </p:txBody>
       </p:sp>
@@ -17261,7 +19558,7 @@
         </p:nvSpPr>
         <p:spPr>
           <a:xfrm>
-            <a:off x="981075" y="4202310"/>
+            <a:off x="952500" y="4194930"/>
             <a:ext cx="4429125" cy="228600"/>
           </a:xfrm>
           <a:prstGeom prst="rect">
@@ -17277,7 +19574,7 @@
           <a:p>
             <a:pPr algn="l"/>
             <a:r>
-              <a:rPr sz="1500" b="1" i="0" u="none">
+              <a:rPr sz="1500" b="1" i="0" u="none" dirty="0">
                 <a:solidFill>
                   <a:srgbClr val="0F172A"/>
                 </a:solidFill>
@@ -17286,7 +19583,7 @@
               <a:t>Topology:</a:t>
             </a:r>
             <a:r>
-              <a:rPr sz="1500" b="0" i="0" u="none">
+              <a:rPr sz="1500" b="0" i="0" u="none" dirty="0">
                 <a:solidFill>
                   <a:srgbClr val="0F172A"/>
                 </a:solidFill>
@@ -17553,7 +19850,162 @@
                 </a:solidFill>
                 <a:latin typeface="Inter"/>
               </a:rPr>
-              <a:t>Validation: unanchored 2.11% · additive 1.86% · multiplicative 1.82%</a:t>
+              <a:t>Validation: unanchored 2.11% · additive 1.86% · multiplicative 1.82% error vs true </a:t>
+            </a:r>
+            <a:r>
+              <a:rPr lang="en-GB" sz="1200" dirty="0" err="1">
+                <a:solidFill>
+                  <a:srgbClr val="475569"/>
+                </a:solidFill>
+                <a:latin typeface="Inter"/>
+              </a:rPr>
+              <a:t>hA</a:t>
+            </a:r>
+            <a:endParaRPr lang="en-GB" sz="1200" dirty="0">
+              <a:solidFill>
+                <a:srgbClr val="475569"/>
+              </a:solidFill>
+              <a:latin typeface="Inter"/>
+            </a:endParaRPr>
+          </a:p>
+        </p:txBody>
+      </p:sp>
+      <p:sp>
+        <p:nvSpPr>
+          <p:cNvPr id="22" name="TextBox 21">
+            <a:extLst>
+              <a:ext uri="{FF2B5EF4-FFF2-40B4-BE49-F238E27FC236}">
+                <a16:creationId xmlns:a16="http://schemas.microsoft.com/office/drawing/2014/main" id="{C0DE8932-6CC1-75A8-8E97-87315FBDB0EE}"/>
+              </a:ext>
+            </a:extLst>
+          </p:cNvPr>
+          <p:cNvSpPr txBox="1"/>
+          <p:nvPr/>
+        </p:nvSpPr>
+        <p:spPr>
+          <a:xfrm>
+            <a:off x="6096000" y="3620730"/>
+            <a:ext cx="5249749" cy="1323439"/>
+          </a:xfrm>
+          <a:prstGeom prst="rect">
+            <a:avLst/>
+          </a:prstGeom>
+          <a:noFill/>
+        </p:spPr>
+        <p:txBody>
+          <a:bodyPr wrap="square">
+            <a:spAutoFit/>
+          </a:bodyPr>
+          <a:lstStyle/>
+          <a:p>
+            <a:r>
+              <a:rPr lang="en-GB" sz="1600" dirty="0">
+                <a:solidFill>
+                  <a:schemeClr val="bg1"/>
+                </a:solidFill>
+              </a:rPr>
+              <a:t>1. 15 features in</a:t>
+            </a:r>
+          </a:p>
+          <a:p>
+            <a:r>
+              <a:rPr lang="en-GB" sz="1600" dirty="0">
+                <a:solidFill>
+                  <a:schemeClr val="bg1"/>
+                </a:solidFill>
+              </a:rPr>
+              <a:t>2. Standardize (train mean/</a:t>
+            </a:r>
+            <a:r>
+              <a:rPr lang="el-GR" sz="1600" dirty="0">
+                <a:solidFill>
+                  <a:schemeClr val="bg1"/>
+                </a:solidFill>
+              </a:rPr>
+              <a:t>σ) </a:t>
+            </a:r>
+            <a:endParaRPr lang="en-US" sz="1600" dirty="0">
+              <a:solidFill>
+                <a:schemeClr val="bg1"/>
+              </a:solidFill>
+            </a:endParaRPr>
+          </a:p>
+          <a:p>
+            <a:r>
+              <a:rPr lang="el-GR" sz="1600" dirty="0">
+                <a:solidFill>
+                  <a:schemeClr val="bg1"/>
+                </a:solidFill>
+              </a:rPr>
+              <a:t>3. 15 → 32 (</a:t>
+            </a:r>
+            <a:r>
+              <a:rPr lang="en-GB" sz="1600" dirty="0" err="1">
+                <a:solidFill>
+                  <a:schemeClr val="bg1"/>
+                </a:solidFill>
+              </a:rPr>
+              <a:t>ReLU</a:t>
+            </a:r>
+            <a:r>
+              <a:rPr lang="en-GB" sz="1600" dirty="0">
+                <a:solidFill>
+                  <a:schemeClr val="bg1"/>
+                </a:solidFill>
+              </a:rPr>
+              <a:t>) → 16 (</a:t>
+            </a:r>
+            <a:r>
+              <a:rPr lang="en-GB" sz="1600" dirty="0" err="1">
+                <a:solidFill>
+                  <a:schemeClr val="bg1"/>
+                </a:solidFill>
+              </a:rPr>
+              <a:t>ReLU</a:t>
+            </a:r>
+            <a:r>
+              <a:rPr lang="en-GB" sz="1600" dirty="0">
+                <a:solidFill>
+                  <a:schemeClr val="bg1"/>
+                </a:solidFill>
+              </a:rPr>
+              <a:t>) → 1 → single output: 0.3537</a:t>
+            </a:r>
+          </a:p>
+          <a:p>
+            <a:r>
+              <a:rPr lang="en-GB" sz="1600" dirty="0">
+                <a:solidFill>
+                  <a:schemeClr val="bg1"/>
+                </a:solidFill>
+              </a:rPr>
+              <a:t>4. De-standardize                         → z = 0.011032</a:t>
+            </a:r>
+          </a:p>
+          <a:p>
+            <a:r>
+              <a:rPr lang="en-GB" sz="1600" dirty="0">
+                <a:solidFill>
+                  <a:schemeClr val="bg1"/>
+                </a:solidFill>
+              </a:rPr>
+              <a:t>5. </a:t>
+            </a:r>
+            <a:r>
+              <a:rPr lang="en-GB" sz="1600" dirty="0" err="1">
+                <a:solidFill>
+                  <a:schemeClr val="bg1"/>
+                </a:solidFill>
+              </a:rPr>
+              <a:t>hA</a:t>
+            </a:r>
+            <a:r>
+              <a:rPr lang="en-GB" sz="1600" dirty="0">
+                <a:solidFill>
+                  <a:schemeClr val="bg1"/>
+                </a:solidFill>
+              </a:rPr>
+              <a:t> = anchor × exp(z) = 14.96 × 1.0111 → 15.13</a:t>
             </a:r>
           </a:p>
         </p:txBody>
@@ -17705,106 +20157,93 @@
           <a:gsLst>
             <a:gs pos="0">
               <a:schemeClr val="phClr">
-                <a:tint val="50000"/>
-                <a:satMod val="300000"/>
+                <a:lumMod val="110000"/>
+                <a:satMod val="105000"/>
+                <a:tint val="67000"/>
               </a:schemeClr>
             </a:gs>
-            <a:gs pos="35000">
+            <a:gs pos="50000">
               <a:schemeClr val="phClr">
-                <a:tint val="37000"/>
-                <a:satMod val="300000"/>
+                <a:lumMod val="105000"/>
+                <a:satMod val="103000"/>
+                <a:tint val="73000"/>
               </a:schemeClr>
             </a:gs>
             <a:gs pos="100000">
               <a:schemeClr val="phClr">
-                <a:tint val="15000"/>
-                <a:satMod val="350000"/>
+                <a:lumMod val="105000"/>
+                <a:satMod val="109000"/>
+                <a:tint val="81000"/>
               </a:schemeClr>
             </a:gs>
           </a:gsLst>
-          <a:lin ang="16200000" scaled="1"/>
+          <a:lin ang="5400000" scaled="0"/>
         </a:gradFill>
         <a:gradFill rotWithShape="1">
           <a:gsLst>
             <a:gs pos="0">
               <a:schemeClr val="phClr">
-                <a:tint val="100000"/>
+                <a:satMod val="103000"/>
+                <a:lumMod val="102000"/>
+                <a:tint val="94000"/>
+              </a:schemeClr>
+            </a:gs>
+            <a:gs pos="50000">
+              <a:schemeClr val="phClr">
+                <a:satMod val="110000"/>
+                <a:lumMod val="100000"/>
                 <a:shade val="100000"/>
-                <a:satMod val="130000"/>
               </a:schemeClr>
             </a:gs>
             <a:gs pos="100000">
               <a:schemeClr val="phClr">
-                <a:tint val="50000"/>
-                <a:shade val="100000"/>
-                <a:satMod val="350000"/>
+                <a:lumMod val="99000"/>
+                <a:satMod val="120000"/>
+                <a:shade val="78000"/>
               </a:schemeClr>
             </a:gs>
           </a:gsLst>
-          <a:lin ang="16200000" scaled="0"/>
+          <a:lin ang="5400000" scaled="0"/>
         </a:gradFill>
       </a:fillStyleLst>
       <a:lnStyleLst>
-        <a:ln w="9525" cap="flat" cmpd="sng" algn="ctr">
+        <a:ln w="12700" cap="flat" cmpd="sng" algn="ctr">
           <a:solidFill>
-            <a:schemeClr val="phClr">
-              <a:shade val="95000"/>
-              <a:satMod val="105000"/>
-            </a:schemeClr>
+            <a:schemeClr val="phClr"/>
           </a:solidFill>
           <a:prstDash val="solid"/>
+          <a:miter lim="800000"/>
+        </a:ln>
+        <a:ln w="19050" cap="flat" cmpd="sng" algn="ctr">
+          <a:solidFill>
+            <a:schemeClr val="phClr"/>
+          </a:solidFill>
+          <a:prstDash val="solid"/>
+          <a:miter lim="800000"/>
         </a:ln>
         <a:ln w="25400" cap="flat" cmpd="sng" algn="ctr">
           <a:solidFill>
             <a:schemeClr val="phClr"/>
           </a:solidFill>
           <a:prstDash val="solid"/>
-        </a:ln>
-        <a:ln w="38100" cap="flat" cmpd="sng" algn="ctr">
-          <a:solidFill>
-            <a:schemeClr val="phClr"/>
-          </a:solidFill>
-          <a:prstDash val="solid"/>
+          <a:miter lim="800000"/>
         </a:ln>
       </a:lnStyleLst>
       <a:effectStyleLst>
         <a:effectStyle>
+          <a:effectLst/>
+        </a:effectStyle>
+        <a:effectStyle>
+          <a:effectLst/>
+        </a:effectStyle>
+        <a:effectStyle>
           <a:effectLst>
-            <a:outerShdw blurRad="40000" dist="20000" dir="5400000" rotWithShape="0">
+            <a:outerShdw blurRad="57150" dist="19050" dir="5400000" algn="ctr" rotWithShape="0">
               <a:srgbClr val="000000">
-                <a:alpha val="38000"/>
+                <a:alpha val="63000"/>
               </a:srgbClr>
             </a:outerShdw>
           </a:effectLst>
-        </a:effectStyle>
-        <a:effectStyle>
-          <a:effectLst>
-            <a:outerShdw blurRad="40000" dist="23000" dir="5400000" rotWithShape="0">
-              <a:srgbClr val="000000">
-                <a:alpha val="35000"/>
-              </a:srgbClr>
-            </a:outerShdw>
-          </a:effectLst>
-        </a:effectStyle>
-        <a:effectStyle>
-          <a:effectLst>
-            <a:outerShdw blurRad="40000" dist="23000" dir="5400000" rotWithShape="0">
-              <a:srgbClr val="000000">
-                <a:alpha val="35000"/>
-              </a:srgbClr>
-            </a:outerShdw>
-          </a:effectLst>
-          <a:scene3d>
-            <a:camera prst="orthographicFront">
-              <a:rot lat="0" lon="0" rev="0"/>
-            </a:camera>
-            <a:lightRig rig="threePt" dir="t">
-              <a:rot lat="0" lon="0" rev="1200000"/>
-            </a:lightRig>
-          </a:scene3d>
-          <a:sp3d>
-            <a:bevelT w="63500" h="25400"/>
-          </a:sp3d>
         </a:effectStyle>
       </a:effectStyleLst>
       <a:bgFillStyleLst>
@@ -18220,7 +20659,7 @@
 
 <file path=ppt/webextensions/taskpanes.xml><?xml version="1.0" encoding="utf-8"?>
 <wetp:taskpanes xmlns:wetp="http://schemas.microsoft.com/office/webextensions/taskpanes/2010/11">
-  <wetp:taskpane dockstate="right" visibility="0" width="700" row="1">
+  <wetp:taskpane dockstate="right" visibility="0" width="700" row="0">
     <wetp:webextensionref xmlns:r="http://schemas.openxmlformats.org/officeDocument/2006/relationships" r:id="rId1"/>
   </wetp:taskpane>
 </wetp:taskpanes>

--- a/docs/ParamsCalibrator Light Mode.pptx
+++ b/docs/ParamsCalibrator Light Mode.pptx
@@ -30,7 +30,7 @@
     <p:sldId id="258" r:id="rId21"/>
     <p:sldId id="256" r:id="rId22"/>
     <p:sldId id="301" r:id="rId23"/>
-    <p:sldId id="280" r:id="rId24"/>
+    <p:sldId id="302" r:id="rId24"/>
   </p:sldIdLst>
   <p:sldSz cx="12192000" cy="6858000"/>
   <p:notesSz cx="6858000" cy="9144000"/>
@@ -230,7 +230,7 @@
           <a:p>
             <a:fld id="{B5885A7D-505C-4218-BCB8-560D5C17BB9B}" type="datetimeFigureOut">
               <a:rPr lang="en-GB" smtClean="0"/>
-              <a:t>26/08/2026</a:t>
+              <a:t>28/08/2026</a:t>
             </a:fld>
             <a:endParaRPr lang="en-GB"/>
           </a:p>
@@ -761,7 +761,7 @@
           <a:p>
             <a:fld id="{79AD5287-36FD-4D30-93D0-5E26E609679A}" type="datetime1">
               <a:rPr lang="en-US" smtClean="0"/>
-              <a:t>8/26/2026</a:t>
+              <a:t>8/28/2026</a:t>
             </a:fld>
             <a:endParaRPr lang="en-US"/>
           </a:p>
@@ -951,7 +951,7 @@
           <a:p>
             <a:fld id="{B44504EB-207A-4480-A401-E95D6C51D63B}" type="datetime1">
               <a:rPr lang="en-US" smtClean="0"/>
-              <a:t>8/26/2026</a:t>
+              <a:t>8/28/2026</a:t>
             </a:fld>
             <a:endParaRPr lang="en-US"/>
           </a:p>
@@ -1208,7 +1208,7 @@
           <a:p>
             <a:fld id="{CB83B209-8E21-4BF8-BF16-EE1798512C30}" type="datetime1">
               <a:rPr lang="en-US" smtClean="0"/>
-              <a:t>8/26/2026</a:t>
+              <a:t>8/28/2026</a:t>
             </a:fld>
             <a:endParaRPr lang="en-US"/>
           </a:p>
@@ -1505,7 +1505,7 @@
           <a:p>
             <a:fld id="{26C5CF5B-B0B2-49F6-9CC0-BB384280F61E}" type="datetime1">
               <a:rPr lang="en-US" smtClean="0"/>
-              <a:t>8/26/2026</a:t>
+              <a:t>8/28/2026</a:t>
             </a:fld>
             <a:endParaRPr lang="en-US"/>
           </a:p>
@@ -1936,7 +1936,7 @@
           <a:p>
             <a:fld id="{0163206D-DA0F-4100-AE2C-B1E9FCEF6D4F}" type="datetime1">
               <a:rPr lang="en-US" smtClean="0"/>
-              <a:t>8/26/2026</a:t>
+              <a:t>8/28/2026</a:t>
             </a:fld>
             <a:endParaRPr lang="en-US"/>
           </a:p>
@@ -2065,7 +2065,7 @@
           <a:p>
             <a:fld id="{AE0A0442-76CF-480A-8636-183A2A3578C2}" type="datetime1">
               <a:rPr lang="en-US" smtClean="0"/>
-              <a:t>8/26/2026</a:t>
+              <a:t>8/28/2026</a:t>
             </a:fld>
             <a:endParaRPr lang="en-US"/>
           </a:p>
@@ -2172,7 +2172,7 @@
           <a:p>
             <a:fld id="{EFF0FF23-48AC-4F4D-AFE5-7B7556834023}" type="datetime1">
               <a:rPr lang="en-US" smtClean="0"/>
-              <a:t>8/26/2026</a:t>
+              <a:t>8/28/2026</a:t>
             </a:fld>
             <a:endParaRPr lang="en-US"/>
           </a:p>
@@ -2459,7 +2459,7 @@
           <a:p>
             <a:fld id="{F37AABAC-2ED4-4C66-9BF9-ECA281D38451}" type="datetime1">
               <a:rPr lang="en-US" smtClean="0"/>
-              <a:t>8/26/2026</a:t>
+              <a:t>8/28/2026</a:t>
             </a:fld>
             <a:endParaRPr lang="en-US"/>
           </a:p>
@@ -2723,7 +2723,7 @@
           <a:p>
             <a:fld id="{771BCDAC-E287-45C0-8510-E2CA0352394E}" type="datetime1">
               <a:rPr lang="en-US" smtClean="0"/>
-              <a:t>8/26/2026</a:t>
+              <a:t>8/28/2026</a:t>
             </a:fld>
             <a:endParaRPr lang="en-US"/>
           </a:p>
@@ -2903,7 +2903,7 @@
           <a:p>
             <a:fld id="{8194E2EC-6C6A-460F-8082-C404C2D77A6E}" type="datetime1">
               <a:rPr lang="en-US" smtClean="0"/>
-              <a:t>8/26/2026</a:t>
+              <a:t>8/28/2026</a:t>
             </a:fld>
             <a:endParaRPr lang="en-US"/>
           </a:p>
@@ -3126,7 +3126,7 @@
           <a:p>
             <a:fld id="{2FBF10B9-8DEC-4C80-9E67-014F9EBB58A6}" type="datetime1">
               <a:rPr lang="en-US" smtClean="0"/>
-              <a:t>8/26/2026</a:t>
+              <a:t>8/28/2026</a:t>
             </a:fld>
             <a:endParaRPr lang="en-US"/>
           </a:p>
@@ -3626,7 +3626,7 @@
         <p:spPr>
           <a:xfrm>
             <a:off x="762000" y="3312153"/>
-            <a:ext cx="8001000" cy="731341"/>
+            <a:ext cx="8001000" cy="732060"/>
           </a:xfrm>
           <a:prstGeom prst="rect">
             <a:avLst/>
@@ -3651,7 +3651,25 @@
                 </a:solidFill>
                 <a:latin typeface="Inter"/>
               </a:rPr>
-              <a:t>Instantaneous thermal constant calibration via machine learning.</a:t>
+              <a:t>Instantaneous thermal constant calibration </a:t>
+            </a:r>
+            <a:r>
+              <a:rPr lang="en-US" sz="2400" b="0" i="0" u="none" dirty="0">
+                <a:solidFill>
+                  <a:srgbClr val="94A3B8"/>
+                </a:solidFill>
+                <a:latin typeface="Inter"/>
+              </a:rPr>
+              <a:t>with</a:t>
+            </a:r>
+            <a:r>
+              <a:rPr sz="2400" b="0" i="0" u="none" dirty="0">
+                <a:solidFill>
+                  <a:srgbClr val="94A3B8"/>
+                </a:solidFill>
+                <a:latin typeface="Inter"/>
+              </a:rPr>
+              <a:t> machine learning.</a:t>
             </a:r>
           </a:p>
         </p:txBody>
@@ -6188,7 +6206,7 @@
                 </a:solidFill>
                 <a:latin typeface="Inter Medium"/>
               </a:rPr>
-              <a:t>Second-best accuracy behind EKF (1.44% vs 1.28% median). Zero convergence failures. 0.77 </a:t>
+              <a:t>Second-best accuracy behind EKF (0.16 pp away). Zero convergence failures. 0.77 </a:t>
             </a:r>
             <a:r>
               <a:rPr lang="en-GB" sz="1800" b="0" i="0" u="none" dirty="0" err="1">
@@ -9044,7 +9062,7 @@
         <p:spPr>
           <a:xfrm>
             <a:off x="8432899" y="3791842"/>
-            <a:ext cx="2987092" cy="274290"/>
+            <a:ext cx="2987092" cy="276999"/>
           </a:xfrm>
           <a:prstGeom prst="rect">
             <a:avLst/>
@@ -9059,18 +9077,24 @@
           <a:p>
             <a:pPr algn="l">
               <a:lnSpc>
-                <a:spcPts val="2160"/>
+                <a:spcPct val="100000"/>
               </a:lnSpc>
             </a:pPr>
             <a:r>
-              <a:rPr sz="1800" b="1" i="0" u="none">
+              <a:rPr lang="en-GB" sz="1800" b="1" i="0" u="none" dirty="0">
                 <a:solidFill>
                   <a:srgbClr val="0F172A"/>
                 </a:solidFill>
                 <a:latin typeface="Inter"/>
               </a:rPr>
-              <a:t>Edge Ready</a:t>
-            </a:r>
+              <a:t>Best Overall Trade-off</a:t>
+            </a:r>
+            <a:endParaRPr sz="1800" b="1" i="0" u="none" dirty="0">
+              <a:solidFill>
+                <a:srgbClr val="0F172A"/>
+              </a:solidFill>
+              <a:latin typeface="Inter"/>
+            </a:endParaRPr>
           </a:p>
         </p:txBody>
       </p:sp>
@@ -9083,7 +9107,7 @@
         <p:spPr>
           <a:xfrm>
             <a:off x="8432899" y="4218533"/>
-            <a:ext cx="2844849" cy="600075"/>
+            <a:ext cx="2844849" cy="415498"/>
           </a:xfrm>
           <a:prstGeom prst="rect">
             <a:avLst/>
@@ -9098,14 +9122,20 @@
           <a:p>
             <a:pPr algn="l"/>
             <a:r>
-              <a:rPr sz="1350" b="0" i="0" u="none">
+              <a:rPr lang="en-GB" sz="1350" b="0" i="0" u="none" dirty="0">
                 <a:solidFill>
                   <a:srgbClr val="475569"/>
                 </a:solidFill>
                 <a:latin typeface="Inter"/>
               </a:rPr>
-              <a:t>Predictable sub-millisecond latency. Viable for constrained edge deployment.</a:t>
-            </a:r>
+              <a:t>Fastest, most reliable, least affected by dimensionality.</a:t>
+            </a:r>
+            <a:endParaRPr sz="1350" b="0" i="0" u="none" dirty="0">
+              <a:solidFill>
+                <a:srgbClr val="475569"/>
+              </a:solidFill>
+              <a:latin typeface="Inter"/>
+            </a:endParaRPr>
           </a:p>
         </p:txBody>
       </p:sp>
@@ -12441,13 +12471,13 @@
   <p:clrMapOvr>
     <a:masterClrMapping/>
   </p:clrMapOvr>
-  <mc:AlternateContent xmlns:mc="http://schemas.openxmlformats.org/markup-compatibility/2006">
-    <mc:Choice xmlns:p14="http://schemas.microsoft.com/office/powerpoint/2010/main" Requires="p14">
+  <mc:AlternateContent xmlns:mc="http://schemas.openxmlformats.org/markup-compatibility/2006" xmlns:p14="http://schemas.microsoft.com/office/powerpoint/2010/main">
+    <mc:Choice Requires="p14">
       <p:transition p14:dur="250">
         <p:fade/>
       </p:transition>
     </mc:Choice>
-    <mc:Fallback>
+    <mc:Fallback xmlns="">
       <p:transition>
         <p:fade/>
       </p:transition>
@@ -12459,14 +12489,6 @@
 <file path=ppt/slides/slide23.xml><?xml version="1.0" encoding="utf-8"?>
 <p:sld xmlns:a="http://schemas.openxmlformats.org/drawingml/2006/main" xmlns:r="http://schemas.openxmlformats.org/officeDocument/2006/relationships" xmlns:p="http://schemas.openxmlformats.org/presentationml/2006/main">
   <p:cSld>
-    <p:bg>
-      <p:bgPr>
-        <a:solidFill>
-          <a:srgbClr val="FFFFFF"/>
-        </a:solidFill>
-        <a:effectLst/>
-      </p:bgPr>
-    </p:bg>
     <p:spTree>
       <p:nvGrpSpPr>
         <p:cNvPr id="1" name=""/>
@@ -12481,9 +12503,33 @@
           <a:chExt cx="0" cy="0"/>
         </a:xfrm>
       </p:grpSpPr>
-      <p:sp>
-        <p:nvSpPr>
-          <p:cNvPr id="3" name="TextBox 2"/>
+      <p:pic>
+        <p:nvPicPr>
+          <p:cNvPr id="3" name="Picture 2" descr="image.png"/>
+          <p:cNvPicPr>
+            <a:picLocks noChangeAspect="1"/>
+          </p:cNvPicPr>
+          <p:nvPr/>
+        </p:nvPicPr>
+        <p:blipFill>
+          <a:blip r:embed="rId2"/>
+          <a:stretch>
+            <a:fillRect/>
+          </a:stretch>
+        </p:blipFill>
+        <p:spPr>
+          <a:xfrm>
+            <a:off x="6879728" y="4348930"/>
+            <a:ext cx="4397871" cy="1343025"/>
+          </a:xfrm>
+          <a:prstGeom prst="rect">
+            <a:avLst/>
+          </a:prstGeom>
+        </p:spPr>
+      </p:pic>
+      <p:sp>
+        <p:nvSpPr>
+          <p:cNvPr id="4" name="TextBox 3"/>
           <p:cNvSpPr txBox="1"/>
           <p:nvPr/>
         </p:nvSpPr>
@@ -12507,24 +12553,24 @@
             <a:r>
               <a:rPr sz="1200" b="1" i="0" u="none">
                 <a:solidFill>
-                  <a:srgbClr val="64748B"/>
+                  <a:srgbClr val="009999"/>
                 </a:solidFill>
                 <a:latin typeface="Inter"/>
               </a:rPr>
-              <a:t>PERFORMANCE</a:t>
-            </a:r>
-          </a:p>
-        </p:txBody>
-      </p:sp>
-      <p:sp>
-        <p:nvSpPr>
-          <p:cNvPr id="4" name="TextBox 3"/>
+              <a:t>SCALING LAWS</a:t>
+            </a:r>
+          </a:p>
+        </p:txBody>
+      </p:sp>
+      <p:sp>
+        <p:nvSpPr>
+          <p:cNvPr id="5" name="TextBox 4"/>
           <p:cNvSpPr txBox="1"/>
           <p:nvPr/>
         </p:nvSpPr>
         <p:spPr>
           <a:xfrm>
-            <a:off x="609600" y="647700"/>
+            <a:off x="609600" y="723900"/>
             <a:ext cx="11521440" cy="457200"/>
           </a:xfrm>
           <a:prstGeom prst="rect">
@@ -12544,40 +12590,23 @@
               </a:lnSpc>
             </a:pPr>
             <a:r>
-              <a:rPr sz="3000" b="1" i="0" u="none">
-                <a:solidFill>
-                  <a:srgbClr val="0F172A"/>
+              <a:rPr lang="en-GB" sz="3000" b="1" i="0" u="none" dirty="0">
+                <a:solidFill>
+                  <a:srgbClr val="000028"/>
                 </a:solidFill>
                 <a:latin typeface="Inter"/>
               </a:rPr>
-              <a:t>Execution Speed Distribution</a:t>
-            </a:r>
-          </a:p>
-        </p:txBody>
-      </p:sp>
-      <p:pic>
-        <p:nvPicPr>
-          <p:cNvPr id="5" name="Picture 4"/>
-          <p:cNvPicPr>
-            <a:picLocks noChangeAspect="1"/>
-          </p:cNvPicPr>
-          <p:nvPr/>
-        </p:nvPicPr>
-        <p:blipFill>
-          <a:blip r:embed="rId2"/>
-          <a:srcRect/>
-          <a:stretch/>
-        </p:blipFill>
-        <p:spPr>
-          <a:xfrm>
-            <a:off x="609600" y="1352497"/>
-            <a:ext cx="10972800" cy="4588625"/>
-          </a:xfrm>
-          <a:prstGeom prst="rect">
-            <a:avLst/>
-          </a:prstGeom>
-        </p:spPr>
-      </p:pic>
+              <a:t>Why Not Just Train Longer?</a:t>
+            </a:r>
+            <a:endParaRPr sz="3000" b="1" i="0" u="none" dirty="0">
+              <a:solidFill>
+                <a:srgbClr val="000028"/>
+              </a:solidFill>
+              <a:latin typeface="Inter"/>
+            </a:endParaRPr>
+          </a:p>
+        </p:txBody>
+      </p:sp>
       <p:sp>
         <p:nvSpPr>
           <p:cNvPr id="6" name="TextBox 5"/>
@@ -12586,8 +12615,8 @@
         </p:nvSpPr>
         <p:spPr>
           <a:xfrm>
-            <a:off x="2220044" y="6041613"/>
-            <a:ext cx="7751912" cy="553998"/>
+            <a:off x="609600" y="1485900"/>
+            <a:ext cx="5783535" cy="209550"/>
           </a:xfrm>
           <a:prstGeom prst="rect">
             <a:avLst/>
@@ -12600,26 +12629,1560 @@
           </a:bodyPr>
           <a:lstStyle/>
           <a:p>
-            <a:pPr algn="ctr"/>
-            <a:r>
-              <a:rPr lang="en-GB" dirty="0"/>
-              <a:t>Deterministic output: identical input yields an identical estimate on every run — no random restarts, no initialization sensitivity. Latency stays tightly bounded.</a:t>
-            </a:r>
-            <a:endParaRPr dirty="0">
-              <a:solidFill>
-                <a:srgbClr val="0A1128"/>
-              </a:solidFill>
-              <a:latin typeface="Inter Medium"/>
-            </a:endParaRPr>
+            <a:pPr algn="l"/>
+            <a:r>
+              <a:rPr sz="1350" b="1" i="0" u="none">
+                <a:solidFill>
+                  <a:srgbClr val="000028"/>
+                </a:solidFill>
+                <a:latin typeface="Inter"/>
+              </a:rPr>
+              <a:t>A. More data — fixed 32→16 network</a:t>
+            </a:r>
+          </a:p>
+        </p:txBody>
+      </p:sp>
+      <p:graphicFrame>
+        <p:nvGraphicFramePr>
+          <p:cNvPr id="8" name="Table 7"/>
+          <p:cNvGraphicFramePr>
+            <a:graphicFrameLocks noGrp="1"/>
+          </p:cNvGraphicFramePr>
+          <p:nvPr>
+            <p:extLst>
+              <p:ext uri="{D42A27DB-BD31-4B8C-83A1-F6EECF244321}">
+                <p14:modId xmlns:p14="http://schemas.microsoft.com/office/powerpoint/2010/main" val="1496527869"/>
+              </p:ext>
+            </p:extLst>
+          </p:nvPr>
+        </p:nvGraphicFramePr>
+        <p:xfrm>
+          <a:off x="609600" y="1816100"/>
+          <a:ext cx="5508128" cy="1981200"/>
+        </p:xfrm>
+        <a:graphic>
+          <a:graphicData uri="http://schemas.openxmlformats.org/drawingml/2006/table">
+            <a:tbl>
+              <a:tblPr firstRow="1" bandRow="1">
+                <a:tableStyleId>{5C22544A-7EE6-4342-B048-85BDC9FD1C3A}</a:tableStyleId>
+              </a:tblPr>
+              <a:tblGrid>
+                <a:gridCol w="2612380">
+                  <a:extLst>
+                    <a:ext uri="{9D8B030D-6E8A-4147-A177-3AD203B41FA5}">
+                      <a16:colId xmlns:a16="http://schemas.microsoft.com/office/drawing/2014/main" val="20000"/>
+                    </a:ext>
+                  </a:extLst>
+                </a:gridCol>
+                <a:gridCol w="1542157">
+                  <a:extLst>
+                    <a:ext uri="{9D8B030D-6E8A-4147-A177-3AD203B41FA5}">
+                      <a16:colId xmlns:a16="http://schemas.microsoft.com/office/drawing/2014/main" val="20001"/>
+                    </a:ext>
+                  </a:extLst>
+                </a:gridCol>
+                <a:gridCol w="1353591">
+                  <a:extLst>
+                    <a:ext uri="{9D8B030D-6E8A-4147-A177-3AD203B41FA5}">
+                      <a16:colId xmlns:a16="http://schemas.microsoft.com/office/drawing/2014/main" val="20002"/>
+                    </a:ext>
+                  </a:extLst>
+                </a:gridCol>
+              </a:tblGrid>
+              <a:tr h="330200">
+                <a:tc>
+                  <a:txBody>
+                    <a:bodyPr/>
+                    <a:lstStyle/>
+                    <a:p>
+                      <a:pPr algn="l"/>
+                      <a:r>
+                        <a:rPr sz="1400" b="0" i="0" u="none">
+                          <a:solidFill>
+                            <a:srgbClr val="FFFFFF"/>
+                          </a:solidFill>
+                          <a:latin typeface="Inter SemiBold"/>
+                        </a:rPr>
+                        <a:t>Training runs</a:t>
+                      </a:r>
+                    </a:p>
+                  </a:txBody>
+                  <a:tcPr marL="63500" marR="63500" marT="25400" marB="25400" anchor="ctr">
+                    <a:lnL>
+                      <a:noFill/>
+                    </a:lnL>
+                    <a:lnR>
+                      <a:noFill/>
+                    </a:lnR>
+                    <a:lnT>
+                      <a:noFill/>
+                    </a:lnT>
+                    <a:lnB>
+                      <a:noFill/>
+                    </a:lnB>
+                    <a:solidFill>
+                      <a:srgbClr val="000028"/>
+                    </a:solidFill>
+                  </a:tcPr>
+                </a:tc>
+                <a:tc>
+                  <a:txBody>
+                    <a:bodyPr/>
+                    <a:lstStyle/>
+                    <a:p>
+                      <a:pPr algn="r"/>
+                      <a:r>
+                        <a:rPr sz="1400" b="0" i="0" u="none" dirty="0">
+                          <a:solidFill>
+                            <a:srgbClr val="FFFFFF"/>
+                          </a:solidFill>
+                          <a:latin typeface="Inter SemiBold"/>
+                        </a:rPr>
+                        <a:t>MAPE</a:t>
+                      </a:r>
+                    </a:p>
+                  </a:txBody>
+                  <a:tcPr marL="63500" marR="63500" marT="25400" marB="25400" anchor="ctr">
+                    <a:lnL>
+                      <a:noFill/>
+                    </a:lnL>
+                    <a:lnR>
+                      <a:noFill/>
+                    </a:lnR>
+                    <a:lnT>
+                      <a:noFill/>
+                    </a:lnT>
+                    <a:lnB>
+                      <a:noFill/>
+                    </a:lnB>
+                    <a:solidFill>
+                      <a:srgbClr val="000028"/>
+                    </a:solidFill>
+                  </a:tcPr>
+                </a:tc>
+                <a:tc>
+                  <a:txBody>
+                    <a:bodyPr/>
+                    <a:lstStyle/>
+                    <a:p>
+                      <a:pPr algn="r"/>
+                      <a:r>
+                        <a:rPr sz="1400" b="0" i="0" u="none">
+                          <a:solidFill>
+                            <a:srgbClr val="FFFFFF"/>
+                          </a:solidFill>
+                          <a:latin typeface="Inter SemiBold"/>
+                        </a:rPr>
+                        <a:t>RMSE</a:t>
+                      </a:r>
+                    </a:p>
+                  </a:txBody>
+                  <a:tcPr marL="63500" marR="63500" marT="25400" marB="25400" anchor="ctr">
+                    <a:lnL>
+                      <a:noFill/>
+                    </a:lnL>
+                    <a:lnR>
+                      <a:noFill/>
+                    </a:lnR>
+                    <a:lnT>
+                      <a:noFill/>
+                    </a:lnT>
+                    <a:lnB>
+                      <a:noFill/>
+                    </a:lnB>
+                    <a:solidFill>
+                      <a:srgbClr val="000028"/>
+                    </a:solidFill>
+                  </a:tcPr>
+                </a:tc>
+                <a:extLst>
+                  <a:ext uri="{0D108BD9-81ED-4DB2-BD59-A6C34878D82A}">
+                    <a16:rowId xmlns:a16="http://schemas.microsoft.com/office/drawing/2014/main" val="10000"/>
+                  </a:ext>
+                </a:extLst>
+              </a:tr>
+              <a:tr h="330200">
+                <a:tc>
+                  <a:txBody>
+                    <a:bodyPr/>
+                    <a:lstStyle/>
+                    <a:p>
+                      <a:pPr algn="l"/>
+                      <a:r>
+                        <a:rPr sz="1400" b="0" i="0" u="none">
+                          <a:solidFill>
+                            <a:srgbClr val="374151"/>
+                          </a:solidFill>
+                          <a:latin typeface="Inter"/>
+                        </a:rPr>
+                        <a:t>1 500</a:t>
+                      </a:r>
+                    </a:p>
+                  </a:txBody>
+                  <a:tcPr marL="63500" marR="63500" marT="25400" marB="25400" anchor="ctr">
+                    <a:lnL>
+                      <a:noFill/>
+                    </a:lnL>
+                    <a:lnR>
+                      <a:noFill/>
+                    </a:lnR>
+                    <a:lnT>
+                      <a:noFill/>
+                    </a:lnT>
+                    <a:lnB>
+                      <a:noFill/>
+                    </a:lnB>
+                    <a:noFill/>
+                  </a:tcPr>
+                </a:tc>
+                <a:tc>
+                  <a:txBody>
+                    <a:bodyPr/>
+                    <a:lstStyle/>
+                    <a:p>
+                      <a:pPr algn="r"/>
+                      <a:r>
+                        <a:rPr sz="1400" b="0" i="0" u="none">
+                          <a:solidFill>
+                            <a:srgbClr val="374151"/>
+                          </a:solidFill>
+                          <a:latin typeface="Inter"/>
+                        </a:rPr>
+                        <a:t>1.968%</a:t>
+                      </a:r>
+                    </a:p>
+                  </a:txBody>
+                  <a:tcPr marL="63500" marR="63500" marT="25400" marB="25400" anchor="ctr">
+                    <a:lnL>
+                      <a:noFill/>
+                    </a:lnL>
+                    <a:lnR>
+                      <a:noFill/>
+                    </a:lnR>
+                    <a:lnT>
+                      <a:noFill/>
+                    </a:lnT>
+                    <a:lnB>
+                      <a:noFill/>
+                    </a:lnB>
+                    <a:noFill/>
+                  </a:tcPr>
+                </a:tc>
+                <a:tc>
+                  <a:txBody>
+                    <a:bodyPr/>
+                    <a:lstStyle/>
+                    <a:p>
+                      <a:pPr algn="r"/>
+                      <a:r>
+                        <a:rPr sz="1400" b="0" i="0" u="none">
+                          <a:solidFill>
+                            <a:srgbClr val="374151"/>
+                          </a:solidFill>
+                          <a:latin typeface="Inter"/>
+                        </a:rPr>
+                        <a:t>0.560</a:t>
+                      </a:r>
+                    </a:p>
+                  </a:txBody>
+                  <a:tcPr marL="63500" marR="63500" marT="25400" marB="25400" anchor="ctr">
+                    <a:lnL>
+                      <a:noFill/>
+                    </a:lnL>
+                    <a:lnR>
+                      <a:noFill/>
+                    </a:lnR>
+                    <a:lnT>
+                      <a:noFill/>
+                    </a:lnT>
+                    <a:lnB>
+                      <a:noFill/>
+                    </a:lnB>
+                    <a:noFill/>
+                  </a:tcPr>
+                </a:tc>
+                <a:extLst>
+                  <a:ext uri="{0D108BD9-81ED-4DB2-BD59-A6C34878D82A}">
+                    <a16:rowId xmlns:a16="http://schemas.microsoft.com/office/drawing/2014/main" val="10001"/>
+                  </a:ext>
+                </a:extLst>
+              </a:tr>
+              <a:tr h="330200">
+                <a:tc>
+                  <a:txBody>
+                    <a:bodyPr/>
+                    <a:lstStyle/>
+                    <a:p>
+                      <a:pPr algn="l"/>
+                      <a:r>
+                        <a:rPr sz="1400" b="0" i="0" u="none">
+                          <a:solidFill>
+                            <a:srgbClr val="374151"/>
+                          </a:solidFill>
+                          <a:latin typeface="Inter"/>
+                        </a:rPr>
+                        <a:t>3 000</a:t>
+                      </a:r>
+                    </a:p>
+                  </a:txBody>
+                  <a:tcPr marL="63500" marR="63500" marT="25400" marB="25400" anchor="ctr">
+                    <a:lnL>
+                      <a:noFill/>
+                    </a:lnL>
+                    <a:lnR>
+                      <a:noFill/>
+                    </a:lnR>
+                    <a:lnT>
+                      <a:noFill/>
+                    </a:lnT>
+                    <a:lnB>
+                      <a:noFill/>
+                    </a:lnB>
+                    <a:noFill/>
+                  </a:tcPr>
+                </a:tc>
+                <a:tc>
+                  <a:txBody>
+                    <a:bodyPr/>
+                    <a:lstStyle/>
+                    <a:p>
+                      <a:pPr algn="r"/>
+                      <a:r>
+                        <a:rPr sz="1400" b="0" i="0" u="none">
+                          <a:solidFill>
+                            <a:srgbClr val="374151"/>
+                          </a:solidFill>
+                          <a:latin typeface="Inter"/>
+                        </a:rPr>
+                        <a:t>1.839%</a:t>
+                      </a:r>
+                    </a:p>
+                  </a:txBody>
+                  <a:tcPr marL="63500" marR="63500" marT="25400" marB="25400" anchor="ctr">
+                    <a:lnL>
+                      <a:noFill/>
+                    </a:lnL>
+                    <a:lnR>
+                      <a:noFill/>
+                    </a:lnR>
+                    <a:lnT>
+                      <a:noFill/>
+                    </a:lnT>
+                    <a:lnB>
+                      <a:noFill/>
+                    </a:lnB>
+                    <a:noFill/>
+                  </a:tcPr>
+                </a:tc>
+                <a:tc>
+                  <a:txBody>
+                    <a:bodyPr/>
+                    <a:lstStyle/>
+                    <a:p>
+                      <a:pPr algn="r"/>
+                      <a:r>
+                        <a:rPr sz="1400" b="0" i="0" u="none">
+                          <a:solidFill>
+                            <a:srgbClr val="374151"/>
+                          </a:solidFill>
+                          <a:latin typeface="Inter"/>
+                        </a:rPr>
+                        <a:t>0.542</a:t>
+                      </a:r>
+                    </a:p>
+                  </a:txBody>
+                  <a:tcPr marL="63500" marR="63500" marT="25400" marB="25400" anchor="ctr">
+                    <a:lnL>
+                      <a:noFill/>
+                    </a:lnL>
+                    <a:lnR>
+                      <a:noFill/>
+                    </a:lnR>
+                    <a:lnT>
+                      <a:noFill/>
+                    </a:lnT>
+                    <a:lnB>
+                      <a:noFill/>
+                    </a:lnB>
+                    <a:noFill/>
+                  </a:tcPr>
+                </a:tc>
+                <a:extLst>
+                  <a:ext uri="{0D108BD9-81ED-4DB2-BD59-A6C34878D82A}">
+                    <a16:rowId xmlns:a16="http://schemas.microsoft.com/office/drawing/2014/main" val="10002"/>
+                  </a:ext>
+                </a:extLst>
+              </a:tr>
+              <a:tr h="330200">
+                <a:tc>
+                  <a:txBody>
+                    <a:bodyPr/>
+                    <a:lstStyle/>
+                    <a:p>
+                      <a:pPr algn="l"/>
+                      <a:r>
+                        <a:rPr sz="1400" b="1" i="0" u="none">
+                          <a:solidFill>
+                            <a:srgbClr val="009999"/>
+                          </a:solidFill>
+                          <a:latin typeface="Inter"/>
+                        </a:rPr>
+                        <a:t>6 000 (shipped)</a:t>
+                      </a:r>
+                    </a:p>
+                  </a:txBody>
+                  <a:tcPr marL="63500" marR="63500" marT="25400" marB="25400" anchor="ctr">
+                    <a:lnL>
+                      <a:noFill/>
+                    </a:lnL>
+                    <a:lnR>
+                      <a:noFill/>
+                    </a:lnR>
+                    <a:lnT>
+                      <a:noFill/>
+                    </a:lnT>
+                    <a:lnB>
+                      <a:noFill/>
+                    </a:lnB>
+                    <a:solidFill>
+                      <a:srgbClr val="F0FDFA"/>
+                    </a:solidFill>
+                  </a:tcPr>
+                </a:tc>
+                <a:tc>
+                  <a:txBody>
+                    <a:bodyPr/>
+                    <a:lstStyle/>
+                    <a:p>
+                      <a:pPr algn="r"/>
+                      <a:r>
+                        <a:rPr sz="1400" b="1" i="0" u="none">
+                          <a:solidFill>
+                            <a:srgbClr val="009999"/>
+                          </a:solidFill>
+                          <a:latin typeface="Inter"/>
+                        </a:rPr>
+                        <a:t>1.815%</a:t>
+                      </a:r>
+                    </a:p>
+                  </a:txBody>
+                  <a:tcPr marL="63500" marR="63500" marT="25400" marB="25400" anchor="ctr">
+                    <a:lnL>
+                      <a:noFill/>
+                    </a:lnL>
+                    <a:lnR>
+                      <a:noFill/>
+                    </a:lnR>
+                    <a:lnT>
+                      <a:noFill/>
+                    </a:lnT>
+                    <a:lnB>
+                      <a:noFill/>
+                    </a:lnB>
+                    <a:solidFill>
+                      <a:srgbClr val="F0FDFA"/>
+                    </a:solidFill>
+                  </a:tcPr>
+                </a:tc>
+                <a:tc>
+                  <a:txBody>
+                    <a:bodyPr/>
+                    <a:lstStyle/>
+                    <a:p>
+                      <a:pPr algn="r"/>
+                      <a:r>
+                        <a:rPr sz="1400" b="1" i="0" u="none">
+                          <a:solidFill>
+                            <a:srgbClr val="009999"/>
+                          </a:solidFill>
+                          <a:latin typeface="Inter"/>
+                        </a:rPr>
+                        <a:t>0.533</a:t>
+                      </a:r>
+                    </a:p>
+                  </a:txBody>
+                  <a:tcPr marL="63500" marR="63500" marT="25400" marB="25400" anchor="ctr">
+                    <a:lnL>
+                      <a:noFill/>
+                    </a:lnL>
+                    <a:lnR>
+                      <a:noFill/>
+                    </a:lnR>
+                    <a:lnT>
+                      <a:noFill/>
+                    </a:lnT>
+                    <a:lnB>
+                      <a:noFill/>
+                    </a:lnB>
+                    <a:solidFill>
+                      <a:srgbClr val="F0FDFA"/>
+                    </a:solidFill>
+                  </a:tcPr>
+                </a:tc>
+                <a:extLst>
+                  <a:ext uri="{0D108BD9-81ED-4DB2-BD59-A6C34878D82A}">
+                    <a16:rowId xmlns:a16="http://schemas.microsoft.com/office/drawing/2014/main" val="10003"/>
+                  </a:ext>
+                </a:extLst>
+              </a:tr>
+              <a:tr h="330200">
+                <a:tc>
+                  <a:txBody>
+                    <a:bodyPr/>
+                    <a:lstStyle/>
+                    <a:p>
+                      <a:pPr algn="l"/>
+                      <a:r>
+                        <a:rPr sz="1400" b="0" i="0" u="none">
+                          <a:solidFill>
+                            <a:srgbClr val="374151"/>
+                          </a:solidFill>
+                          <a:latin typeface="Inter"/>
+                        </a:rPr>
+                        <a:t>12 000</a:t>
+                      </a:r>
+                    </a:p>
+                  </a:txBody>
+                  <a:tcPr marL="63500" marR="63500" marT="25400" marB="25400" anchor="ctr">
+                    <a:lnL>
+                      <a:noFill/>
+                    </a:lnL>
+                    <a:lnR>
+                      <a:noFill/>
+                    </a:lnR>
+                    <a:lnT>
+                      <a:noFill/>
+                    </a:lnT>
+                    <a:lnB>
+                      <a:noFill/>
+                    </a:lnB>
+                    <a:noFill/>
+                  </a:tcPr>
+                </a:tc>
+                <a:tc>
+                  <a:txBody>
+                    <a:bodyPr/>
+                    <a:lstStyle/>
+                    <a:p>
+                      <a:pPr algn="r"/>
+                      <a:r>
+                        <a:rPr sz="1400" b="0" i="0" u="none">
+                          <a:solidFill>
+                            <a:srgbClr val="374151"/>
+                          </a:solidFill>
+                          <a:latin typeface="Inter"/>
+                        </a:rPr>
+                        <a:t>1.766%</a:t>
+                      </a:r>
+                    </a:p>
+                  </a:txBody>
+                  <a:tcPr marL="63500" marR="63500" marT="25400" marB="25400" anchor="ctr">
+                    <a:lnL>
+                      <a:noFill/>
+                    </a:lnL>
+                    <a:lnR>
+                      <a:noFill/>
+                    </a:lnR>
+                    <a:lnT>
+                      <a:noFill/>
+                    </a:lnT>
+                    <a:lnB>
+                      <a:noFill/>
+                    </a:lnB>
+                    <a:noFill/>
+                  </a:tcPr>
+                </a:tc>
+                <a:tc>
+                  <a:txBody>
+                    <a:bodyPr/>
+                    <a:lstStyle/>
+                    <a:p>
+                      <a:pPr algn="r"/>
+                      <a:r>
+                        <a:rPr sz="1400" b="0" i="0" u="none">
+                          <a:solidFill>
+                            <a:srgbClr val="374151"/>
+                          </a:solidFill>
+                          <a:latin typeface="Inter"/>
+                        </a:rPr>
+                        <a:t>0.517</a:t>
+                      </a:r>
+                    </a:p>
+                  </a:txBody>
+                  <a:tcPr marL="63500" marR="63500" marT="25400" marB="25400" anchor="ctr">
+                    <a:lnL>
+                      <a:noFill/>
+                    </a:lnL>
+                    <a:lnR>
+                      <a:noFill/>
+                    </a:lnR>
+                    <a:lnT>
+                      <a:noFill/>
+                    </a:lnT>
+                    <a:lnB>
+                      <a:noFill/>
+                    </a:lnB>
+                    <a:noFill/>
+                  </a:tcPr>
+                </a:tc>
+                <a:extLst>
+                  <a:ext uri="{0D108BD9-81ED-4DB2-BD59-A6C34878D82A}">
+                    <a16:rowId xmlns:a16="http://schemas.microsoft.com/office/drawing/2014/main" val="10004"/>
+                  </a:ext>
+                </a:extLst>
+              </a:tr>
+              <a:tr h="330200">
+                <a:tc>
+                  <a:txBody>
+                    <a:bodyPr/>
+                    <a:lstStyle/>
+                    <a:p>
+                      <a:pPr algn="l"/>
+                      <a:r>
+                        <a:rPr sz="1400" b="0" i="0" u="none" dirty="0">
+                          <a:solidFill>
+                            <a:srgbClr val="374151"/>
+                          </a:solidFill>
+                          <a:latin typeface="Inter"/>
+                        </a:rPr>
+                        <a:t>24 000</a:t>
+                      </a:r>
+                    </a:p>
+                  </a:txBody>
+                  <a:tcPr marL="63500" marR="63500" marT="25400" marB="25400" anchor="ctr">
+                    <a:lnL>
+                      <a:noFill/>
+                    </a:lnL>
+                    <a:lnR>
+                      <a:noFill/>
+                    </a:lnR>
+                    <a:lnT>
+                      <a:noFill/>
+                    </a:lnT>
+                    <a:lnB>
+                      <a:noFill/>
+                    </a:lnB>
+                    <a:noFill/>
+                  </a:tcPr>
+                </a:tc>
+                <a:tc>
+                  <a:txBody>
+                    <a:bodyPr/>
+                    <a:lstStyle/>
+                    <a:p>
+                      <a:pPr algn="r"/>
+                      <a:r>
+                        <a:rPr sz="1400" b="0" i="0" u="none">
+                          <a:solidFill>
+                            <a:srgbClr val="374151"/>
+                          </a:solidFill>
+                          <a:latin typeface="Inter"/>
+                        </a:rPr>
+                        <a:t>1.775%</a:t>
+                      </a:r>
+                    </a:p>
+                  </a:txBody>
+                  <a:tcPr marL="63500" marR="63500" marT="25400" marB="25400" anchor="ctr">
+                    <a:lnL>
+                      <a:noFill/>
+                    </a:lnL>
+                    <a:lnR>
+                      <a:noFill/>
+                    </a:lnR>
+                    <a:lnT>
+                      <a:noFill/>
+                    </a:lnT>
+                    <a:lnB>
+                      <a:noFill/>
+                    </a:lnB>
+                    <a:noFill/>
+                  </a:tcPr>
+                </a:tc>
+                <a:tc>
+                  <a:txBody>
+                    <a:bodyPr/>
+                    <a:lstStyle/>
+                    <a:p>
+                      <a:pPr algn="r"/>
+                      <a:r>
+                        <a:rPr sz="1400" b="0" i="0" u="none" dirty="0">
+                          <a:solidFill>
+                            <a:srgbClr val="374151"/>
+                          </a:solidFill>
+                          <a:latin typeface="Inter"/>
+                        </a:rPr>
+                        <a:t>0.515</a:t>
+                      </a:r>
+                    </a:p>
+                  </a:txBody>
+                  <a:tcPr marL="63500" marR="63500" marT="25400" marB="25400" anchor="ctr">
+                    <a:lnL>
+                      <a:noFill/>
+                    </a:lnL>
+                    <a:lnR>
+                      <a:noFill/>
+                    </a:lnR>
+                    <a:lnT>
+                      <a:noFill/>
+                    </a:lnT>
+                    <a:lnB>
+                      <a:noFill/>
+                    </a:lnB>
+                    <a:noFill/>
+                  </a:tcPr>
+                </a:tc>
+                <a:extLst>
+                  <a:ext uri="{0D108BD9-81ED-4DB2-BD59-A6C34878D82A}">
+                    <a16:rowId xmlns:a16="http://schemas.microsoft.com/office/drawing/2014/main" val="10005"/>
+                  </a:ext>
+                </a:extLst>
+              </a:tr>
+            </a:tbl>
+          </a:graphicData>
+        </a:graphic>
+      </p:graphicFrame>
+      <p:sp>
+        <p:nvSpPr>
+          <p:cNvPr id="9" name="TextBox 8"/>
+          <p:cNvSpPr txBox="1"/>
+          <p:nvPr/>
+        </p:nvSpPr>
+        <p:spPr>
+          <a:xfrm>
+            <a:off x="609600" y="4051300"/>
+            <a:ext cx="5783535" cy="200025"/>
+          </a:xfrm>
+          <a:prstGeom prst="rect">
+            <a:avLst/>
+          </a:prstGeom>
+          <a:noFill/>
+        </p:spPr>
+        <p:txBody>
+          <a:bodyPr wrap="square" lIns="0" tIns="0" rIns="0" bIns="0" anchor="t">
+            <a:spAutoFit/>
+          </a:bodyPr>
+          <a:lstStyle/>
+          <a:p>
+            <a:pPr algn="l"/>
+            <a:r>
+              <a:rPr sz="1350" b="1" i="0" u="none">
+                <a:solidFill>
+                  <a:srgbClr val="000028"/>
+                </a:solidFill>
+                <a:latin typeface="Inter"/>
+              </a:rPr>
+              <a:t>B. More capacity — fixed 24 000 runs</a:t>
+            </a:r>
+          </a:p>
+        </p:txBody>
+      </p:sp>
+      <p:graphicFrame>
+        <p:nvGraphicFramePr>
+          <p:cNvPr id="11" name="Table 10"/>
+          <p:cNvGraphicFramePr>
+            <a:graphicFrameLocks noGrp="1"/>
+          </p:cNvGraphicFramePr>
+          <p:nvPr/>
+        </p:nvGraphicFramePr>
+        <p:xfrm>
+          <a:off x="609600" y="4356100"/>
+          <a:ext cx="5508128" cy="1651000"/>
+        </p:xfrm>
+        <a:graphic>
+          <a:graphicData uri="http://schemas.openxmlformats.org/drawingml/2006/table">
+            <a:tbl>
+              <a:tblPr firstRow="1" bandRow="1">
+                <a:tableStyleId>{5C22544A-7EE6-4342-B048-85BDC9FD1C3A}</a:tableStyleId>
+              </a:tblPr>
+              <a:tblGrid>
+                <a:gridCol w="2571452">
+                  <a:extLst>
+                    <a:ext uri="{9D8B030D-6E8A-4147-A177-3AD203B41FA5}">
+                      <a16:colId xmlns:a16="http://schemas.microsoft.com/office/drawing/2014/main" val="20000"/>
+                    </a:ext>
+                  </a:extLst>
+                </a:gridCol>
+                <a:gridCol w="1475928">
+                  <a:extLst>
+                    <a:ext uri="{9D8B030D-6E8A-4147-A177-3AD203B41FA5}">
+                      <a16:colId xmlns:a16="http://schemas.microsoft.com/office/drawing/2014/main" val="20001"/>
+                    </a:ext>
+                  </a:extLst>
+                </a:gridCol>
+                <a:gridCol w="1460748">
+                  <a:extLst>
+                    <a:ext uri="{9D8B030D-6E8A-4147-A177-3AD203B41FA5}">
+                      <a16:colId xmlns:a16="http://schemas.microsoft.com/office/drawing/2014/main" val="20002"/>
+                    </a:ext>
+                  </a:extLst>
+                </a:gridCol>
+              </a:tblGrid>
+              <a:tr h="330200">
+                <a:tc>
+                  <a:txBody>
+                    <a:bodyPr/>
+                    <a:lstStyle/>
+                    <a:p>
+                      <a:pPr algn="l"/>
+                      <a:r>
+                        <a:rPr sz="1400" b="0" i="0" u="none">
+                          <a:solidFill>
+                            <a:srgbClr val="FFFFFF"/>
+                          </a:solidFill>
+                          <a:latin typeface="Inter SemiBold"/>
+                        </a:rPr>
+                        <a:t>Architecture</a:t>
+                      </a:r>
+                    </a:p>
+                  </a:txBody>
+                  <a:tcPr marL="63500" marR="63500" marT="25400" marB="25400" anchor="ctr">
+                    <a:lnL>
+                      <a:noFill/>
+                    </a:lnL>
+                    <a:lnR>
+                      <a:noFill/>
+                    </a:lnR>
+                    <a:lnT>
+                      <a:noFill/>
+                    </a:lnT>
+                    <a:lnB>
+                      <a:noFill/>
+                    </a:lnB>
+                    <a:solidFill>
+                      <a:srgbClr val="000028"/>
+                    </a:solidFill>
+                  </a:tcPr>
+                </a:tc>
+                <a:tc>
+                  <a:txBody>
+                    <a:bodyPr/>
+                    <a:lstStyle/>
+                    <a:p>
+                      <a:pPr algn="r"/>
+                      <a:r>
+                        <a:rPr sz="1400" b="0" i="0" u="none" dirty="0">
+                          <a:solidFill>
+                            <a:srgbClr val="FFFFFF"/>
+                          </a:solidFill>
+                          <a:latin typeface="Inter SemiBold"/>
+                        </a:rPr>
+                        <a:t>Params</a:t>
+                      </a:r>
+                    </a:p>
+                  </a:txBody>
+                  <a:tcPr marL="63500" marR="63500" marT="25400" marB="25400" anchor="ctr">
+                    <a:lnL>
+                      <a:noFill/>
+                    </a:lnL>
+                    <a:lnR>
+                      <a:noFill/>
+                    </a:lnR>
+                    <a:lnT>
+                      <a:noFill/>
+                    </a:lnT>
+                    <a:lnB>
+                      <a:noFill/>
+                    </a:lnB>
+                    <a:solidFill>
+                      <a:srgbClr val="000028"/>
+                    </a:solidFill>
+                  </a:tcPr>
+                </a:tc>
+                <a:tc>
+                  <a:txBody>
+                    <a:bodyPr/>
+                    <a:lstStyle/>
+                    <a:p>
+                      <a:pPr algn="r"/>
+                      <a:r>
+                        <a:rPr sz="1400" b="0" i="0" u="none">
+                          <a:solidFill>
+                            <a:srgbClr val="FFFFFF"/>
+                          </a:solidFill>
+                          <a:latin typeface="Inter SemiBold"/>
+                        </a:rPr>
+                        <a:t>MAPE</a:t>
+                      </a:r>
+                    </a:p>
+                  </a:txBody>
+                  <a:tcPr marL="63500" marR="63500" marT="25400" marB="25400" anchor="ctr">
+                    <a:lnL>
+                      <a:noFill/>
+                    </a:lnL>
+                    <a:lnR>
+                      <a:noFill/>
+                    </a:lnR>
+                    <a:lnT>
+                      <a:noFill/>
+                    </a:lnT>
+                    <a:lnB>
+                      <a:noFill/>
+                    </a:lnB>
+                    <a:solidFill>
+                      <a:srgbClr val="000028"/>
+                    </a:solidFill>
+                  </a:tcPr>
+                </a:tc>
+                <a:extLst>
+                  <a:ext uri="{0D108BD9-81ED-4DB2-BD59-A6C34878D82A}">
+                    <a16:rowId xmlns:a16="http://schemas.microsoft.com/office/drawing/2014/main" val="10000"/>
+                  </a:ext>
+                </a:extLst>
+              </a:tr>
+              <a:tr h="330200">
+                <a:tc>
+                  <a:txBody>
+                    <a:bodyPr/>
+                    <a:lstStyle/>
+                    <a:p>
+                      <a:pPr algn="l"/>
+                      <a:r>
+                        <a:rPr sz="1400" b="0" i="0" u="none">
+                          <a:solidFill>
+                            <a:srgbClr val="374151"/>
+                          </a:solidFill>
+                          <a:latin typeface="Inter"/>
+                        </a:rPr>
+                        <a:t>32 → 16</a:t>
+                      </a:r>
+                    </a:p>
+                  </a:txBody>
+                  <a:tcPr marL="63500" marR="63500" marT="25400" marB="25400" anchor="ctr">
+                    <a:lnL>
+                      <a:noFill/>
+                    </a:lnL>
+                    <a:lnR>
+                      <a:noFill/>
+                    </a:lnR>
+                    <a:lnT>
+                      <a:noFill/>
+                    </a:lnT>
+                    <a:lnB>
+                      <a:noFill/>
+                    </a:lnB>
+                    <a:noFill/>
+                  </a:tcPr>
+                </a:tc>
+                <a:tc>
+                  <a:txBody>
+                    <a:bodyPr/>
+                    <a:lstStyle/>
+                    <a:p>
+                      <a:pPr algn="r"/>
+                      <a:r>
+                        <a:rPr sz="1400" b="0" i="0" u="none">
+                          <a:solidFill>
+                            <a:srgbClr val="374151"/>
+                          </a:solidFill>
+                          <a:latin typeface="Inter"/>
+                        </a:rPr>
+                        <a:t>1 057</a:t>
+                      </a:r>
+                    </a:p>
+                  </a:txBody>
+                  <a:tcPr marL="63500" marR="63500" marT="25400" marB="25400" anchor="ctr">
+                    <a:lnL>
+                      <a:noFill/>
+                    </a:lnL>
+                    <a:lnR>
+                      <a:noFill/>
+                    </a:lnR>
+                    <a:lnT>
+                      <a:noFill/>
+                    </a:lnT>
+                    <a:lnB>
+                      <a:noFill/>
+                    </a:lnB>
+                    <a:noFill/>
+                  </a:tcPr>
+                </a:tc>
+                <a:tc>
+                  <a:txBody>
+                    <a:bodyPr/>
+                    <a:lstStyle/>
+                    <a:p>
+                      <a:pPr algn="r"/>
+                      <a:r>
+                        <a:rPr sz="1400" b="0" i="0" u="none">
+                          <a:solidFill>
+                            <a:srgbClr val="374151"/>
+                          </a:solidFill>
+                          <a:latin typeface="Inter"/>
+                        </a:rPr>
+                        <a:t>1.775%</a:t>
+                      </a:r>
+                    </a:p>
+                  </a:txBody>
+                  <a:tcPr marL="63500" marR="63500" marT="25400" marB="25400" anchor="ctr">
+                    <a:lnL>
+                      <a:noFill/>
+                    </a:lnL>
+                    <a:lnR>
+                      <a:noFill/>
+                    </a:lnR>
+                    <a:lnT>
+                      <a:noFill/>
+                    </a:lnT>
+                    <a:lnB>
+                      <a:noFill/>
+                    </a:lnB>
+                    <a:noFill/>
+                  </a:tcPr>
+                </a:tc>
+                <a:extLst>
+                  <a:ext uri="{0D108BD9-81ED-4DB2-BD59-A6C34878D82A}">
+                    <a16:rowId xmlns:a16="http://schemas.microsoft.com/office/drawing/2014/main" val="10001"/>
+                  </a:ext>
+                </a:extLst>
+              </a:tr>
+              <a:tr h="330200">
+                <a:tc>
+                  <a:txBody>
+                    <a:bodyPr/>
+                    <a:lstStyle/>
+                    <a:p>
+                      <a:pPr algn="l"/>
+                      <a:r>
+                        <a:rPr sz="1400" b="0" i="0" u="none">
+                          <a:solidFill>
+                            <a:srgbClr val="374151"/>
+                          </a:solidFill>
+                          <a:latin typeface="Inter"/>
+                        </a:rPr>
+                        <a:t>64 → 32</a:t>
+                      </a:r>
+                    </a:p>
+                  </a:txBody>
+                  <a:tcPr marL="63500" marR="63500" marT="25400" marB="25400" anchor="ctr">
+                    <a:lnL>
+                      <a:noFill/>
+                    </a:lnL>
+                    <a:lnR>
+                      <a:noFill/>
+                    </a:lnR>
+                    <a:lnT>
+                      <a:noFill/>
+                    </a:lnT>
+                    <a:lnB>
+                      <a:noFill/>
+                    </a:lnB>
+                    <a:noFill/>
+                  </a:tcPr>
+                </a:tc>
+                <a:tc>
+                  <a:txBody>
+                    <a:bodyPr/>
+                    <a:lstStyle/>
+                    <a:p>
+                      <a:pPr algn="r"/>
+                      <a:r>
+                        <a:rPr sz="1400" b="0" i="0" u="none">
+                          <a:solidFill>
+                            <a:srgbClr val="374151"/>
+                          </a:solidFill>
+                          <a:latin typeface="Inter"/>
+                        </a:rPr>
+                        <a:t>3 137</a:t>
+                      </a:r>
+                    </a:p>
+                  </a:txBody>
+                  <a:tcPr marL="63500" marR="63500" marT="25400" marB="25400" anchor="ctr">
+                    <a:lnL>
+                      <a:noFill/>
+                    </a:lnL>
+                    <a:lnR>
+                      <a:noFill/>
+                    </a:lnR>
+                    <a:lnT>
+                      <a:noFill/>
+                    </a:lnT>
+                    <a:lnB>
+                      <a:noFill/>
+                    </a:lnB>
+                    <a:noFill/>
+                  </a:tcPr>
+                </a:tc>
+                <a:tc>
+                  <a:txBody>
+                    <a:bodyPr/>
+                    <a:lstStyle/>
+                    <a:p>
+                      <a:pPr algn="r"/>
+                      <a:r>
+                        <a:rPr sz="1400" b="0" i="0" u="none">
+                          <a:solidFill>
+                            <a:srgbClr val="374151"/>
+                          </a:solidFill>
+                          <a:latin typeface="Inter"/>
+                        </a:rPr>
+                        <a:t>1.779%</a:t>
+                      </a:r>
+                    </a:p>
+                  </a:txBody>
+                  <a:tcPr marL="63500" marR="63500" marT="25400" marB="25400" anchor="ctr">
+                    <a:lnL>
+                      <a:noFill/>
+                    </a:lnL>
+                    <a:lnR>
+                      <a:noFill/>
+                    </a:lnR>
+                    <a:lnT>
+                      <a:noFill/>
+                    </a:lnT>
+                    <a:lnB>
+                      <a:noFill/>
+                    </a:lnB>
+                    <a:noFill/>
+                  </a:tcPr>
+                </a:tc>
+                <a:extLst>
+                  <a:ext uri="{0D108BD9-81ED-4DB2-BD59-A6C34878D82A}">
+                    <a16:rowId xmlns:a16="http://schemas.microsoft.com/office/drawing/2014/main" val="10002"/>
+                  </a:ext>
+                </a:extLst>
+              </a:tr>
+              <a:tr h="330200">
+                <a:tc>
+                  <a:txBody>
+                    <a:bodyPr/>
+                    <a:lstStyle/>
+                    <a:p>
+                      <a:pPr algn="l"/>
+                      <a:r>
+                        <a:rPr sz="1400" b="0" i="0" u="none">
+                          <a:solidFill>
+                            <a:srgbClr val="374151"/>
+                          </a:solidFill>
+                          <a:latin typeface="Inter"/>
+                        </a:rPr>
+                        <a:t>128 → 64</a:t>
+                      </a:r>
+                    </a:p>
+                  </a:txBody>
+                  <a:tcPr marL="63500" marR="63500" marT="25400" marB="25400" anchor="ctr">
+                    <a:lnL>
+                      <a:noFill/>
+                    </a:lnL>
+                    <a:lnR>
+                      <a:noFill/>
+                    </a:lnR>
+                    <a:lnT>
+                      <a:noFill/>
+                    </a:lnT>
+                    <a:lnB>
+                      <a:noFill/>
+                    </a:lnB>
+                    <a:noFill/>
+                  </a:tcPr>
+                </a:tc>
+                <a:tc>
+                  <a:txBody>
+                    <a:bodyPr/>
+                    <a:lstStyle/>
+                    <a:p>
+                      <a:pPr algn="r"/>
+                      <a:r>
+                        <a:rPr sz="1400" b="0" i="0" u="none">
+                          <a:solidFill>
+                            <a:srgbClr val="374151"/>
+                          </a:solidFill>
+                          <a:latin typeface="Inter"/>
+                        </a:rPr>
+                        <a:t>10 369</a:t>
+                      </a:r>
+                    </a:p>
+                  </a:txBody>
+                  <a:tcPr marL="63500" marR="63500" marT="25400" marB="25400" anchor="ctr">
+                    <a:lnL>
+                      <a:noFill/>
+                    </a:lnL>
+                    <a:lnR>
+                      <a:noFill/>
+                    </a:lnR>
+                    <a:lnT>
+                      <a:noFill/>
+                    </a:lnT>
+                    <a:lnB>
+                      <a:noFill/>
+                    </a:lnB>
+                    <a:noFill/>
+                  </a:tcPr>
+                </a:tc>
+                <a:tc>
+                  <a:txBody>
+                    <a:bodyPr/>
+                    <a:lstStyle/>
+                    <a:p>
+                      <a:pPr algn="r"/>
+                      <a:r>
+                        <a:rPr sz="1400" b="0" i="0" u="none">
+                          <a:solidFill>
+                            <a:srgbClr val="374151"/>
+                          </a:solidFill>
+                          <a:latin typeface="Inter"/>
+                        </a:rPr>
+                        <a:t>1.787%</a:t>
+                      </a:r>
+                    </a:p>
+                  </a:txBody>
+                  <a:tcPr marL="63500" marR="63500" marT="25400" marB="25400" anchor="ctr">
+                    <a:lnL>
+                      <a:noFill/>
+                    </a:lnL>
+                    <a:lnR>
+                      <a:noFill/>
+                    </a:lnR>
+                    <a:lnT>
+                      <a:noFill/>
+                    </a:lnT>
+                    <a:lnB>
+                      <a:noFill/>
+                    </a:lnB>
+                    <a:noFill/>
+                  </a:tcPr>
+                </a:tc>
+                <a:extLst>
+                  <a:ext uri="{0D108BD9-81ED-4DB2-BD59-A6C34878D82A}">
+                    <a16:rowId xmlns:a16="http://schemas.microsoft.com/office/drawing/2014/main" val="10003"/>
+                  </a:ext>
+                </a:extLst>
+              </a:tr>
+              <a:tr h="330200">
+                <a:tc>
+                  <a:txBody>
+                    <a:bodyPr/>
+                    <a:lstStyle/>
+                    <a:p>
+                      <a:pPr algn="l"/>
+                      <a:r>
+                        <a:rPr sz="1400" b="0" i="0" u="none">
+                          <a:solidFill>
+                            <a:srgbClr val="374151"/>
+                          </a:solidFill>
+                          <a:latin typeface="Inter"/>
+                        </a:rPr>
+                        <a:t>256 → 128 → 64</a:t>
+                      </a:r>
+                    </a:p>
+                  </a:txBody>
+                  <a:tcPr marL="63500" marR="63500" marT="25400" marB="25400" anchor="ctr">
+                    <a:lnL>
+                      <a:noFill/>
+                    </a:lnL>
+                    <a:lnR>
+                      <a:noFill/>
+                    </a:lnR>
+                    <a:lnT>
+                      <a:noFill/>
+                    </a:lnT>
+                    <a:lnB>
+                      <a:noFill/>
+                    </a:lnB>
+                    <a:noFill/>
+                  </a:tcPr>
+                </a:tc>
+                <a:tc>
+                  <a:txBody>
+                    <a:bodyPr/>
+                    <a:lstStyle/>
+                    <a:p>
+                      <a:pPr algn="r"/>
+                      <a:r>
+                        <a:rPr sz="1400" b="0" i="0" u="none">
+                          <a:solidFill>
+                            <a:srgbClr val="374151"/>
+                          </a:solidFill>
+                          <a:latin typeface="Inter"/>
+                        </a:rPr>
+                        <a:t>45 313</a:t>
+                      </a:r>
+                    </a:p>
+                  </a:txBody>
+                  <a:tcPr marL="63500" marR="63500" marT="25400" marB="25400" anchor="ctr">
+                    <a:lnL>
+                      <a:noFill/>
+                    </a:lnL>
+                    <a:lnR>
+                      <a:noFill/>
+                    </a:lnR>
+                    <a:lnT>
+                      <a:noFill/>
+                    </a:lnT>
+                    <a:lnB>
+                      <a:noFill/>
+                    </a:lnB>
+                    <a:noFill/>
+                  </a:tcPr>
+                </a:tc>
+                <a:tc>
+                  <a:txBody>
+                    <a:bodyPr/>
+                    <a:lstStyle/>
+                    <a:p>
+                      <a:pPr algn="r"/>
+                      <a:r>
+                        <a:rPr sz="1400" b="0" i="0" u="none" dirty="0">
+                          <a:solidFill>
+                            <a:srgbClr val="374151"/>
+                          </a:solidFill>
+                          <a:latin typeface="Inter"/>
+                        </a:rPr>
+                        <a:t>1.767%</a:t>
+                      </a:r>
+                    </a:p>
+                  </a:txBody>
+                  <a:tcPr marL="63500" marR="63500" marT="25400" marB="25400" anchor="ctr">
+                    <a:lnL>
+                      <a:noFill/>
+                    </a:lnL>
+                    <a:lnR>
+                      <a:noFill/>
+                    </a:lnR>
+                    <a:lnT>
+                      <a:noFill/>
+                    </a:lnT>
+                    <a:lnB>
+                      <a:noFill/>
+                    </a:lnB>
+                    <a:noFill/>
+                  </a:tcPr>
+                </a:tc>
+                <a:extLst>
+                  <a:ext uri="{0D108BD9-81ED-4DB2-BD59-A6C34878D82A}">
+                    <a16:rowId xmlns:a16="http://schemas.microsoft.com/office/drawing/2014/main" val="10004"/>
+                  </a:ext>
+                </a:extLst>
+              </a:tr>
+            </a:tbl>
+          </a:graphicData>
+        </a:graphic>
+      </p:graphicFrame>
+      <p:sp>
+        <p:nvSpPr>
+          <p:cNvPr id="12" name="TextBox 11"/>
+          <p:cNvSpPr txBox="1"/>
+          <p:nvPr/>
+        </p:nvSpPr>
+        <p:spPr>
+          <a:xfrm>
+            <a:off x="6879728" y="2002506"/>
+            <a:ext cx="4397871" cy="853380"/>
+          </a:xfrm>
+          <a:prstGeom prst="rect">
+            <a:avLst/>
+          </a:prstGeom>
+          <a:noFill/>
+        </p:spPr>
+        <p:txBody>
+          <a:bodyPr wrap="square" lIns="0" tIns="0" rIns="0" bIns="0" anchor="t">
+            <a:spAutoFit/>
+          </a:bodyPr>
+          <a:lstStyle/>
+          <a:p>
+            <a:pPr algn="l">
+              <a:lnSpc>
+                <a:spcPts val="2160"/>
+              </a:lnSpc>
+            </a:pPr>
+            <a:r>
+              <a:rPr sz="1350" b="1" i="0" u="none" dirty="0">
+                <a:solidFill>
+                  <a:srgbClr val="000028"/>
+                </a:solidFill>
+                <a:latin typeface="Inter"/>
+              </a:rPr>
+              <a:t>Accuracy plateaus at ≈1.77%</a:t>
+            </a:r>
+            <a:r>
+              <a:rPr sz="1350" b="0" i="0" u="none" dirty="0">
+                <a:solidFill>
+                  <a:srgbClr val="4B5563"/>
+                </a:solidFill>
+                <a:latin typeface="Inter"/>
+              </a:rPr>
+              <a:t> </a:t>
+            </a:r>
+            <a:r>
+              <a:rPr dirty="0"/>
+              <a:t>
+</a:t>
+            </a:r>
+            <a:r>
+              <a:rPr sz="1350" b="0" i="0" u="none" dirty="0">
+                <a:solidFill>
+                  <a:srgbClr val="4B5563"/>
+                </a:solidFill>
+                <a:latin typeface="Inter"/>
+              </a:rPr>
+              <a:t> 4× the data buys just 0.04 pp, and a 43× larger network buys nothing.</a:t>
+            </a:r>
+          </a:p>
+        </p:txBody>
+      </p:sp>
+      <p:sp>
+        <p:nvSpPr>
+          <p:cNvPr id="13" name="TextBox 12"/>
+          <p:cNvSpPr txBox="1"/>
+          <p:nvPr/>
+        </p:nvSpPr>
+        <p:spPr>
+          <a:xfrm>
+            <a:off x="6879728" y="3084486"/>
+            <a:ext cx="4397871" cy="1035843"/>
+          </a:xfrm>
+          <a:prstGeom prst="rect">
+            <a:avLst/>
+          </a:prstGeom>
+          <a:noFill/>
+        </p:spPr>
+        <p:txBody>
+          <a:bodyPr wrap="square" lIns="0" tIns="0" rIns="0" bIns="0" anchor="t">
+            <a:spAutoFit/>
+          </a:bodyPr>
+          <a:lstStyle/>
+          <a:p>
+            <a:pPr algn="l">
+              <a:lnSpc>
+                <a:spcPts val="2039"/>
+              </a:lnSpc>
+            </a:pPr>
+            <a:r>
+              <a:rPr sz="1275" b="0" i="0" u="none" dirty="0">
+                <a:solidFill>
+                  <a:srgbClr val="4B5563"/>
+                </a:solidFill>
+                <a:latin typeface="Inter"/>
+              </a:rPr>
+              <a:t>The MLP cannot go below the closed-form estimator it is anchored to, because the anchor's per-run error is driven by that run's specific noise </a:t>
+            </a:r>
+            <a:r>
+              <a:rPr sz="1275" b="0" i="0" u="none" dirty="0" err="1">
+                <a:solidFill>
+                  <a:srgbClr val="4B5563"/>
+                </a:solidFill>
+                <a:latin typeface="Inter"/>
+              </a:rPr>
+              <a:t>realisation</a:t>
+            </a:r>
+            <a:r>
+              <a:rPr sz="1275" b="0" i="0" u="none" dirty="0">
+                <a:solidFill>
+                  <a:srgbClr val="4B5563"/>
+                </a:solidFill>
+                <a:latin typeface="Inter"/>
+              </a:rPr>
+              <a:t> — information discarded by the</a:t>
+            </a:r>
+            <a:r>
+              <a:rPr lang="en-US" sz="1275" b="0" i="0" u="none" dirty="0">
+                <a:solidFill>
+                  <a:srgbClr val="4B5563"/>
+                </a:solidFill>
+                <a:latin typeface="Inter"/>
+              </a:rPr>
+              <a:t>1203 -&gt; 15</a:t>
+            </a:r>
+            <a:r>
+              <a:rPr sz="1275" b="0" i="0" u="none" dirty="0">
+                <a:solidFill>
+                  <a:srgbClr val="4B5563"/>
+                </a:solidFill>
+                <a:latin typeface="Inter"/>
+              </a:rPr>
+              <a:t> projection.</a:t>
+            </a:r>
+          </a:p>
+        </p:txBody>
+      </p:sp>
+      <p:sp>
+        <p:nvSpPr>
+          <p:cNvPr id="15" name="TextBox 14"/>
+          <p:cNvSpPr txBox="1"/>
+          <p:nvPr/>
+        </p:nvSpPr>
+        <p:spPr>
+          <a:xfrm>
+            <a:off x="7108328" y="4539430"/>
+            <a:ext cx="3978771" cy="200025"/>
+          </a:xfrm>
+          <a:prstGeom prst="rect">
+            <a:avLst/>
+          </a:prstGeom>
+          <a:noFill/>
+        </p:spPr>
+        <p:txBody>
+          <a:bodyPr wrap="square" lIns="0" tIns="0" rIns="0" bIns="0" anchor="t">
+            <a:spAutoFit/>
+          </a:bodyPr>
+          <a:lstStyle/>
+          <a:p>
+            <a:pPr algn="l"/>
+            <a:r>
+              <a:rPr sz="1350" b="1" i="0" u="none">
+                <a:solidFill>
+                  <a:srgbClr val="009999"/>
+                </a:solidFill>
+                <a:latin typeface="Inter"/>
+              </a:rPr>
+              <a:t>EKF wins here</a:t>
+            </a:r>
+          </a:p>
+        </p:txBody>
+      </p:sp>
+      <p:sp>
+        <p:nvSpPr>
+          <p:cNvPr id="16" name="TextBox 15"/>
+          <p:cNvSpPr txBox="1"/>
+          <p:nvPr/>
+        </p:nvSpPr>
+        <p:spPr>
+          <a:xfrm>
+            <a:off x="7108328" y="4815655"/>
+            <a:ext cx="3978771" cy="685800"/>
+          </a:xfrm>
+          <a:prstGeom prst="rect">
+            <a:avLst/>
+          </a:prstGeom>
+          <a:noFill/>
+        </p:spPr>
+        <p:txBody>
+          <a:bodyPr wrap="square" lIns="0" tIns="0" rIns="0" bIns="0" anchor="t">
+            <a:spAutoFit/>
+          </a:bodyPr>
+          <a:lstStyle/>
+          <a:p>
+            <a:pPr algn="l">
+              <a:lnSpc>
+                <a:spcPts val="1800"/>
+              </a:lnSpc>
+            </a:pPr>
+            <a:r>
+              <a:rPr sz="1200" b="0" i="0" u="none">
+                <a:solidFill>
+                  <a:srgbClr val="4B5563"/>
+                </a:solidFill>
+                <a:latin typeface="Inter"/>
+              </a:rPr>
+              <a:t>by processing all 601 samples sequentially with an explicit noise model. </a:t>
+            </a:r>
+            <a:r>
+              <a:rPr sz="1200" b="1" i="0" u="none">
+                <a:solidFill>
+                  <a:srgbClr val="000028"/>
+                </a:solidFill>
+                <a:latin typeface="Inter"/>
+              </a:rPr>
+              <a:t>The limit is information, not training.</a:t>
+            </a:r>
           </a:p>
         </p:txBody>
       </p:sp>
       <p:pic>
         <p:nvPicPr>
-          <p:cNvPr id="7" name="Copied Picture 7">
+          <p:cNvPr id="14" name="Copied Picture 7">
             <a:extLst>
               <a:ext uri="{FF2B5EF4-FFF2-40B4-BE49-F238E27FC236}">
-                <a16:creationId xmlns:a16="http://schemas.microsoft.com/office/drawing/2014/main" id="{B311F591-449D-F658-283A-405022510CF0}"/>
+                <a16:creationId xmlns:a16="http://schemas.microsoft.com/office/drawing/2014/main" id="{0F86221C-32D6-DCF4-183F-D4A4103A7F20}"/>
               </a:ext>
             </a:extLst>
           </p:cNvPr>
@@ -12644,54 +14207,23 @@
           </a:prstGeom>
         </p:spPr>
       </p:pic>
-      <p:sp>
-        <p:nvSpPr>
-          <p:cNvPr id="8" name="Slide Number Placeholder 7">
-            <a:extLst>
-              <a:ext uri="{FF2B5EF4-FFF2-40B4-BE49-F238E27FC236}">
-                <a16:creationId xmlns:a16="http://schemas.microsoft.com/office/drawing/2014/main" id="{8D34DBEC-11E3-BC8C-7A36-A9208FFC4737}"/>
-              </a:ext>
-            </a:extLst>
-          </p:cNvPr>
-          <p:cNvSpPr>
-            <a:spLocks noGrp="1"/>
-          </p:cNvSpPr>
-          <p:nvPr>
-            <p:ph type="sldNum" sz="quarter" idx="12"/>
-          </p:nvPr>
-        </p:nvSpPr>
-        <p:spPr/>
-        <p:txBody>
-          <a:bodyPr/>
-          <a:lstStyle/>
-          <a:p>
-            <a:pPr algn="l"/>
-            <a:fld id="{C1FF6DA9-008F-8B48-92A6-B652298478BF}" type="slidenum">
-              <a:rPr lang="en-US" smtClean="0"/>
-              <a:pPr algn="l"/>
-              <a:t>23</a:t>
-            </a:fld>
-            <a:endParaRPr lang="en-US" dirty="0"/>
-          </a:p>
-        </p:txBody>
-      </p:sp>
     </p:spTree>
     <p:extLst>
       <p:ext uri="{BB962C8B-B14F-4D97-AF65-F5344CB8AC3E}">
-        <p14:creationId xmlns:p14="http://schemas.microsoft.com/office/powerpoint/2010/main" val="1451306204"/>
+        <p14:creationId xmlns:p14="http://schemas.microsoft.com/office/powerpoint/2010/main" val="634301853"/>
       </p:ext>
     </p:extLst>
   </p:cSld>
   <p:clrMapOvr>
     <a:masterClrMapping/>
   </p:clrMapOvr>
-  <mc:AlternateContent xmlns:mc="http://schemas.openxmlformats.org/markup-compatibility/2006" xmlns:p14="http://schemas.microsoft.com/office/powerpoint/2010/main">
-    <mc:Choice Requires="p14">
+  <mc:AlternateContent xmlns:mc="http://schemas.openxmlformats.org/markup-compatibility/2006">
+    <mc:Choice xmlns:p14="http://schemas.microsoft.com/office/powerpoint/2010/main" Requires="p14">
       <p:transition p14:dur="250">
         <p:fade/>
       </p:transition>
     </mc:Choice>
-    <mc:Fallback xmlns="">
+    <mc:Fallback>
       <p:transition>
         <p:fade/>
       </p:transition>
@@ -16189,14 +17721,20 @@
               </a:lnSpc>
             </a:pPr>
             <a:r>
-              <a:rPr sz="3000" b="1" i="0" u="none" dirty="0">
+              <a:rPr lang="en-GB" sz="3000" b="1" i="0" u="none" dirty="0">
                 <a:solidFill>
                   <a:schemeClr val="bg1"/>
                 </a:solidFill>
                 <a:latin typeface="Inter"/>
               </a:rPr>
-              <a:t>Physics-Motivated Features</a:t>
-            </a:r>
+              <a:t>What the Model Actually Sees</a:t>
+            </a:r>
+            <a:endParaRPr sz="3000" b="1" i="0" u="none" dirty="0">
+              <a:solidFill>
+                <a:schemeClr val="bg1"/>
+              </a:solidFill>
+              <a:latin typeface="Inter"/>
+            </a:endParaRPr>
           </a:p>
         </p:txBody>
       </p:sp>
@@ -17243,7 +18781,7 @@
           <p:nvPr>
             <p:extLst>
               <p:ext uri="{D42A27DB-BD31-4B8C-83A1-F6EECF244321}">
-                <p14:modId xmlns:p14="http://schemas.microsoft.com/office/powerpoint/2010/main" val="1881337082"/>
+                <p14:modId xmlns:p14="http://schemas.microsoft.com/office/powerpoint/2010/main" val="3833130307"/>
               </p:ext>
             </p:extLst>
           </p:nvPr>
@@ -17953,7 +19491,7 @@
                       <a:r>
                         <a:rPr sz="1350" b="0" i="0" u="none" dirty="0">
                           <a:solidFill>
-                            <a:srgbClr val="009999"/>
+                            <a:srgbClr val="FFC000"/>
                           </a:solidFill>
                           <a:latin typeface="Inter Medium"/>
                         </a:rPr>
@@ -20659,7 +22197,7 @@
 
 <file path=ppt/webextensions/taskpanes.xml><?xml version="1.0" encoding="utf-8"?>
 <wetp:taskpanes xmlns:wetp="http://schemas.microsoft.com/office/webextensions/taskpanes/2010/11">
-  <wetp:taskpane dockstate="right" visibility="0" width="700" row="0">
+  <wetp:taskpane dockstate="right" visibility="0" width="700" row="1">
     <wetp:webextensionref xmlns:r="http://schemas.openxmlformats.org/officeDocument/2006/relationships" r:id="rId1"/>
   </wetp:taskpane>
 </wetp:taskpanes>
